--- a/docs/course/discussions/讨论3.pptx
+++ b/docs/course/discussions/讨论3.pptx
@@ -353,7 +353,7 @@
           <a:p>
             <a:fld id="{B7268E1E-0E44-426D-905E-8AD9B19D2182}" type="datetimeFigureOut">
               <a:rPr lang="cs-CZ" smtClean="0"/>
-              <a:t>29.09.2026</a:t>
+              <a:t>06.10.2026</a:t>
             </a:fld>
             <a:endParaRPr lang="cs-CZ"/>
           </a:p>
@@ -17627,7 +17627,7 @@
           <p:nvPr>
             <p:extLst>
               <p:ext uri="{D42A27DB-BD31-4B8C-83A1-F6EECF244321}">
-                <p14:modId xmlns:p14="http://schemas.microsoft.com/office/powerpoint/2010/main" val="2759248743"/>
+                <p14:modId xmlns:p14="http://schemas.microsoft.com/office/powerpoint/2010/main" val="4091898736"/>
               </p:ext>
             </p:extLst>
           </p:nvPr>
@@ -18002,18 +18002,17 @@
                         <a:defRPr/>
                       </a:pPr>
                       <a:r>
-                        <a:rPr lang="en-US" sz="1100" b="0" i="0" u="none" strike="noStrike">
+                        <a:rPr lang="en-US" sz="1100" b="0" i="0" u="none" strike="noStrike" dirty="0">
                           <a:solidFill>
                             <a:srgbClr val="2B2F36"/>
                           </a:solidFill>
                           <a:latin typeface="Noto Sans SC"/>
                           <a:ea typeface="Noto Sans SC"/>
-                          <a:cs typeface="Noto Sans SC"/>
                           <a:sym typeface="Noto Sans SC"/>
                         </a:rPr>
-                        <a:t>3</a:t>
+                        <a:t>8</a:t>
                       </a:r>
-                      <a:endParaRPr lang="en-US" sz="1100"/>
+                      <a:endParaRPr lang="en-US" sz="1100" dirty="0"/>
                     </a:p>
                   </a:txBody>
                   <a:tcPr marL="101600" marR="101600" marT="69850" marB="69850" anchor="ctr">
@@ -18177,18 +18176,17 @@
                         <a:defRPr/>
                       </a:pPr>
                       <a:r>
-                        <a:rPr lang="en-US" sz="1100" b="0" i="0" u="none" strike="noStrike">
+                        <a:rPr lang="en-US" sz="1100" b="0" i="0" u="none" strike="noStrike" dirty="0">
                           <a:solidFill>
                             <a:srgbClr val="2B2F36"/>
                           </a:solidFill>
                           <a:latin typeface="Noto Sans SC"/>
                           <a:ea typeface="Noto Sans SC"/>
-                          <a:cs typeface="Noto Sans SC"/>
                           <a:sym typeface="Noto Sans SC"/>
                         </a:rPr>
-                        <a:t>3</a:t>
+                        <a:t>8</a:t>
                       </a:r>
-                      <a:endParaRPr lang="en-US" sz="1100"/>
+                      <a:endParaRPr lang="en-US" sz="1100" dirty="0"/>
                     </a:p>
                   </a:txBody>
                   <a:tcPr marL="101600" marR="101600" marT="69850" marB="69850" anchor="ctr">
@@ -18352,18 +18350,17 @@
                         <a:defRPr/>
                       </a:pPr>
                       <a:r>
-                        <a:rPr lang="en-US" sz="1100" b="0" i="0" u="none" strike="noStrike">
+                        <a:rPr lang="en-US" sz="1100" b="0" i="0" u="none" strike="noStrike" dirty="0">
                           <a:solidFill>
                             <a:srgbClr val="2B2F36"/>
                           </a:solidFill>
                           <a:latin typeface="Noto Sans SC"/>
                           <a:ea typeface="Noto Sans SC"/>
-                          <a:cs typeface="Noto Sans SC"/>
                           <a:sym typeface="Noto Sans SC"/>
                         </a:rPr>
-                        <a:t>5</a:t>
+                        <a:t>8</a:t>
                       </a:r>
-                      <a:endParaRPr lang="en-US" sz="1100"/>
+                      <a:endParaRPr lang="en-US" sz="1100" dirty="0"/>
                     </a:p>
                   </a:txBody>
                   <a:tcPr marL="101600" marR="101600" marT="69850" marB="69850" anchor="ctr">
@@ -18527,7 +18524,7 @@
                         <a:defRPr/>
                       </a:pPr>
                       <a:r>
-                        <a:rPr lang="en-US" sz="1100" b="0" i="0" u="none" strike="noStrike">
+                        <a:rPr lang="en-US" sz="1100" b="0" i="0" u="none" strike="noStrike" dirty="0">
                           <a:solidFill>
                             <a:srgbClr val="2B2F36"/>
                           </a:solidFill>
@@ -18538,7 +18535,7 @@
                         </a:rPr>
                         <a:t>2</a:t>
                       </a:r>
-                      <a:endParaRPr lang="en-US" sz="1100"/>
+                      <a:endParaRPr lang="en-US" sz="1100" dirty="0"/>
                     </a:p>
                   </a:txBody>
                   <a:tcPr marL="101600" marR="101600" marT="69850" marB="69850" anchor="ctr">
@@ -18702,18 +18699,17 @@
                         <a:defRPr/>
                       </a:pPr>
                       <a:r>
-                        <a:rPr lang="en-US" sz="1100" b="0" i="0" u="none" strike="noStrike">
+                        <a:rPr lang="en-US" sz="1100" b="0" i="0" u="none" strike="noStrike" dirty="0">
                           <a:solidFill>
                             <a:srgbClr val="2B2F36"/>
                           </a:solidFill>
                           <a:latin typeface="Noto Sans SC"/>
                           <a:ea typeface="Noto Sans SC"/>
-                          <a:cs typeface="Noto Sans SC"/>
                           <a:sym typeface="Noto Sans SC"/>
                         </a:rPr>
-                        <a:t>3</a:t>
+                        <a:t>5</a:t>
                       </a:r>
-                      <a:endParaRPr lang="en-US" sz="1100"/>
+                      <a:endParaRPr lang="en-US" sz="1100" dirty="0"/>
                     </a:p>
                   </a:txBody>
                   <a:tcPr marL="101600" marR="101600" marT="69850" marB="69850" anchor="ctr">
@@ -18877,18 +18873,17 @@
                         <a:defRPr/>
                       </a:pPr>
                       <a:r>
-                        <a:rPr lang="en-US" sz="1100" b="0" i="0" u="none" strike="noStrike">
+                        <a:rPr lang="en-US" sz="1100" b="0" i="0" u="none" strike="noStrike" dirty="0">
                           <a:solidFill>
                             <a:srgbClr val="2B2F36"/>
                           </a:solidFill>
                           <a:latin typeface="Noto Sans SC"/>
                           <a:ea typeface="Noto Sans SC"/>
-                          <a:cs typeface="Noto Sans SC"/>
                           <a:sym typeface="Noto Sans SC"/>
                         </a:rPr>
-                        <a:t>3</a:t>
+                        <a:t>5</a:t>
                       </a:r>
-                      <a:endParaRPr lang="en-US" sz="1100"/>
+                      <a:endParaRPr lang="en-US" sz="1100" dirty="0"/>
                     </a:p>
                   </a:txBody>
                   <a:tcPr marL="101600" marR="101600" marT="69850" marB="69850" anchor="ctr">
@@ -19052,7 +19047,7 @@
                         <a:defRPr/>
                       </a:pPr>
                       <a:r>
-                        <a:rPr lang="en-US" sz="1100" b="0" i="0" u="none" strike="noStrike">
+                        <a:rPr lang="en-US" sz="1100" b="0" i="0" u="none" strike="noStrike" dirty="0">
                           <a:solidFill>
                             <a:srgbClr val="2B2F36"/>
                           </a:solidFill>
@@ -19063,7 +19058,7 @@
                         </a:rPr>
                         <a:t>5</a:t>
                       </a:r>
-                      <a:endParaRPr lang="en-US" sz="1100"/>
+                      <a:endParaRPr lang="en-US" sz="1100" dirty="0"/>
                     </a:p>
                   </a:txBody>
                   <a:tcPr marL="101600" marR="101600" marT="69850" marB="69850" anchor="ctr">
@@ -19227,18 +19222,17 @@
                         <a:defRPr/>
                       </a:pPr>
                       <a:r>
-                        <a:rPr lang="en-US" sz="1100" b="0" i="0" u="none" strike="noStrike">
+                        <a:rPr lang="en-US" sz="1100" b="0" i="0" u="none" strike="noStrike" dirty="0">
                           <a:solidFill>
                             <a:srgbClr val="2B2F36"/>
                           </a:solidFill>
                           <a:latin typeface="Noto Sans SC"/>
                           <a:ea typeface="Noto Sans SC"/>
-                          <a:cs typeface="Noto Sans SC"/>
                           <a:sym typeface="Noto Sans SC"/>
                         </a:rPr>
-                        <a:t>2</a:t>
+                        <a:t>3</a:t>
                       </a:r>
-                      <a:endParaRPr lang="en-US" sz="1100"/>
+                      <a:endParaRPr lang="en-US" sz="1100" dirty="0"/>
                     </a:p>
                   </a:txBody>
                   <a:tcPr marL="101600" marR="101600" marT="69850" marB="69850" anchor="ctr">
@@ -19402,18 +19396,17 @@
                         <a:defRPr/>
                       </a:pPr>
                       <a:r>
-                        <a:rPr lang="en-US" sz="1100" b="0" i="0" u="none" strike="noStrike">
+                        <a:rPr lang="en-US" sz="1100" b="0" i="0" u="none" strike="noStrike" dirty="0">
                           <a:solidFill>
                             <a:srgbClr val="2B2F36"/>
                           </a:solidFill>
                           <a:latin typeface="Noto Sans SC"/>
                           <a:ea typeface="Noto Sans SC"/>
-                          <a:cs typeface="Noto Sans SC"/>
                           <a:sym typeface="Noto Sans SC"/>
                         </a:rPr>
-                        <a:t>2</a:t>
+                        <a:t>3</a:t>
                       </a:r>
-                      <a:endParaRPr lang="en-US" sz="1100"/>
+                      <a:endParaRPr lang="en-US" sz="1100" dirty="0"/>
                     </a:p>
                   </a:txBody>
                   <a:tcPr marL="101600" marR="101600" marT="69850" marB="69850" anchor="ctr">
@@ -19577,18 +19570,17 @@
                         <a:defRPr/>
                       </a:pPr>
                       <a:r>
-                        <a:rPr lang="en-US" sz="1100" b="0" i="0" u="none" strike="noStrike">
+                        <a:rPr lang="en-US" sz="1100" b="0" i="0" u="none" strike="noStrike" dirty="0">
                           <a:solidFill>
                             <a:srgbClr val="2B2F36"/>
                           </a:solidFill>
                           <a:latin typeface="Noto Sans SC"/>
                           <a:ea typeface="Noto Sans SC"/>
-                          <a:cs typeface="Noto Sans SC"/>
                           <a:sym typeface="Noto Sans SC"/>
                         </a:rPr>
-                        <a:t>2</a:t>
+                        <a:t>3</a:t>
                       </a:r>
-                      <a:endParaRPr lang="en-US" sz="1100"/>
+                      <a:endParaRPr lang="en-US" sz="1100" dirty="0"/>
                     </a:p>
                   </a:txBody>
                   <a:tcPr marL="101600" marR="101600" marT="69850" marB="69850" anchor="ctr">
@@ -20326,6 +20318,41 @@
           </a:p>
         </p:txBody>
       </p:sp>
+      <p:sp>
+        <p:nvSpPr>
+          <p:cNvPr id="5" name="文本框 4">
+            <a:extLst>
+              <a:ext uri="{FF2B5EF4-FFF2-40B4-BE49-F238E27FC236}">
+                <a16:creationId xmlns:a16="http://schemas.microsoft.com/office/drawing/2014/main" id="{C7F426C4-EA17-1FC5-45EB-C0637509F014}"/>
+              </a:ext>
+            </a:extLst>
+          </p:cNvPr>
+          <p:cNvSpPr txBox="1"/>
+          <p:nvPr/>
+        </p:nvSpPr>
+        <p:spPr>
+          <a:xfrm>
+            <a:off x="1016000" y="5917721"/>
+            <a:ext cx="3057247" cy="307777"/>
+          </a:xfrm>
+          <a:prstGeom prst="rect">
+            <a:avLst/>
+          </a:prstGeom>
+          <a:noFill/>
+        </p:spPr>
+        <p:txBody>
+          <a:bodyPr wrap="none" rtlCol="0">
+            <a:spAutoFit/>
+          </a:bodyPr>
+          <a:lstStyle/>
+          <a:p>
+            <a:r>
+              <a:rPr lang="zh-CN" altLang="en-US" dirty="0"/>
+              <a:t>篇幅原因，此处仅以生成检索组为例</a:t>
+            </a:r>
+          </a:p>
+        </p:txBody>
+      </p:sp>
     </p:spTree>
   </p:cSld>
   <p:clrMapOvr>
@@ -21545,7 +21572,7 @@
                 <a:cs typeface="Noto Sans SC"/>
                 <a:sym typeface="Noto Sans SC"/>
               </a:rPr>
-              <a:t>任务分工概述</a:t>
+              <a:t>首轮迭代任务分工概述</a:t>
             </a:r>
             <a:endParaRPr lang="en-US" sz="1100" dirty="0"/>
           </a:p>
@@ -21557,11 +21584,17 @@
           <p:cNvGraphicFramePr>
             <a:graphicFrameLocks noGrp="1"/>
           </p:cNvGraphicFramePr>
-          <p:nvPr/>
+          <p:nvPr>
+            <p:extLst>
+              <p:ext uri="{D42A27DB-BD31-4B8C-83A1-F6EECF244321}">
+                <p14:modId xmlns:p14="http://schemas.microsoft.com/office/powerpoint/2010/main" val="22609273"/>
+              </p:ext>
+            </p:extLst>
+          </p:nvPr>
         </p:nvGraphicFramePr>
         <p:xfrm>
           <a:off x="1016000" y="1905000"/>
-          <a:ext cx="10160000" cy="3683000"/>
+          <a:ext cx="10160000" cy="2590800"/>
         </p:xfrm>
         <a:graphic>
           <a:graphicData uri="http://schemas.openxmlformats.org/drawingml/2006/table">
@@ -21887,18 +21920,17 @@
                         <a:defRPr/>
                       </a:pPr>
                       <a:r>
-                        <a:rPr lang="en-US" sz="1100" b="0" i="0" u="none" strike="noStrike">
+                        <a:rPr lang="en-US" sz="1100" b="0" i="0" u="none" strike="noStrike" dirty="0">
                           <a:solidFill>
                             <a:srgbClr val="2B2F36"/>
                           </a:solidFill>
                           <a:latin typeface="Noto Sans SC"/>
                           <a:ea typeface="Noto Sans SC"/>
-                          <a:cs typeface="Noto Sans SC"/>
                           <a:sym typeface="Noto Sans SC"/>
                         </a:rPr>
-                        <a:t>5</a:t>
+                        <a:t>18</a:t>
                       </a:r>
-                      <a:endParaRPr lang="en-US" sz="1100"/>
+                      <a:endParaRPr lang="en-US" sz="1100" dirty="0"/>
                     </a:p>
                   </a:txBody>
                   <a:tcPr marL="101600" marR="101600" marT="101600" marB="101600" anchor="ctr">
@@ -22062,18 +22094,17 @@
                         <a:defRPr/>
                       </a:pPr>
                       <a:r>
-                        <a:rPr lang="en-US" sz="1100" b="0" i="0" u="none" strike="noStrike">
+                        <a:rPr lang="en-US" sz="1100" b="0" i="0" u="none" strike="noStrike" dirty="0">
                           <a:solidFill>
                             <a:srgbClr val="2B2F36"/>
                           </a:solidFill>
                           <a:latin typeface="Noto Sans SC"/>
                           <a:ea typeface="Noto Sans SC"/>
-                          <a:cs typeface="Noto Sans SC"/>
                           <a:sym typeface="Noto Sans SC"/>
                         </a:rPr>
-                        <a:t>8</a:t>
+                        <a:t>32</a:t>
                       </a:r>
-                      <a:endParaRPr lang="en-US" sz="1100"/>
+                      <a:endParaRPr lang="en-US" sz="1100" dirty="0"/>
                     </a:p>
                   </a:txBody>
                   <a:tcPr marL="101600" marR="101600" marT="101600" marB="101600" anchor="ctr">
@@ -22104,7 +22135,7 @@
                         <a:defRPr/>
                       </a:pPr>
                       <a:r>
-                        <a:rPr lang="en-US" sz="1100" b="0" i="0" u="none" strike="noStrike">
+                        <a:rPr lang="en-US" sz="1100" b="0" i="0" u="none" strike="noStrike" dirty="0" err="1">
                           <a:solidFill>
                             <a:srgbClr val="3C4655"/>
                           </a:solidFill>
@@ -22113,9 +22144,21 @@
                           <a:cs typeface="Noto Sans SC"/>
                           <a:sym typeface="Noto Sans SC"/>
                         </a:rPr>
-                        <a:t>处理图片上传和格式检查；从单张图里读尺寸；多张图分组一起生成，尺寸错误及时报错。</a:t>
+                        <a:t>处理图片上传和格式检查；从单张图里读尺寸；多张图分组一起生成，尺寸错误及时报错</a:t>
                       </a:r>
-                      <a:endParaRPr lang="en-US" sz="1100"/>
+                      <a:r>
+                        <a:rPr lang="en-US" sz="1100" b="0" i="0" u="none" strike="noStrike" dirty="0">
+                          <a:solidFill>
+                            <a:srgbClr val="3C4655"/>
+                          </a:solidFill>
+                          <a:latin typeface="Noto Sans SC"/>
+                          <a:ea typeface="Noto Sans SC"/>
+                          <a:cs typeface="Noto Sans SC"/>
+                          <a:sym typeface="Noto Sans SC"/>
+                        </a:rPr>
+                        <a:t>。</a:t>
+                      </a:r>
+                      <a:endParaRPr lang="en-US" sz="1100" dirty="0"/>
                     </a:p>
                   </a:txBody>
                   <a:tcPr marL="101600" marR="0" marT="101600" marB="101600" anchor="ctr">
@@ -22153,357 +22196,7 @@
                         <a:defRPr/>
                       </a:pPr>
                       <a:r>
-                        <a:rPr lang="en-US" sz="1200" b="1" i="0" u="none" strike="noStrike">
-                          <a:solidFill>
-                            <a:srgbClr val="2B2F36"/>
-                          </a:solidFill>
-                          <a:latin typeface="Noto Sans SC"/>
-                          <a:ea typeface="Noto Sans SC"/>
-                          <a:cs typeface="Noto Sans SC"/>
-                          <a:sym typeface="Noto Sans SC"/>
-                        </a:rPr>
-                        <a:t>侯永森</a:t>
-                      </a:r>
-                      <a:endParaRPr lang="en-US" sz="1100"/>
-                    </a:p>
-                  </a:txBody>
-                  <a:tcPr marL="101600" marR="101600" marT="101600" marB="101600" anchor="ctr">
-                    <a:lnL>
-                      <a:noFill/>
-                    </a:lnL>
-                    <a:lnR>
-                      <a:noFill/>
-                    </a:lnR>
-                    <a:lnT>
-                      <a:noFill/>
-                    </a:lnT>
-                    <a:lnB>
-                      <a:noFill/>
-                    </a:lnB>
-                    <a:noFill/>
-                  </a:tcPr>
-                </a:tc>
-                <a:tc>
-                  <a:txBody>
-                    <a:bodyPr/>
-                    <a:lstStyle/>
-                    <a:p>
-                      <a:pPr marL="0" indent="0" algn="ctr">
-                        <a:lnSpc>
-                          <a:spcPct val="100000"/>
-                        </a:lnSpc>
-                        <a:defRPr/>
-                      </a:pPr>
-                      <a:r>
-                        <a:rPr lang="en-US" sz="1100" b="0" i="0" u="none" strike="noStrike">
-                          <a:solidFill>
-                            <a:srgbClr val="5A6473"/>
-                          </a:solidFill>
-                          <a:latin typeface="Noto Sans SC"/>
-                          <a:ea typeface="Noto Sans SC"/>
-                          <a:cs typeface="Noto Sans SC"/>
-                          <a:sym typeface="Noto Sans SC"/>
-                        </a:rPr>
-                        <a:t>US05 · US08</a:t>
-                      </a:r>
-                      <a:endParaRPr lang="en-US" sz="1100"/>
-                    </a:p>
-                  </a:txBody>
-                  <a:tcPr marL="101600" marR="101600" marT="101600" marB="101600" anchor="ctr">
-                    <a:lnL>
-                      <a:noFill/>
-                    </a:lnL>
-                    <a:lnR>
-                      <a:noFill/>
-                    </a:lnR>
-                    <a:lnT>
-                      <a:noFill/>
-                    </a:lnT>
-                    <a:lnB>
-                      <a:noFill/>
-                    </a:lnB>
-                    <a:noFill/>
-                  </a:tcPr>
-                </a:tc>
-                <a:tc>
-                  <a:txBody>
-                    <a:bodyPr/>
-                    <a:lstStyle/>
-                    <a:p>
-                      <a:pPr marL="0" indent="0" algn="ctr">
-                        <a:lnSpc>
-                          <a:spcPct val="100000"/>
-                        </a:lnSpc>
-                        <a:defRPr/>
-                      </a:pPr>
-                      <a:r>
-                        <a:rPr lang="en-US" sz="1100" b="0" i="0" u="none" strike="noStrike">
-                          <a:solidFill>
-                            <a:srgbClr val="2B2F36"/>
-                          </a:solidFill>
-                          <a:latin typeface="Noto Sans SC"/>
-                          <a:ea typeface="Noto Sans SC"/>
-                          <a:cs typeface="Noto Sans SC"/>
-                          <a:sym typeface="Noto Sans SC"/>
-                        </a:rPr>
-                        <a:t>5</a:t>
-                      </a:r>
-                      <a:endParaRPr lang="en-US" sz="1100"/>
-                    </a:p>
-                  </a:txBody>
-                  <a:tcPr marL="101600" marR="101600" marT="101600" marB="101600" anchor="ctr">
-                    <a:lnL>
-                      <a:noFill/>
-                    </a:lnL>
-                    <a:lnR>
-                      <a:noFill/>
-                    </a:lnR>
-                    <a:lnT>
-                      <a:noFill/>
-                    </a:lnT>
-                    <a:lnB>
-                      <a:noFill/>
-                    </a:lnB>
-                    <a:noFill/>
-                  </a:tcPr>
-                </a:tc>
-                <a:tc>
-                  <a:txBody>
-                    <a:bodyPr/>
-                    <a:lstStyle/>
-                    <a:p>
-                      <a:pPr marL="0" indent="0" algn="l">
-                        <a:lnSpc>
-                          <a:spcPct val="100000"/>
-                        </a:lnSpc>
-                        <a:defRPr/>
-                      </a:pPr>
-                      <a:r>
-                        <a:rPr lang="en-US" sz="1100" b="0" i="0" u="none" strike="noStrike">
-                          <a:solidFill>
-                            <a:srgbClr val="3C4655"/>
-                          </a:solidFill>
-                          <a:latin typeface="Noto Sans SC"/>
-                          <a:ea typeface="Noto Sans SC"/>
-                          <a:cs typeface="Noto Sans SC"/>
-                          <a:sym typeface="Noto Sans SC"/>
-                        </a:rPr>
-                        <a:t>先整理一小批测试零件和标签；做文字搜索、按相关度排序；显示零件来源，缺失则提示。</a:t>
-                      </a:r>
-                      <a:endParaRPr lang="en-US" sz="1100"/>
-                    </a:p>
-                  </a:txBody>
-                  <a:tcPr marL="101600" marR="0" marT="101600" marB="101600" anchor="ctr">
-                    <a:lnL>
-                      <a:noFill/>
-                    </a:lnL>
-                    <a:lnR>
-                      <a:noFill/>
-                    </a:lnR>
-                    <a:lnT>
-                      <a:noFill/>
-                    </a:lnT>
-                    <a:lnB>
-                      <a:noFill/>
-                    </a:lnB>
-                    <a:noFill/>
-                  </a:tcPr>
-                </a:tc>
-                <a:extLst>
-                  <a:ext uri="{0D108BD9-81ED-4DB2-BD59-A6C34878D82A}">
-                    <a16:rowId xmlns:a16="http://schemas.microsoft.com/office/drawing/2014/main" val="10003"/>
-                  </a:ext>
-                </a:extLst>
-              </a:tr>
-              <a:tr h="546100">
-                <a:tc>
-                  <a:txBody>
-                    <a:bodyPr/>
-                    <a:lstStyle/>
-                    <a:p>
-                      <a:pPr marL="0" indent="0" algn="ctr">
-                        <a:lnSpc>
-                          <a:spcPct val="100000"/>
-                        </a:lnSpc>
-                        <a:defRPr/>
-                      </a:pPr>
-                      <a:r>
-                        <a:rPr lang="en-US" sz="1200" b="1" i="0" u="none" strike="noStrike">
-                          <a:solidFill>
-                            <a:srgbClr val="2B2F36"/>
-                          </a:solidFill>
-                          <a:latin typeface="Noto Sans SC"/>
-                          <a:ea typeface="Noto Sans SC"/>
-                          <a:cs typeface="Noto Sans SC"/>
-                          <a:sym typeface="Noto Sans SC"/>
-                        </a:rPr>
-                        <a:t>庞佳泽</a:t>
-                      </a:r>
-                      <a:endParaRPr lang="en-US" sz="1100"/>
-                    </a:p>
-                  </a:txBody>
-                  <a:tcPr marL="101600" marR="101600" marT="101600" marB="101600" anchor="ctr">
-                    <a:lnL>
-                      <a:noFill/>
-                    </a:lnL>
-                    <a:lnR>
-                      <a:noFill/>
-                    </a:lnR>
-                    <a:lnT>
-                      <a:noFill/>
-                    </a:lnT>
-                    <a:lnB>
-                      <a:noFill/>
-                    </a:lnB>
-                    <a:noFill/>
-                  </a:tcPr>
-                </a:tc>
-                <a:tc>
-                  <a:txBody>
-                    <a:bodyPr/>
-                    <a:lstStyle/>
-                    <a:p>
-                      <a:pPr marL="0" indent="0" algn="ctr">
-                        <a:lnSpc>
-                          <a:spcPct val="100000"/>
-                        </a:lnSpc>
-                        <a:defRPr/>
-                      </a:pPr>
-                      <a:r>
-                        <a:rPr lang="en-US" sz="1100" b="0" i="0" u="none" strike="noStrike">
-                          <a:solidFill>
-                            <a:srgbClr val="5A6473"/>
-                          </a:solidFill>
-                          <a:latin typeface="Noto Sans SC"/>
-                          <a:ea typeface="Noto Sans SC"/>
-                          <a:cs typeface="Noto Sans SC"/>
-                          <a:sym typeface="Noto Sans SC"/>
-                        </a:rPr>
-                        <a:t>US06 · US07</a:t>
-                      </a:r>
-                      <a:endParaRPr lang="en-US" sz="1100"/>
-                    </a:p>
-                  </a:txBody>
-                  <a:tcPr marL="101600" marR="101600" marT="101600" marB="101600" anchor="ctr">
-                    <a:lnL>
-                      <a:noFill/>
-                    </a:lnL>
-                    <a:lnR>
-                      <a:noFill/>
-                    </a:lnR>
-                    <a:lnT>
-                      <a:noFill/>
-                    </a:lnT>
-                    <a:lnB>
-                      <a:noFill/>
-                    </a:lnB>
-                    <a:noFill/>
-                  </a:tcPr>
-                </a:tc>
-                <a:tc>
-                  <a:txBody>
-                    <a:bodyPr/>
-                    <a:lstStyle/>
-                    <a:p>
-                      <a:pPr marL="0" indent="0" algn="ctr">
-                        <a:lnSpc>
-                          <a:spcPct val="100000"/>
-                        </a:lnSpc>
-                        <a:defRPr/>
-                      </a:pPr>
-                      <a:r>
-                        <a:rPr lang="en-US" sz="1100" b="0" i="0" u="none" strike="noStrike">
-                          <a:solidFill>
-                            <a:srgbClr val="2B2F36"/>
-                          </a:solidFill>
-                          <a:latin typeface="Noto Sans SC"/>
-                          <a:ea typeface="Noto Sans SC"/>
-                          <a:cs typeface="Noto Sans SC"/>
-                          <a:sym typeface="Noto Sans SC"/>
-                        </a:rPr>
-                        <a:t>8</a:t>
-                      </a:r>
-                      <a:endParaRPr lang="en-US" sz="1100"/>
-                    </a:p>
-                  </a:txBody>
-                  <a:tcPr marL="101600" marR="101600" marT="101600" marB="101600" anchor="ctr">
-                    <a:lnL>
-                      <a:noFill/>
-                    </a:lnL>
-                    <a:lnR>
-                      <a:noFill/>
-                    </a:lnR>
-                    <a:lnT>
-                      <a:noFill/>
-                    </a:lnT>
-                    <a:lnB>
-                      <a:noFill/>
-                    </a:lnB>
-                    <a:noFill/>
-                  </a:tcPr>
-                </a:tc>
-                <a:tc>
-                  <a:txBody>
-                    <a:bodyPr/>
-                    <a:lstStyle/>
-                    <a:p>
-                      <a:pPr marL="0" indent="0" algn="l">
-                        <a:lnSpc>
-                          <a:spcPct val="100000"/>
-                        </a:lnSpc>
-                        <a:defRPr/>
-                      </a:pPr>
-                      <a:r>
-                        <a:rPr lang="en-US" sz="1100" b="0" i="0" u="none" strike="noStrike">
-                          <a:solidFill>
-                            <a:srgbClr val="3C4655"/>
-                          </a:solidFill>
-                          <a:latin typeface="Noto Sans SC"/>
-                          <a:ea typeface="Noto Sans SC"/>
-                          <a:cs typeface="Noto Sans SC"/>
-                          <a:sym typeface="Noto Sans SC"/>
-                        </a:rPr>
-                        <a:t>检查图片格式，按图片特征查找相似零件；多图一并搜索；发现不是同一个零件就提示，换图时清理上次搜索结果。</a:t>
-                      </a:r>
-                      <a:endParaRPr lang="en-US" sz="1100"/>
-                    </a:p>
-                  </a:txBody>
-                  <a:tcPr marL="101600" marR="0" marT="101600" marB="101600" anchor="ctr">
-                    <a:lnL>
-                      <a:noFill/>
-                    </a:lnL>
-                    <a:lnR>
-                      <a:noFill/>
-                    </a:lnR>
-                    <a:lnT>
-                      <a:noFill/>
-                    </a:lnT>
-                    <a:lnB>
-                      <a:noFill/>
-                    </a:lnB>
-                    <a:noFill/>
-                  </a:tcPr>
-                </a:tc>
-                <a:extLst>
-                  <a:ext uri="{0D108BD9-81ED-4DB2-BD59-A6C34878D82A}">
-                    <a16:rowId xmlns:a16="http://schemas.microsoft.com/office/drawing/2014/main" val="10004"/>
-                  </a:ext>
-                </a:extLst>
-              </a:tr>
-              <a:tr h="546100">
-                <a:tc>
-                  <a:txBody>
-                    <a:bodyPr/>
-                    <a:lstStyle/>
-                    <a:p>
-                      <a:pPr marL="0" indent="0" algn="ctr">
-                        <a:lnSpc>
-                          <a:spcPct val="100000"/>
-                        </a:lnSpc>
-                        <a:defRPr/>
-                      </a:pPr>
-                      <a:r>
-                        <a:rPr lang="en-US" sz="1200" b="1" i="0" u="none" strike="noStrike">
+                        <a:rPr lang="en-US" sz="1200" b="1" i="0" u="none" strike="noStrike" dirty="0" err="1">
                           <a:solidFill>
                             <a:srgbClr val="2B2F36"/>
                           </a:solidFill>
@@ -22514,7 +22207,7 @@
                         </a:rPr>
                         <a:t>余智皓</a:t>
                       </a:r>
-                      <a:endParaRPr lang="en-US" sz="1100"/>
+                      <a:endParaRPr lang="en-US" sz="1100" dirty="0"/>
                     </a:p>
                   </a:txBody>
                   <a:tcPr marL="101600" marR="101600" marT="101600" marB="101600" anchor="ctr">
@@ -22587,18 +22280,17 @@
                         <a:defRPr/>
                       </a:pPr>
                       <a:r>
-                        <a:rPr lang="en-US" sz="1100" b="0" i="0" u="none" strike="noStrike">
+                        <a:rPr lang="en-US" sz="1100" b="0" i="0" u="none" strike="noStrike" dirty="0">
                           <a:solidFill>
                             <a:srgbClr val="2B2F36"/>
                           </a:solidFill>
                           <a:latin typeface="Noto Sans SC"/>
                           <a:ea typeface="Noto Sans SC"/>
-                          <a:cs typeface="Noto Sans SC"/>
                           <a:sym typeface="Noto Sans SC"/>
                         </a:rPr>
-                        <a:t>7</a:t>
+                        <a:t>3</a:t>
                       </a:r>
-                      <a:endParaRPr lang="en-US" sz="1100"/>
+                      <a:endParaRPr lang="en-US" sz="1100" dirty="0"/>
                     </a:p>
                   </a:txBody>
                   <a:tcPr marL="101600" marR="101600" marT="101600" marB="101600" anchor="ctr">
@@ -22629,7 +22321,7 @@
                         <a:defRPr/>
                       </a:pPr>
                       <a:r>
-                        <a:rPr lang="en-US" sz="1100" b="0" i="0" u="none" strike="noStrike">
+                        <a:rPr lang="en-US" sz="1100" b="0" i="0" u="none" strike="noStrike" dirty="0" err="1">
                           <a:solidFill>
                             <a:srgbClr val="3C4655"/>
                           </a:solidFill>
@@ -22638,9 +22330,21 @@
                           <a:cs typeface="Noto Sans SC"/>
                           <a:sym typeface="Noto Sans SC"/>
                         </a:rPr>
-                        <a:t>显示尺寸规格和版本号；准备几个几何对的、错的样例，检查模型是不是单一实体、有没有开口。</a:t>
+                        <a:t>显示尺寸规格和版本号；准备几个几何对的、错的样例，检查模型是不是单一实体、有没有开口</a:t>
                       </a:r>
-                      <a:endParaRPr lang="en-US" sz="1100"/>
+                      <a:r>
+                        <a:rPr lang="en-US" sz="1100" b="0" i="0" u="none" strike="noStrike" dirty="0">
+                          <a:solidFill>
+                            <a:srgbClr val="3C4655"/>
+                          </a:solidFill>
+                          <a:latin typeface="Noto Sans SC"/>
+                          <a:ea typeface="Noto Sans SC"/>
+                          <a:cs typeface="Noto Sans SC"/>
+                          <a:sym typeface="Noto Sans SC"/>
+                        </a:rPr>
+                        <a:t>。</a:t>
+                      </a:r>
+                      <a:endParaRPr lang="en-US" sz="1100" dirty="0"/>
                     </a:p>
                   </a:txBody>
                   <a:tcPr marL="101600" marR="0" marT="101600" marB="101600" anchor="ctr">
@@ -22762,7 +22466,7 @@
                         <a:defRPr/>
                       </a:pPr>
                       <a:r>
-                        <a:rPr lang="en-US" sz="1100" b="0" i="0" u="none" strike="noStrike">
+                        <a:rPr lang="en-US" sz="1100" b="0" i="0" u="none" strike="noStrike" dirty="0">
                           <a:solidFill>
                             <a:srgbClr val="2B2F36"/>
                           </a:solidFill>
@@ -22773,7 +22477,7 @@
                         </a:rPr>
                         <a:t>5</a:t>
                       </a:r>
-                      <a:endParaRPr lang="en-US" sz="1100"/>
+                      <a:endParaRPr lang="en-US" sz="1100" dirty="0"/>
                     </a:p>
                   </a:txBody>
                   <a:tcPr marL="101600" marR="101600" marT="101600" marB="101600" anchor="ctr">

--- a/docs/course/discussions/讨论3.pptx
+++ b/docs/course/discussions/讨论3.pptx
@@ -6,7 +6,7 @@
     <p:sldMasterId id="2147483660" r:id="rId2"/>
   </p:sldMasterIdLst>
   <p:notesMasterIdLst>
-    <p:notesMasterId r:id="rId14"/>
+    <p:notesMasterId r:id="rId15"/>
   </p:notesMasterIdLst>
   <p:sldIdLst>
     <p:sldId id="256" r:id="rId3"/>
@@ -17,9 +17,10 @@
     <p:sldId id="261" r:id="rId8"/>
     <p:sldId id="262" r:id="rId9"/>
     <p:sldId id="263" r:id="rId10"/>
-    <p:sldId id="264" r:id="rId11"/>
-    <p:sldId id="267" r:id="rId12"/>
-    <p:sldId id="265" r:id="rId13"/>
+    <p:sldId id="268" r:id="rId11"/>
+    <p:sldId id="264" r:id="rId12"/>
+    <p:sldId id="267" r:id="rId13"/>
+    <p:sldId id="265" r:id="rId14"/>
   </p:sldIdLst>
   <p:sldSz cx="12192000" cy="6858000"/>
   <p:notesSz cx="6858000" cy="9144000"/>
@@ -353,7 +354,7 @@
           <a:p>
             <a:fld id="{B7268E1E-0E44-426D-905E-8AD9B19D2182}" type="datetimeFigureOut">
               <a:rPr lang="cs-CZ" smtClean="0"/>
-              <a:t>06.10.2026</a:t>
+              <a:t>09.10.2026</a:t>
             </a:fld>
             <a:endParaRPr lang="cs-CZ"/>
           </a:p>
@@ -988,14 +989,11 @@
                 <a:spcPct val="100000"/>
               </a:lnSpc>
             </a:pPr>
-            <a:r>
-              <a:rPr lang="en-US" sz="1400" b="0" i="0" u="none" strike="noStrike">
-                <a:solidFill>
-                  <a:srgbClr val="000000"/>
-                </a:solidFill>
-              </a:rPr>
-              <a:t>这一页说具体交付物。工作面板把文本框、图片上传、检索、结果列表和 QA 报告放在一个界面。生成侧：文本能出支撑板和法兰，单图上传后提尺寸，多图分组后会检查视图间尺寸冲突。检索侧：文本按标签和同义名排序，单图多图做特征比对，详情分溯源、规格、版本三块。QA 侧：几何判单实体和开口，尺寸查 X/Y/Z 和孔径，默认 0.2 毫米公差，列出超差。另外有一批带五个字段的测试零件目录，以及 AT01 到 AT12 每条用例的输入、预期、实际和截图，最后还有端到端跑通记录和遗留问题清单。</a:t>
-            </a:r>
+            <a:endParaRPr lang="en-US" sz="1400" b="0" i="0" u="none" strike="noStrike" dirty="0">
+              <a:solidFill>
+                <a:srgbClr val="000000"/>
+              </a:solidFill>
+            </a:endParaRPr>
           </a:p>
         </p:txBody>
       </p:sp>
@@ -14450,6 +14448,642 @@
 <file path=ppt/slides/slide10.xml><?xml version="1.0" encoding="utf-8"?>
 <p:sld xmlns:a="http://schemas.openxmlformats.org/drawingml/2006/main" xmlns:r="http://schemas.openxmlformats.org/officeDocument/2006/relationships" xmlns:p="http://schemas.openxmlformats.org/presentationml/2006/main">
   <p:cSld>
+    <p:bg>
+      <p:bgPr>
+        <a:solidFill>
+          <a:srgbClr val="FFFFFF">
+            <a:alpha val="100000"/>
+          </a:srgbClr>
+        </a:solidFill>
+        <a:effectLst/>
+      </p:bgPr>
+    </p:bg>
+    <p:spTree>
+      <p:nvGrpSpPr>
+        <p:cNvPr id="1" name=""/>
+        <p:cNvGrpSpPr/>
+        <p:nvPr/>
+      </p:nvGrpSpPr>
+      <p:grpSpPr>
+        <a:xfrm>
+          <a:off x="0" y="0"/>
+          <a:ext cx="0" cy="0"/>
+          <a:chOff x="0" y="0"/>
+          <a:chExt cx="0" cy="0"/>
+        </a:xfrm>
+      </p:grpSpPr>
+      <p:sp>
+        <p:nvSpPr>
+          <p:cNvPr id="3" name="AutoShape 3"/>
+          <p:cNvSpPr/>
+          <p:nvPr/>
+        </p:nvSpPr>
+        <p:spPr>
+          <a:xfrm>
+            <a:off x="1016000" y="1092200"/>
+            <a:ext cx="10160000" cy="558800"/>
+          </a:xfrm>
+          <a:prstGeom prst="rect">
+            <a:avLst/>
+          </a:prstGeom>
+          <a:noFill/>
+          <a:ln w="12700" cap="flat" cmpd="sng">
+            <a:noFill/>
+            <a:prstDash val="solid"/>
+            <a:round/>
+          </a:ln>
+        </p:spPr>
+        <p:txBody>
+          <a:bodyPr vert="horz" wrap="square" lIns="0" tIns="0" rIns="0" bIns="0" rtlCol="0" anchor="ctr" anchorCtr="0"/>
+          <a:lstStyle/>
+          <a:p>
+            <a:pPr marL="0" indent="0" algn="l">
+              <a:lnSpc>
+                <a:spcPct val="125000"/>
+              </a:lnSpc>
+              <a:defRPr/>
+            </a:pPr>
+            <a:r>
+              <a:rPr lang="en-US" sz="2800" b="1" i="0" u="none" strike="noStrike" dirty="0" err="1">
+                <a:solidFill>
+                  <a:srgbClr val="2B2F36"/>
+                </a:solidFill>
+                <a:latin typeface="Noto Sans SC"/>
+                <a:ea typeface="Noto Sans SC"/>
+                <a:cs typeface="Noto Sans SC"/>
+                <a:sym typeface="Noto Sans SC"/>
+              </a:rPr>
+              <a:t>完成</a:t>
+            </a:r>
+            <a:r>
+              <a:rPr lang="zh-CN" altLang="en-US" sz="2800" b="1" i="0" u="none" strike="noStrike" dirty="0">
+                <a:solidFill>
+                  <a:srgbClr val="2B2F36"/>
+                </a:solidFill>
+                <a:latin typeface="Noto Sans SC"/>
+                <a:ea typeface="Noto Sans SC"/>
+                <a:cs typeface="Noto Sans SC"/>
+                <a:sym typeface="Noto Sans SC"/>
+              </a:rPr>
+              <a:t>定义</a:t>
+            </a:r>
+            <a:endParaRPr lang="en-US" sz="1100" dirty="0"/>
+          </a:p>
+        </p:txBody>
+      </p:sp>
+      <p:sp>
+        <p:nvSpPr>
+          <p:cNvPr id="4" name="AutoShape 4"/>
+          <p:cNvSpPr/>
+          <p:nvPr/>
+        </p:nvSpPr>
+        <p:spPr>
+          <a:xfrm>
+            <a:off x="1016000" y="2159000"/>
+            <a:ext cx="762000" cy="508000"/>
+          </a:xfrm>
+          <a:prstGeom prst="rect">
+            <a:avLst/>
+          </a:prstGeom>
+          <a:noFill/>
+          <a:ln w="12700" cap="flat" cmpd="sng">
+            <a:noFill/>
+            <a:prstDash val="solid"/>
+            <a:round/>
+          </a:ln>
+        </p:spPr>
+        <p:txBody>
+          <a:bodyPr vert="horz" wrap="square" lIns="0" tIns="0" rIns="0" bIns="0" rtlCol="0" anchor="ctr" anchorCtr="0"/>
+          <a:lstStyle/>
+          <a:p>
+            <a:pPr marL="0" indent="0" algn="l">
+              <a:lnSpc>
+                <a:spcPct val="125000"/>
+              </a:lnSpc>
+              <a:defRPr/>
+            </a:pPr>
+            <a:r>
+              <a:rPr lang="en-US" sz="2600" b="1" i="0" u="none" strike="noStrike">
+                <a:solidFill>
+                  <a:srgbClr val="4472C4"/>
+                </a:solidFill>
+                <a:latin typeface="Noto Sans SC"/>
+                <a:ea typeface="Noto Sans SC"/>
+                <a:cs typeface="Noto Sans SC"/>
+                <a:sym typeface="Noto Sans SC"/>
+              </a:rPr>
+              <a:t>1</a:t>
+            </a:r>
+            <a:endParaRPr lang="en-US" sz="1100"/>
+          </a:p>
+        </p:txBody>
+      </p:sp>
+      <p:sp>
+        <p:nvSpPr>
+          <p:cNvPr id="5" name="AutoShape 5"/>
+          <p:cNvSpPr/>
+          <p:nvPr/>
+        </p:nvSpPr>
+        <p:spPr>
+          <a:xfrm>
+            <a:off x="1778000" y="2184400"/>
+            <a:ext cx="9398000" cy="508000"/>
+          </a:xfrm>
+          <a:prstGeom prst="rect">
+            <a:avLst/>
+          </a:prstGeom>
+          <a:noFill/>
+          <a:ln w="12700" cap="flat" cmpd="sng">
+            <a:noFill/>
+            <a:prstDash val="solid"/>
+            <a:round/>
+          </a:ln>
+        </p:spPr>
+        <p:txBody>
+          <a:bodyPr vert="horz" wrap="square" lIns="0" tIns="0" rIns="0" bIns="0" rtlCol="0" anchor="ctr" anchorCtr="0"/>
+          <a:lstStyle/>
+          <a:p>
+            <a:pPr>
+              <a:defRPr/>
+            </a:pPr>
+            <a:r>
+              <a:rPr lang="zh-CN" altLang="zh-CN" dirty="0"/>
+              <a:t>讨论2中确定的验收用例全部执行，正常、异常、边界情况都有结果。</a:t>
+            </a:r>
+            <a:endParaRPr lang="en-US" sz="1100" dirty="0"/>
+          </a:p>
+        </p:txBody>
+      </p:sp>
+      <p:sp>
+        <p:nvSpPr>
+          <p:cNvPr id="6" name="AutoShape 6"/>
+          <p:cNvSpPr/>
+          <p:nvPr/>
+        </p:nvSpPr>
+        <p:spPr>
+          <a:xfrm>
+            <a:off x="1016000" y="2921000"/>
+            <a:ext cx="762000" cy="508000"/>
+          </a:xfrm>
+          <a:prstGeom prst="rect">
+            <a:avLst/>
+          </a:prstGeom>
+          <a:noFill/>
+          <a:ln w="12700" cap="flat" cmpd="sng">
+            <a:noFill/>
+            <a:prstDash val="solid"/>
+            <a:round/>
+          </a:ln>
+        </p:spPr>
+        <p:txBody>
+          <a:bodyPr vert="horz" wrap="square" lIns="0" tIns="0" rIns="0" bIns="0" rtlCol="0" anchor="ctr" anchorCtr="0"/>
+          <a:lstStyle/>
+          <a:p>
+            <a:pPr marL="0" indent="0" algn="l">
+              <a:lnSpc>
+                <a:spcPct val="125000"/>
+              </a:lnSpc>
+              <a:defRPr/>
+            </a:pPr>
+            <a:r>
+              <a:rPr lang="en-US" sz="2600" b="1" i="0" u="none" strike="noStrike">
+                <a:solidFill>
+                  <a:srgbClr val="4472C4"/>
+                </a:solidFill>
+                <a:latin typeface="Noto Sans SC"/>
+                <a:ea typeface="Noto Sans SC"/>
+                <a:cs typeface="Noto Sans SC"/>
+                <a:sym typeface="Noto Sans SC"/>
+              </a:rPr>
+              <a:t>2</a:t>
+            </a:r>
+            <a:endParaRPr lang="en-US" sz="1100"/>
+          </a:p>
+        </p:txBody>
+      </p:sp>
+      <p:sp>
+        <p:nvSpPr>
+          <p:cNvPr id="7" name="AutoShape 7"/>
+          <p:cNvSpPr/>
+          <p:nvPr/>
+        </p:nvSpPr>
+        <p:spPr>
+          <a:xfrm>
+            <a:off x="1778000" y="2946400"/>
+            <a:ext cx="9398000" cy="508000"/>
+          </a:xfrm>
+          <a:prstGeom prst="rect">
+            <a:avLst/>
+          </a:prstGeom>
+          <a:noFill/>
+          <a:ln w="12700" cap="flat" cmpd="sng">
+            <a:noFill/>
+            <a:prstDash val="solid"/>
+            <a:round/>
+          </a:ln>
+        </p:spPr>
+        <p:txBody>
+          <a:bodyPr vert="horz" wrap="square" lIns="0" tIns="0" rIns="0" bIns="0" rtlCol="0" anchor="ctr" anchorCtr="0"/>
+          <a:lstStyle/>
+          <a:p>
+            <a:pPr marL="0" indent="0" algn="l">
+              <a:lnSpc>
+                <a:spcPct val="125000"/>
+              </a:lnSpc>
+              <a:defRPr/>
+            </a:pPr>
+            <a:r>
+              <a:rPr lang="en-US" sz="1400" b="0" i="0" u="none" strike="noStrike">
+                <a:solidFill>
+                  <a:srgbClr val="3C4655"/>
+                </a:solidFill>
+                <a:latin typeface="Noto Sans SC"/>
+                <a:ea typeface="Noto Sans SC"/>
+                <a:cs typeface="Noto Sans SC"/>
+                <a:sym typeface="Noto Sans SC"/>
+              </a:rPr>
+              <a:t>确保确定性，相同输入得到相同结果；错误反馈明确。</a:t>
+            </a:r>
+            <a:endParaRPr lang="en-US" sz="1100"/>
+          </a:p>
+        </p:txBody>
+      </p:sp>
+      <p:sp>
+        <p:nvSpPr>
+          <p:cNvPr id="8" name="AutoShape 8"/>
+          <p:cNvSpPr/>
+          <p:nvPr/>
+        </p:nvSpPr>
+        <p:spPr>
+          <a:xfrm>
+            <a:off x="1016000" y="3683000"/>
+            <a:ext cx="762000" cy="508000"/>
+          </a:xfrm>
+          <a:prstGeom prst="rect">
+            <a:avLst/>
+          </a:prstGeom>
+          <a:noFill/>
+          <a:ln w="12700" cap="flat" cmpd="sng">
+            <a:noFill/>
+            <a:prstDash val="solid"/>
+            <a:round/>
+          </a:ln>
+        </p:spPr>
+        <p:txBody>
+          <a:bodyPr vert="horz" wrap="square" lIns="0" tIns="0" rIns="0" bIns="0" rtlCol="0" anchor="ctr" anchorCtr="0"/>
+          <a:lstStyle/>
+          <a:p>
+            <a:pPr marL="0" indent="0" algn="l">
+              <a:lnSpc>
+                <a:spcPct val="125000"/>
+              </a:lnSpc>
+              <a:defRPr/>
+            </a:pPr>
+            <a:r>
+              <a:rPr lang="en-US" sz="2600" b="1" i="0" u="none" strike="noStrike">
+                <a:solidFill>
+                  <a:srgbClr val="4472C4"/>
+                </a:solidFill>
+                <a:latin typeface="Noto Sans SC"/>
+                <a:ea typeface="Noto Sans SC"/>
+                <a:cs typeface="Noto Sans SC"/>
+                <a:sym typeface="Noto Sans SC"/>
+              </a:rPr>
+              <a:t>3</a:t>
+            </a:r>
+            <a:endParaRPr lang="en-US" sz="1100"/>
+          </a:p>
+        </p:txBody>
+      </p:sp>
+      <p:sp>
+        <p:nvSpPr>
+          <p:cNvPr id="9" name="AutoShape 9"/>
+          <p:cNvSpPr/>
+          <p:nvPr/>
+        </p:nvSpPr>
+        <p:spPr>
+          <a:xfrm>
+            <a:off x="1778000" y="3708400"/>
+            <a:ext cx="9398000" cy="508000"/>
+          </a:xfrm>
+          <a:prstGeom prst="rect">
+            <a:avLst/>
+          </a:prstGeom>
+          <a:noFill/>
+          <a:ln w="12700" cap="flat" cmpd="sng">
+            <a:noFill/>
+            <a:prstDash val="solid"/>
+            <a:round/>
+          </a:ln>
+        </p:spPr>
+        <p:txBody>
+          <a:bodyPr vert="horz" wrap="square" lIns="0" tIns="0" rIns="0" bIns="0" rtlCol="0" anchor="ctr" anchorCtr="0"/>
+          <a:lstStyle/>
+          <a:p>
+            <a:pPr marL="0" indent="0" algn="l">
+              <a:lnSpc>
+                <a:spcPct val="125000"/>
+              </a:lnSpc>
+              <a:defRPr/>
+            </a:pPr>
+            <a:r>
+              <a:rPr lang="en-US" sz="1400" b="0" i="0" u="none" strike="noStrike">
+                <a:solidFill>
+                  <a:srgbClr val="3C4655"/>
+                </a:solidFill>
+                <a:latin typeface="Noto Sans SC"/>
+                <a:ea typeface="Noto Sans SC"/>
+                <a:cs typeface="Noto Sans SC"/>
+                <a:sym typeface="Noto Sans SC"/>
+              </a:rPr>
+              <a:t>完成测试与交接，不遗漏异常情况。</a:t>
+            </a:r>
+            <a:endParaRPr lang="en-US" sz="1100"/>
+          </a:p>
+        </p:txBody>
+      </p:sp>
+      <p:sp>
+        <p:nvSpPr>
+          <p:cNvPr id="10" name="AutoShape 10"/>
+          <p:cNvSpPr/>
+          <p:nvPr/>
+        </p:nvSpPr>
+        <p:spPr>
+          <a:xfrm>
+            <a:off x="1016000" y="4445000"/>
+            <a:ext cx="762000" cy="508000"/>
+          </a:xfrm>
+          <a:prstGeom prst="rect">
+            <a:avLst/>
+          </a:prstGeom>
+          <a:noFill/>
+          <a:ln w="12700" cap="flat" cmpd="sng">
+            <a:noFill/>
+            <a:prstDash val="solid"/>
+            <a:round/>
+          </a:ln>
+        </p:spPr>
+        <p:txBody>
+          <a:bodyPr vert="horz" wrap="square" lIns="0" tIns="0" rIns="0" bIns="0" rtlCol="0" anchor="ctr" anchorCtr="0"/>
+          <a:lstStyle/>
+          <a:p>
+            <a:pPr marL="0" indent="0" algn="l">
+              <a:lnSpc>
+                <a:spcPct val="125000"/>
+              </a:lnSpc>
+              <a:defRPr/>
+            </a:pPr>
+            <a:r>
+              <a:rPr lang="en-US" sz="2600" b="1" i="0" u="none" strike="noStrike">
+                <a:solidFill>
+                  <a:srgbClr val="4472C4"/>
+                </a:solidFill>
+                <a:latin typeface="Noto Sans SC"/>
+                <a:ea typeface="Noto Sans SC"/>
+                <a:cs typeface="Noto Sans SC"/>
+                <a:sym typeface="Noto Sans SC"/>
+              </a:rPr>
+              <a:t>4</a:t>
+            </a:r>
+            <a:endParaRPr lang="en-US" sz="1100"/>
+          </a:p>
+        </p:txBody>
+      </p:sp>
+      <p:sp>
+        <p:nvSpPr>
+          <p:cNvPr id="11" name="AutoShape 11"/>
+          <p:cNvSpPr/>
+          <p:nvPr/>
+        </p:nvSpPr>
+        <p:spPr>
+          <a:xfrm>
+            <a:off x="1778000" y="4470400"/>
+            <a:ext cx="9398000" cy="508000"/>
+          </a:xfrm>
+          <a:prstGeom prst="rect">
+            <a:avLst/>
+          </a:prstGeom>
+          <a:noFill/>
+          <a:ln w="12700" cap="flat" cmpd="sng">
+            <a:noFill/>
+            <a:prstDash val="solid"/>
+            <a:round/>
+          </a:ln>
+        </p:spPr>
+        <p:txBody>
+          <a:bodyPr vert="horz" wrap="square" lIns="0" tIns="0" rIns="0" bIns="0" rtlCol="0" anchor="ctr" anchorCtr="0"/>
+          <a:lstStyle/>
+          <a:p>
+            <a:pPr marL="0" indent="0" algn="l">
+              <a:lnSpc>
+                <a:spcPct val="125000"/>
+              </a:lnSpc>
+              <a:defRPr/>
+            </a:pPr>
+            <a:r>
+              <a:rPr lang="en-US" sz="1400" b="0" i="0" u="none" strike="noStrike" dirty="0" err="1">
+                <a:solidFill>
+                  <a:srgbClr val="3C4655"/>
+                </a:solidFill>
+                <a:latin typeface="Noto Sans SC"/>
+                <a:ea typeface="Noto Sans SC"/>
+                <a:cs typeface="Noto Sans SC"/>
+                <a:sym typeface="Noto Sans SC"/>
+              </a:rPr>
+              <a:t>记录完整详细</a:t>
+            </a:r>
+            <a:r>
+              <a:rPr lang="zh-CN" altLang="en-US" sz="1400" b="0" i="0" u="none" strike="noStrike" dirty="0">
+                <a:solidFill>
+                  <a:srgbClr val="3C4655"/>
+                </a:solidFill>
+                <a:latin typeface="Noto Sans SC"/>
+                <a:ea typeface="Noto Sans SC"/>
+                <a:cs typeface="Noto Sans SC"/>
+                <a:sym typeface="Noto Sans SC"/>
+              </a:rPr>
+              <a:t>：</a:t>
+            </a:r>
+            <a:r>
+              <a:rPr lang="en-US" sz="1400" b="0" i="0" u="none" strike="noStrike" dirty="0" err="1">
+                <a:solidFill>
+                  <a:srgbClr val="3C4655"/>
+                </a:solidFill>
+                <a:latin typeface="Noto Sans SC"/>
+                <a:ea typeface="Noto Sans SC"/>
+                <a:cs typeface="Noto Sans SC"/>
+                <a:sym typeface="Noto Sans SC"/>
+              </a:rPr>
+              <a:t>用例号、输入、预期结果、实际结果、通过情况、测试人、截图或日志</a:t>
+            </a:r>
+            <a:r>
+              <a:rPr lang="en-US" sz="1400" b="0" i="0" u="none" strike="noStrike" dirty="0">
+                <a:solidFill>
+                  <a:srgbClr val="3C4655"/>
+                </a:solidFill>
+                <a:latin typeface="Noto Sans SC"/>
+                <a:ea typeface="Noto Sans SC"/>
+                <a:cs typeface="Noto Sans SC"/>
+                <a:sym typeface="Noto Sans SC"/>
+              </a:rPr>
+              <a:t>。</a:t>
+            </a:r>
+            <a:endParaRPr lang="en-US" sz="1100" dirty="0"/>
+          </a:p>
+        </p:txBody>
+      </p:sp>
+      <p:sp>
+        <p:nvSpPr>
+          <p:cNvPr id="12" name="AutoShape 12"/>
+          <p:cNvSpPr/>
+          <p:nvPr/>
+        </p:nvSpPr>
+        <p:spPr>
+          <a:xfrm>
+            <a:off x="1016000" y="5207000"/>
+            <a:ext cx="762000" cy="508000"/>
+          </a:xfrm>
+          <a:prstGeom prst="rect">
+            <a:avLst/>
+          </a:prstGeom>
+          <a:noFill/>
+          <a:ln w="12700" cap="flat" cmpd="sng">
+            <a:noFill/>
+            <a:prstDash val="solid"/>
+            <a:round/>
+          </a:ln>
+        </p:spPr>
+        <p:txBody>
+          <a:bodyPr vert="horz" wrap="square" lIns="0" tIns="0" rIns="0" bIns="0" rtlCol="0" anchor="ctr" anchorCtr="0"/>
+          <a:lstStyle/>
+          <a:p>
+            <a:pPr marL="0" indent="0" algn="l">
+              <a:lnSpc>
+                <a:spcPct val="125000"/>
+              </a:lnSpc>
+              <a:defRPr/>
+            </a:pPr>
+            <a:r>
+              <a:rPr lang="en-US" sz="2600" b="1" i="0" u="none" strike="noStrike">
+                <a:solidFill>
+                  <a:srgbClr val="ED7D31"/>
+                </a:solidFill>
+                <a:latin typeface="Noto Sans SC"/>
+                <a:ea typeface="Noto Sans SC"/>
+                <a:cs typeface="Noto Sans SC"/>
+                <a:sym typeface="Noto Sans SC"/>
+              </a:rPr>
+              <a:t>5</a:t>
+            </a:r>
+            <a:endParaRPr lang="en-US" sz="1100"/>
+          </a:p>
+        </p:txBody>
+      </p:sp>
+      <p:sp>
+        <p:nvSpPr>
+          <p:cNvPr id="13" name="AutoShape 13"/>
+          <p:cNvSpPr/>
+          <p:nvPr/>
+        </p:nvSpPr>
+        <p:spPr>
+          <a:xfrm>
+            <a:off x="1778000" y="5232400"/>
+            <a:ext cx="9398000" cy="635000"/>
+          </a:xfrm>
+          <a:prstGeom prst="rect">
+            <a:avLst/>
+          </a:prstGeom>
+          <a:noFill/>
+          <a:ln w="12700" cap="flat" cmpd="sng">
+            <a:noFill/>
+            <a:prstDash val="solid"/>
+            <a:round/>
+          </a:ln>
+        </p:spPr>
+        <p:txBody>
+          <a:bodyPr vert="horz" wrap="square" lIns="0" tIns="0" rIns="0" bIns="0" rtlCol="0" anchor="ctr" anchorCtr="0"/>
+          <a:lstStyle/>
+          <a:p>
+            <a:pPr marL="0" indent="0" algn="l">
+              <a:lnSpc>
+                <a:spcPct val="125000"/>
+              </a:lnSpc>
+              <a:defRPr/>
+            </a:pPr>
+            <a:r>
+              <a:rPr lang="en-US" sz="1400" b="0" i="0" u="none" strike="noStrike">
+                <a:solidFill>
+                  <a:srgbClr val="3C4655"/>
+                </a:solidFill>
+                <a:latin typeface="Noto Sans SC"/>
+                <a:ea typeface="Noto Sans SC"/>
+                <a:cs typeface="Noto Sans SC"/>
+                <a:sym typeface="Noto Sans SC"/>
+              </a:rPr>
+              <a:t>PO 查看工作证据并签字完成。</a:t>
+            </a:r>
+            <a:endParaRPr lang="en-US" sz="1100"/>
+          </a:p>
+        </p:txBody>
+      </p:sp>
+      <p:sp>
+        <p:nvSpPr>
+          <p:cNvPr id="14" name="AutoShape 14"/>
+          <p:cNvSpPr/>
+          <p:nvPr/>
+        </p:nvSpPr>
+        <p:spPr>
+          <a:xfrm>
+            <a:off x="10668000" y="6350000"/>
+            <a:ext cx="508000" cy="304800"/>
+          </a:xfrm>
+          <a:prstGeom prst="rect">
+            <a:avLst/>
+          </a:prstGeom>
+          <a:noFill/>
+          <a:ln w="12700" cap="flat" cmpd="sng">
+            <a:noFill/>
+            <a:prstDash val="solid"/>
+            <a:round/>
+          </a:ln>
+        </p:spPr>
+        <p:txBody>
+          <a:bodyPr vert="horz" wrap="square" lIns="0" tIns="0" rIns="0" bIns="0" rtlCol="0" anchor="ctr" anchorCtr="0"/>
+          <a:lstStyle/>
+          <a:p>
+            <a:pPr marL="0" indent="0" algn="r">
+              <a:lnSpc>
+                <a:spcPct val="125000"/>
+              </a:lnSpc>
+              <a:defRPr/>
+            </a:pPr>
+            <a:r>
+              <a:rPr lang="en-US" sz="1100" b="0" i="0" u="none" strike="noStrike" dirty="0">
+                <a:solidFill>
+                  <a:srgbClr val="A0A8B4"/>
+                </a:solidFill>
+                <a:latin typeface="Noto Sans SC"/>
+                <a:ea typeface="Noto Sans SC"/>
+                <a:cs typeface="Noto Sans SC"/>
+                <a:sym typeface="Noto Sans SC"/>
+              </a:rPr>
+              <a:t>09 / 11</a:t>
+            </a:r>
+            <a:endParaRPr lang="en-US" sz="1100" dirty="0"/>
+          </a:p>
+        </p:txBody>
+      </p:sp>
+    </p:spTree>
+  </p:cSld>
+  <p:clrMapOvr>
+    <a:masterClrMapping/>
+  </p:clrMapOvr>
+</p:sld>
+</file>
+
+<file path=ppt/slides/slide11.xml><?xml version="1.0" encoding="utf-8"?>
+<p:sld xmlns:a="http://schemas.openxmlformats.org/drawingml/2006/main" xmlns:r="http://schemas.openxmlformats.org/officeDocument/2006/relationships" xmlns:p="http://schemas.openxmlformats.org/presentationml/2006/main">
+  <p:cSld>
     <p:spTree>
       <p:nvGrpSpPr>
         <p:cNvPr id="1" name=""/>
@@ -15481,7 +16115,7 @@
 </p:sld>
 </file>
 
-<file path=ppt/slides/slide11.xml><?xml version="1.0" encoding="utf-8"?>
+<file path=ppt/slides/slide12.xml><?xml version="1.0" encoding="utf-8"?>
 <p:sld xmlns:a="http://schemas.openxmlformats.org/drawingml/2006/main" xmlns:r="http://schemas.openxmlformats.org/officeDocument/2006/relationships" xmlns:p="http://schemas.openxmlformats.org/presentationml/2006/main">
   <p:cSld>
     <p:bg>
@@ -16188,7 +16822,19 @@
                 <a:cs typeface="Noto Sans SC"/>
                 <a:sym typeface="Noto Sans SC"/>
               </a:rPr>
-              <a:t>本次会议确定了12 个故事、38 </a:t>
+              <a:t>本次会议确定了12 个故事、</a:t>
+            </a:r>
+            <a:r>
+              <a:rPr lang="en-US" dirty="0">
+                <a:solidFill>
+                  <a:srgbClr val="5A6473"/>
+                </a:solidFill>
+                <a:latin typeface="Noto Sans SC"/>
+                <a:ea typeface="Noto Sans SC"/>
+                <a:cs typeface="Noto Sans SC"/>
+                <a:sym typeface="Noto Sans SC"/>
+              </a:rPr>
+              <a:t>61 </a:t>
             </a:r>
             <a:r>
               <a:rPr lang="en-US" sz="1400" b="0" i="0" u="none" strike="noStrike" dirty="0" err="1">
@@ -16655,7 +17301,7 @@
               <a:defRPr/>
             </a:pPr>
             <a:r>
-              <a:rPr lang="en-US" sz="1800" b="1" i="0" u="none" strike="noStrike">
+              <a:rPr lang="en-US" sz="1800" b="1" i="0" u="none" strike="noStrike" dirty="0">
                 <a:solidFill>
                   <a:srgbClr val="FFFFFF"/>
                 </a:solidFill>
@@ -16664,9 +17310,69 @@
                 <a:cs typeface="Noto Sans SC"/>
                 <a:sym typeface="Noto Sans SC"/>
               </a:rPr>
-              <a:t>12 个故事 · 38 故事点</a:t>
-            </a:r>
-            <a:endParaRPr lang="en-US" sz="1100"/>
+              <a:t>12 </a:t>
+            </a:r>
+            <a:r>
+              <a:rPr lang="en-US" sz="1800" b="1" i="0" u="none" strike="noStrike" dirty="0" err="1">
+                <a:solidFill>
+                  <a:srgbClr val="FFFFFF"/>
+                </a:solidFill>
+                <a:latin typeface="Noto Sans SC"/>
+                <a:ea typeface="Noto Sans SC"/>
+                <a:cs typeface="Noto Sans SC"/>
+                <a:sym typeface="Noto Sans SC"/>
+              </a:rPr>
+              <a:t>个故事</a:t>
+            </a:r>
+            <a:r>
+              <a:rPr lang="en-US" sz="1800" b="1" i="0" u="none" strike="noStrike" dirty="0">
+                <a:solidFill>
+                  <a:srgbClr val="FFFFFF"/>
+                </a:solidFill>
+                <a:latin typeface="Noto Sans SC"/>
+                <a:ea typeface="Noto Sans SC"/>
+                <a:cs typeface="Noto Sans SC"/>
+                <a:sym typeface="Noto Sans SC"/>
+              </a:rPr>
+              <a:t> · </a:t>
+            </a:r>
+            <a:r>
+              <a:rPr lang="en-US" sz="1800" b="1" dirty="0">
+                <a:solidFill>
+                  <a:srgbClr val="FFFFFF"/>
+                </a:solidFill>
+                <a:latin typeface="Noto Sans SC"/>
+                <a:ea typeface="Noto Sans SC"/>
+                <a:cs typeface="Noto Sans SC"/>
+                <a:sym typeface="Noto Sans SC"/>
+              </a:rPr>
+              <a:t>61</a:t>
+            </a:r>
+            <a:r>
+              <a:rPr lang="en-US" sz="1800" b="1" i="0" u="none" strike="noStrike" dirty="0">
+                <a:solidFill>
+                  <a:srgbClr val="FFFFFF"/>
+                </a:solidFill>
+                <a:latin typeface="Noto Sans SC"/>
+                <a:ea typeface="Noto Sans SC"/>
+                <a:cs typeface="Noto Sans SC"/>
+                <a:sym typeface="Noto Sans SC"/>
+              </a:rPr>
+              <a:t> </a:t>
+            </a:r>
+            <a:r>
+              <a:rPr lang="en-US" sz="1800" b="1" i="0" u="none" strike="noStrike" dirty="0" err="1">
+                <a:solidFill>
+                  <a:srgbClr val="FFFFFF"/>
+                </a:solidFill>
+                <a:latin typeface="Noto Sans SC"/>
+                <a:ea typeface="Noto Sans SC"/>
+                <a:cs typeface="Noto Sans SC"/>
+                <a:sym typeface="Noto Sans SC"/>
+              </a:rPr>
+              <a:t>故事点</a:t>
+            </a:r>
+            <a:endParaRPr lang="en-US" sz="1100" dirty="0"/>
           </a:p>
         </p:txBody>
       </p:sp>
@@ -17627,7 +18333,7 @@
           <p:nvPr>
             <p:extLst>
               <p:ext uri="{D42A27DB-BD31-4B8C-83A1-F6EECF244321}">
-                <p14:modId xmlns:p14="http://schemas.microsoft.com/office/powerpoint/2010/main" val="4091898736"/>
+                <p14:modId xmlns:p14="http://schemas.microsoft.com/office/powerpoint/2010/main" val="698701069"/>
               </p:ext>
             </p:extLst>
           </p:nvPr>
@@ -19949,10 +20655,9 @@
                           </a:solidFill>
                           <a:latin typeface="Noto Sans SC"/>
                           <a:ea typeface="Noto Sans SC"/>
-                          <a:cs typeface="Noto Sans SC"/>
                           <a:sym typeface="Noto Sans SC"/>
                         </a:rPr>
-                        <a:t>5</a:t>
+                        <a:t>8</a:t>
                       </a:r>
                       <a:endParaRPr lang="en-US" sz="1100" dirty="0"/>
                     </a:p>
@@ -20490,8 +21195,8 @@
         </p:nvSpPr>
         <p:spPr>
           <a:xfrm>
-            <a:off x="1016000" y="2032000"/>
-            <a:ext cx="3175000" cy="558800"/>
+            <a:off x="511834" y="2044700"/>
+            <a:ext cx="3719423" cy="558800"/>
           </a:xfrm>
           <a:prstGeom prst="roundRect">
             <a:avLst>
@@ -20528,7 +21233,7 @@
         </p:nvSpPr>
         <p:spPr>
           <a:xfrm>
-            <a:off x="1219200" y="2133600"/>
+            <a:off x="974545" y="2120900"/>
             <a:ext cx="2794000" cy="381000"/>
           </a:xfrm>
           <a:prstGeom prst="rect">
@@ -20552,7 +21257,7 @@
               <a:defRPr/>
             </a:pPr>
             <a:r>
-              <a:rPr lang="en-US" sz="1500" b="1" i="0" u="none" strike="noStrike">
+              <a:rPr lang="en-US" sz="1500" b="1" i="0" u="none" strike="noStrike" dirty="0">
                 <a:solidFill>
                   <a:srgbClr val="FFFFFF"/>
                 </a:solidFill>
@@ -20563,7 +21268,7 @@
               </a:rPr>
               <a:t>高 </a:t>
             </a:r>
-            <a:endParaRPr lang="en-US" sz="1100"/>
+            <a:endParaRPr lang="en-US" sz="1100" dirty="0"/>
           </a:p>
         </p:txBody>
       </p:sp>
@@ -20575,8 +21280,8 @@
         </p:nvSpPr>
         <p:spPr>
           <a:xfrm>
-            <a:off x="1016000" y="2743200"/>
-            <a:ext cx="3175000" cy="3302000"/>
+            <a:off x="511834" y="2627702"/>
+            <a:ext cx="3996666" cy="3606800"/>
           </a:xfrm>
           <a:prstGeom prst="rect">
             <a:avLst/>
@@ -20637,42 +21342,58 @@
             <a:endParaRPr lang="en-US" sz="1100" dirty="0"/>
           </a:p>
           <a:p>
-            <a:pPr>
+            <a:r>
+              <a:rPr lang="zh-CN" altLang="zh-CN" sz="1300" dirty="0">
+                <a:solidFill>
+                  <a:srgbClr val="3C4655"/>
+                </a:solidFill>
+                <a:latin typeface="Noto Sans SC"/>
+                <a:ea typeface="Noto Sans SC"/>
+              </a:rPr>
+              <a:t>直接支撑G1，是文本生成基础流程，参数提取与建模链路可复用。</a:t>
+            </a:r>
+          </a:p>
+          <a:p>
+            <a:pPr marL="0" indent="0" algn="l">
               <a:lnSpc>
                 <a:spcPct val="141666"/>
               </a:lnSpc>
             </a:pPr>
             <a:r>
-              <a:rPr lang="en-US" sz="1300" dirty="0" err="1">
-                <a:solidFill>
-                  <a:srgbClr val="3C4655"/>
+              <a:rPr lang="en-US" sz="1300" b="1" i="0" u="none" strike="noStrike" dirty="0">
+                <a:solidFill>
+                  <a:srgbClr val="4472C4"/>
                 </a:solidFill>
                 <a:latin typeface="Noto Sans SC"/>
                 <a:ea typeface="Noto Sans SC"/>
+                <a:cs typeface="Noto Sans SC"/>
                 <a:sym typeface="Noto Sans SC"/>
               </a:rPr>
-              <a:t>文本输入使用频率高</a:t>
-            </a:r>
-            <a:r>
-              <a:rPr lang="zh-CN" altLang="zh-CN" sz="1300" dirty="0">
+              <a:t>US02</a:t>
+            </a:r>
+            <a:r>
+              <a:rPr lang="en-US" sz="1300" b="0" i="0" u="none" strike="noStrike" dirty="0">
                 <a:solidFill>
                   <a:srgbClr val="3C4655"/>
                 </a:solidFill>
                 <a:latin typeface="Noto Sans SC"/>
                 <a:ea typeface="Noto Sans SC"/>
+                <a:cs typeface="Noto Sans SC"/>
+                <a:sym typeface="Noto Sans SC"/>
               </a:rPr>
-              <a:t>能最早验证本项目的最大技术风险点</a:t>
-            </a:r>
-            <a:r>
-              <a:rPr lang="en-US" sz="1300" dirty="0">
+              <a:t> </a:t>
+            </a:r>
+            <a:r>
+              <a:rPr lang="en-US" sz="1300" b="0" i="0" u="none" strike="noStrike" dirty="0" err="1">
                 <a:solidFill>
                   <a:srgbClr val="3C4655"/>
                 </a:solidFill>
                 <a:latin typeface="Noto Sans SC"/>
                 <a:ea typeface="Noto Sans SC"/>
+                <a:cs typeface="Noto Sans SC"/>
                 <a:sym typeface="Noto Sans SC"/>
               </a:rPr>
-              <a:t>。</a:t>
+              <a:t>单图生成</a:t>
             </a:r>
             <a:endParaRPr lang="en-US" sz="1300" b="0" i="0" u="none" strike="noStrike" dirty="0">
               <a:solidFill>
@@ -20685,13 +21406,163 @@
             </a:endParaRPr>
           </a:p>
           <a:p>
-            <a:pPr marL="0" indent="0" algn="l">
+            <a:r>
+              <a:rPr lang="zh-CN" altLang="en-US" sz="1300" dirty="0">
+                <a:solidFill>
+                  <a:srgbClr val="3C4655"/>
+                </a:solidFill>
+                <a:latin typeface="Noto Sans SC"/>
+                <a:ea typeface="Noto Sans SC"/>
+              </a:rPr>
+              <a:t>直接支撑</a:t>
+            </a:r>
+            <a:r>
+              <a:rPr lang="en-US" altLang="zh-CN" sz="1300" dirty="0">
+                <a:solidFill>
+                  <a:srgbClr val="3C4655"/>
+                </a:solidFill>
+                <a:latin typeface="Noto Sans SC"/>
+                <a:ea typeface="Noto Sans SC"/>
+              </a:rPr>
+              <a:t>G1</a:t>
+            </a:r>
+            <a:r>
+              <a:rPr lang="zh-CN" altLang="en-US" sz="1300" dirty="0">
+                <a:solidFill>
+                  <a:srgbClr val="3C4655"/>
+                </a:solidFill>
+                <a:latin typeface="Noto Sans SC"/>
+                <a:ea typeface="Noto Sans SC"/>
+              </a:rPr>
+              <a:t>图像生成，并为</a:t>
+            </a:r>
+            <a:r>
+              <a:rPr lang="en-US" altLang="zh-CN" sz="1300" dirty="0">
+                <a:solidFill>
+                  <a:srgbClr val="3C4655"/>
+                </a:solidFill>
+                <a:latin typeface="Noto Sans SC"/>
+                <a:ea typeface="Noto Sans SC"/>
+              </a:rPr>
+              <a:t>US03</a:t>
+            </a:r>
+            <a:r>
+              <a:rPr lang="zh-CN" altLang="en-US" sz="1300" dirty="0">
+                <a:solidFill>
+                  <a:srgbClr val="3C4655"/>
+                </a:solidFill>
+                <a:latin typeface="Noto Sans SC"/>
+                <a:ea typeface="Noto Sans SC"/>
+              </a:rPr>
+              <a:t>提供图片处理和尺寸识别基础。</a:t>
+            </a:r>
+            <a:endParaRPr lang="en-US" altLang="zh-CN" sz="1300" dirty="0">
+              <a:solidFill>
+                <a:srgbClr val="3C4655"/>
+              </a:solidFill>
+              <a:latin typeface="Noto Sans SC"/>
+              <a:ea typeface="Noto Sans SC"/>
+            </a:endParaRPr>
+          </a:p>
+          <a:p>
+            <a:pPr>
               <a:lnSpc>
                 <a:spcPct val="141666"/>
               </a:lnSpc>
             </a:pPr>
             <a:r>
-              <a:rPr lang="en-US" sz="1300" b="1" i="0" u="none" strike="noStrike" dirty="0">
+              <a:rPr lang="zh-CN" altLang="zh-CN" sz="1300" b="1" dirty="0">
+                <a:solidFill>
+                  <a:srgbClr val="4472C4"/>
+                </a:solidFill>
+                <a:latin typeface="Noto Sans SC"/>
+                <a:ea typeface="Noto Sans SC"/>
+              </a:rPr>
+              <a:t>US04 </a:t>
+            </a:r>
+            <a:r>
+              <a:rPr lang="zh-CN" altLang="zh-CN" sz="1300" dirty="0">
+                <a:solidFill>
+                  <a:srgbClr val="3C4655"/>
+                </a:solidFill>
+                <a:latin typeface="Noto Sans SC"/>
+                <a:ea typeface="Noto Sans SC"/>
+              </a:rPr>
+              <a:t>查看可编辑参数</a:t>
+            </a:r>
+          </a:p>
+          <a:p>
+            <a:pPr>
+              <a:lnSpc>
+                <a:spcPct val="141666"/>
+              </a:lnSpc>
+            </a:pPr>
+            <a:r>
+              <a:rPr lang="zh-CN" altLang="en-US" sz="1300" dirty="0">
+                <a:solidFill>
+                  <a:srgbClr val="3C4655"/>
+                </a:solidFill>
+                <a:latin typeface="Noto Sans SC"/>
+                <a:ea typeface="Noto Sans SC"/>
+              </a:rPr>
+              <a:t>支撑</a:t>
+            </a:r>
+            <a:r>
+              <a:rPr lang="en-US" altLang="zh-CN" sz="1300" dirty="0">
+                <a:solidFill>
+                  <a:srgbClr val="3C4655"/>
+                </a:solidFill>
+                <a:latin typeface="Noto Sans SC"/>
+                <a:ea typeface="Noto Sans SC"/>
+              </a:rPr>
+              <a:t>G1</a:t>
+            </a:r>
+            <a:r>
+              <a:rPr lang="zh-CN" altLang="en-US" sz="1300" dirty="0">
+                <a:solidFill>
+                  <a:srgbClr val="3C4655"/>
+                </a:solidFill>
+                <a:latin typeface="Noto Sans SC"/>
+                <a:ea typeface="Noto Sans SC"/>
+              </a:rPr>
+              <a:t>参数化模型要求，为尺寸核对和迭代</a:t>
+            </a:r>
+            <a:r>
+              <a:rPr lang="en-US" altLang="zh-CN" sz="1300" dirty="0">
+                <a:solidFill>
+                  <a:srgbClr val="3C4655"/>
+                </a:solidFill>
+                <a:latin typeface="Noto Sans SC"/>
+                <a:ea typeface="Noto Sans SC"/>
+              </a:rPr>
+              <a:t>2</a:t>
+            </a:r>
+            <a:r>
+              <a:rPr lang="zh-CN" altLang="en-US" sz="1300" dirty="0">
+                <a:solidFill>
+                  <a:srgbClr val="3C4655"/>
+                </a:solidFill>
+                <a:latin typeface="Noto Sans SC"/>
+                <a:ea typeface="Noto Sans SC"/>
+              </a:rPr>
+              <a:t>参数编辑提供数据基础。</a:t>
+            </a:r>
+            <a:endParaRPr lang="en-US" altLang="zh-CN" sz="1300" dirty="0">
+              <a:solidFill>
+                <a:srgbClr val="3C4655"/>
+              </a:solidFill>
+              <a:latin typeface="Noto Sans SC"/>
+              <a:ea typeface="Noto Sans SC"/>
+            </a:endParaRPr>
+          </a:p>
+          <a:p>
+            <a:pPr>
+              <a:lnSpc>
+                <a:spcPct val="141666"/>
+              </a:lnSpc>
+            </a:pPr>
+            <a:r>
+              <a:rPr lang="en-US" altLang="zh-CN" sz="1300" b="1" dirty="0">
                 <a:solidFill>
                   <a:srgbClr val="4472C4"/>
                 </a:solidFill>
@@ -20703,7 +21574,7 @@
               <a:t>US05</a:t>
             </a:r>
             <a:r>
-              <a:rPr lang="en-US" sz="1300" b="0" i="0" u="none" strike="noStrike" dirty="0">
+              <a:rPr lang="en-US" altLang="zh-CN" sz="1300" dirty="0">
                 <a:solidFill>
                   <a:srgbClr val="3C4655"/>
                 </a:solidFill>
@@ -20715,7 +21586,7 @@
               <a:t> </a:t>
             </a:r>
             <a:r>
-              <a:rPr lang="en-US" sz="1300" b="0" i="0" u="none" strike="noStrike" dirty="0" err="1">
+              <a:rPr lang="en-US" altLang="zh-CN" sz="1300" dirty="0" err="1">
                 <a:solidFill>
                   <a:srgbClr val="3C4655"/>
                 </a:solidFill>
@@ -20726,7 +21597,7 @@
               </a:rPr>
               <a:t>文本检索</a:t>
             </a:r>
-            <a:endParaRPr lang="en-US" sz="1300" b="0" i="0" u="none" strike="noStrike" dirty="0">
+            <a:endParaRPr lang="en-US" altLang="zh-CN" sz="1300" dirty="0">
               <a:solidFill>
                 <a:srgbClr val="3C4655"/>
               </a:solidFill>
@@ -20758,7 +21629,7 @@
               <a:t>，</a:t>
             </a:r>
             <a:r>
-              <a:rPr lang="en-US" sz="1300" dirty="0" err="1">
+              <a:rPr lang="en-US" altLang="zh-CN" sz="1300" dirty="0" err="1">
                 <a:solidFill>
                   <a:srgbClr val="3C4655"/>
                 </a:solidFill>
@@ -20769,7 +21640,7 @@
               <a:t>文本搜索做法成熟，优先实现</a:t>
             </a:r>
             <a:r>
-              <a:rPr lang="en-US" sz="1300" dirty="0">
+              <a:rPr lang="en-US" altLang="zh-CN" sz="1300" dirty="0">
                 <a:solidFill>
                   <a:srgbClr val="3C4655"/>
                 </a:solidFill>
@@ -20779,78 +21650,111 @@
               </a:rPr>
               <a:t>。</a:t>
             </a:r>
-          </a:p>
-          <a:p>
-            <a:pPr marL="0" indent="0" algn="l">
-              <a:lnSpc>
-                <a:spcPct val="141666"/>
-              </a:lnSpc>
-            </a:pPr>
-            <a:r>
-              <a:rPr lang="en-US" sz="1300" b="1" i="0" u="none" strike="noStrike" dirty="0">
-                <a:solidFill>
-                  <a:srgbClr val="4472C4"/>
-                </a:solidFill>
-                <a:latin typeface="Noto Sans SC"/>
-                <a:ea typeface="Noto Sans SC"/>
-                <a:cs typeface="Noto Sans SC"/>
-                <a:sym typeface="Noto Sans SC"/>
-              </a:rPr>
-              <a:t>US02</a:t>
-            </a:r>
-            <a:r>
-              <a:rPr lang="en-US" sz="1300" b="0" i="0" u="none" strike="noStrike" dirty="0">
-                <a:solidFill>
-                  <a:srgbClr val="3C4655"/>
-                </a:solidFill>
-                <a:latin typeface="Noto Sans SC"/>
-                <a:ea typeface="Noto Sans SC"/>
-                <a:cs typeface="Noto Sans SC"/>
-                <a:sym typeface="Noto Sans SC"/>
-              </a:rPr>
-              <a:t> </a:t>
-            </a:r>
-            <a:r>
-              <a:rPr lang="en-US" sz="1300" b="0" i="0" u="none" strike="noStrike" dirty="0" err="1">
-                <a:solidFill>
-                  <a:srgbClr val="3C4655"/>
-                </a:solidFill>
-                <a:latin typeface="Noto Sans SC"/>
-                <a:ea typeface="Noto Sans SC"/>
-                <a:cs typeface="Noto Sans SC"/>
-                <a:sym typeface="Noto Sans SC"/>
-              </a:rPr>
-              <a:t>单图生成</a:t>
-            </a:r>
-            <a:endParaRPr lang="en-US" sz="1300" b="0" i="0" u="none" strike="noStrike" dirty="0">
+            <a:endParaRPr lang="en-US" altLang="zh-CN" sz="1300" dirty="0">
               <a:solidFill>
                 <a:srgbClr val="3C4655"/>
               </a:solidFill>
               <a:latin typeface="Noto Sans SC"/>
               <a:ea typeface="Noto Sans SC"/>
-              <a:cs typeface="Noto Sans SC"/>
-              <a:sym typeface="Noto Sans SC"/>
             </a:endParaRPr>
           </a:p>
           <a:p>
-            <a:r>
-              <a:rPr lang="zh-CN" altLang="zh-CN" sz="1300" dirty="0">
-                <a:solidFill>
-                  <a:srgbClr val="3C4655"/>
+            <a:pPr>
+              <a:lnSpc>
+                <a:spcPct val="141666"/>
+              </a:lnSpc>
+            </a:pPr>
+            <a:r>
+              <a:rPr lang="zh-CN" altLang="zh-CN" sz="1300" b="1" dirty="0">
+                <a:solidFill>
+                  <a:srgbClr val="4472C4"/>
                 </a:solidFill>
                 <a:latin typeface="Noto Sans SC"/>
                 <a:ea typeface="Noto Sans SC"/>
               </a:rPr>
-              <a:t>单图生模是多模态扩展的核心能力。虽然技术风险较高，但这是达成 G1“单多视角 image 生成”的关键一环。</a:t>
-            </a:r>
-            <a:endParaRPr lang="en-US" sz="1300" dirty="0">
-              <a:solidFill>
-                <a:srgbClr val="3C4655"/>
-              </a:solidFill>
-              <a:latin typeface="Noto Sans SC"/>
-              <a:ea typeface="Noto Sans SC"/>
-              <a:sym typeface="Noto Sans SC"/>
-            </a:endParaRPr>
+              <a:t>US11</a:t>
+            </a:r>
+            <a:r>
+              <a:rPr lang="zh-CN" altLang="zh-CN" sz="1300" dirty="0">
+                <a:solidFill>
+                  <a:srgbClr val="3C4655"/>
+                </a:solidFill>
+                <a:latin typeface="Noto Sans SC"/>
+                <a:ea typeface="Noto Sans SC"/>
+              </a:rPr>
+              <a:t> 几何合法性检查</a:t>
+            </a:r>
+          </a:p>
+          <a:p>
+            <a:r>
+              <a:rPr lang="zh-CN" altLang="en-US" sz="1300" dirty="0">
+                <a:solidFill>
+                  <a:srgbClr val="3C4655"/>
+                </a:solidFill>
+                <a:latin typeface="Noto Sans SC"/>
+                <a:ea typeface="Noto Sans SC"/>
+              </a:rPr>
+              <a:t>直接支撑</a:t>
+            </a:r>
+            <a:r>
+              <a:rPr lang="en-US" altLang="zh-CN" sz="1300" dirty="0">
+                <a:solidFill>
+                  <a:srgbClr val="3C4655"/>
+                </a:solidFill>
+                <a:latin typeface="Noto Sans SC"/>
+                <a:ea typeface="Noto Sans SC"/>
+              </a:rPr>
+              <a:t>G3</a:t>
+            </a:r>
+            <a:r>
+              <a:rPr lang="zh-CN" altLang="en-US" sz="1300" dirty="0">
+                <a:solidFill>
+                  <a:srgbClr val="3C4655"/>
+                </a:solidFill>
+                <a:latin typeface="Noto Sans SC"/>
+                <a:ea typeface="Noto Sans SC"/>
+              </a:rPr>
+              <a:t>，是判断模型能否继续使用的基础检查。</a:t>
+            </a:r>
+          </a:p>
+          <a:p>
+            <a:pPr>
+              <a:lnSpc>
+                <a:spcPct val="141666"/>
+              </a:lnSpc>
+            </a:pPr>
+            <a:r>
+              <a:rPr lang="zh-CN" altLang="zh-CN" sz="1300" b="1" dirty="0">
+                <a:solidFill>
+                  <a:srgbClr val="4472C4"/>
+                </a:solidFill>
+                <a:latin typeface="Noto Sans SC"/>
+                <a:ea typeface="Noto Sans SC"/>
+              </a:rPr>
+              <a:t>US12 </a:t>
+            </a:r>
+            <a:r>
+              <a:rPr lang="zh-CN" altLang="zh-CN" sz="1300" dirty="0">
+                <a:solidFill>
+                  <a:srgbClr val="3C4655"/>
+                </a:solidFill>
+                <a:latin typeface="Noto Sans SC"/>
+                <a:ea typeface="Noto Sans SC"/>
+              </a:rPr>
+              <a:t>尺寸符合性检查</a:t>
+            </a:r>
+          </a:p>
+          <a:p>
+            <a:r>
+              <a:rPr lang="zh-CN" altLang="zh-CN" sz="1300" dirty="0">
+                <a:solidFill>
+                  <a:srgbClr val="3C4655"/>
+                </a:solidFill>
+                <a:latin typeface="Noto Sans SC"/>
+                <a:ea typeface="Noto Sans SC"/>
+              </a:rPr>
+              <a:t>直接支撑G3，验证G1生成尺寸是否符合要求。</a:t>
+            </a:r>
           </a:p>
         </p:txBody>
       </p:sp>
@@ -20968,12 +21872,298 @@
               <a:lnSpc>
                 <a:spcPct val="141666"/>
               </a:lnSpc>
-              <a:defRPr/>
             </a:pPr>
             <a:r>
-              <a:rPr lang="en-US" sz="1300" b="1" i="0" u="none" strike="noStrike" dirty="0">
+              <a:rPr lang="en-US" altLang="zh-CN" sz="1300" b="1" dirty="0">
                 <a:solidFill>
                   <a:srgbClr val="ED7D31"/>
+                </a:solidFill>
+                <a:latin typeface="Noto Sans SC"/>
+                <a:ea typeface="Noto Sans SC"/>
+                <a:sym typeface="Noto Sans SC"/>
+              </a:rPr>
+              <a:t>US03</a:t>
+            </a:r>
+            <a:r>
+              <a:rPr lang="en-US" altLang="zh-CN" sz="1300" b="0" i="0" u="none" strike="noStrike" dirty="0">
+                <a:solidFill>
+                  <a:srgbClr val="3C4655"/>
+                </a:solidFill>
+                <a:latin typeface="Noto Sans SC"/>
+                <a:ea typeface="Noto Sans SC"/>
+                <a:cs typeface="Noto Sans SC"/>
+                <a:sym typeface="Noto Sans SC"/>
+              </a:rPr>
+              <a:t> </a:t>
+            </a:r>
+            <a:r>
+              <a:rPr lang="zh-CN" altLang="en-US" sz="1300" b="0" i="0" u="none" strike="noStrike" dirty="0">
+                <a:solidFill>
+                  <a:srgbClr val="3C4655"/>
+                </a:solidFill>
+                <a:latin typeface="Noto Sans SC"/>
+                <a:ea typeface="Noto Sans SC"/>
+                <a:cs typeface="Noto Sans SC"/>
+                <a:sym typeface="Noto Sans SC"/>
+              </a:rPr>
+              <a:t>多视角生成</a:t>
+            </a:r>
+            <a:endParaRPr lang="en-US" altLang="zh-CN" sz="1300" b="0" i="0" u="none" strike="noStrike" dirty="0">
+              <a:solidFill>
+                <a:srgbClr val="3C4655"/>
+              </a:solidFill>
+              <a:latin typeface="Noto Sans SC"/>
+              <a:ea typeface="Noto Sans SC"/>
+              <a:cs typeface="Noto Sans SC"/>
+              <a:sym typeface="Noto Sans SC"/>
+            </a:endParaRPr>
+          </a:p>
+          <a:p>
+            <a:pPr marL="0" indent="0" algn="l">
+              <a:lnSpc>
+                <a:spcPct val="141666"/>
+              </a:lnSpc>
+            </a:pPr>
+            <a:r>
+              <a:rPr lang="zh-CN" altLang="en-US" sz="1300" b="0" i="0" u="none" strike="noStrike" dirty="0">
+                <a:solidFill>
+                  <a:srgbClr val="3C4655"/>
+                </a:solidFill>
+                <a:latin typeface="Noto Sans SC"/>
+                <a:ea typeface="Noto Sans SC"/>
+                <a:cs typeface="Noto Sans SC"/>
+                <a:sym typeface="Noto Sans SC"/>
+              </a:rPr>
+              <a:t>补全</a:t>
+            </a:r>
+            <a:r>
+              <a:rPr lang="en-US" altLang="zh-CN" sz="1300" b="0" i="0" u="none" strike="noStrike" dirty="0">
+                <a:solidFill>
+                  <a:srgbClr val="3C4655"/>
+                </a:solidFill>
+                <a:latin typeface="Noto Sans SC"/>
+                <a:ea typeface="Noto Sans SC"/>
+                <a:cs typeface="Noto Sans SC"/>
+                <a:sym typeface="Noto Sans SC"/>
+              </a:rPr>
+              <a:t>G1</a:t>
+            </a:r>
+            <a:r>
+              <a:rPr lang="zh-CN" altLang="en-US" sz="1300" b="0" i="0" u="none" strike="noStrike" dirty="0">
+                <a:solidFill>
+                  <a:srgbClr val="3C4655"/>
+                </a:solidFill>
+                <a:latin typeface="Noto Sans SC"/>
+                <a:ea typeface="Noto Sans SC"/>
+                <a:cs typeface="Noto Sans SC"/>
+                <a:sym typeface="Noto Sans SC"/>
+              </a:rPr>
+              <a:t>多视角能力，依赖</a:t>
+            </a:r>
+            <a:r>
+              <a:rPr lang="en-US" altLang="zh-CN" sz="1300" b="0" i="0" u="none" strike="noStrike" dirty="0">
+                <a:solidFill>
+                  <a:srgbClr val="3C4655"/>
+                </a:solidFill>
+                <a:latin typeface="Noto Sans SC"/>
+                <a:ea typeface="Noto Sans SC"/>
+                <a:cs typeface="Noto Sans SC"/>
+                <a:sym typeface="Noto Sans SC"/>
+              </a:rPr>
+              <a:t>US02</a:t>
+            </a:r>
+            <a:r>
+              <a:rPr lang="zh-CN" altLang="en-US" sz="1300" b="0" i="0" u="none" strike="noStrike" dirty="0">
+                <a:solidFill>
+                  <a:srgbClr val="3C4655"/>
+                </a:solidFill>
+                <a:latin typeface="Noto Sans SC"/>
+                <a:ea typeface="Noto Sans SC"/>
+                <a:cs typeface="Noto Sans SC"/>
+                <a:sym typeface="Noto Sans SC"/>
+              </a:rPr>
+              <a:t>，安排在单视角可用后实现。</a:t>
+            </a:r>
+          </a:p>
+          <a:p>
+            <a:pPr marL="0" indent="0" algn="l">
+              <a:lnSpc>
+                <a:spcPct val="141666"/>
+              </a:lnSpc>
+            </a:pPr>
+            <a:r>
+              <a:rPr lang="en-US" altLang="zh-CN" sz="1300" b="1" dirty="0">
+                <a:solidFill>
+                  <a:srgbClr val="ED7D31"/>
+                </a:solidFill>
+                <a:latin typeface="Noto Sans SC"/>
+                <a:ea typeface="Noto Sans SC"/>
+                <a:sym typeface="Noto Sans SC"/>
+              </a:rPr>
+              <a:t>US06 </a:t>
+            </a:r>
+            <a:r>
+              <a:rPr lang="zh-CN" altLang="en-US" sz="1300" b="0" i="0" u="none" strike="noStrike" dirty="0">
+                <a:solidFill>
+                  <a:srgbClr val="3C4655"/>
+                </a:solidFill>
+                <a:latin typeface="Noto Sans SC"/>
+                <a:ea typeface="Noto Sans SC"/>
+                <a:cs typeface="Noto Sans SC"/>
+                <a:sym typeface="Noto Sans SC"/>
+              </a:rPr>
+              <a:t>单图检索</a:t>
+            </a:r>
+            <a:endParaRPr lang="en-US" altLang="zh-CN" sz="1300" b="0" i="0" u="none" strike="noStrike" dirty="0">
+              <a:solidFill>
+                <a:srgbClr val="3C4655"/>
+              </a:solidFill>
+              <a:latin typeface="Noto Sans SC"/>
+              <a:ea typeface="Noto Sans SC"/>
+              <a:cs typeface="Noto Sans SC"/>
+              <a:sym typeface="Noto Sans SC"/>
+            </a:endParaRPr>
+          </a:p>
+          <a:p>
+            <a:pPr marL="0" indent="0" algn="l">
+              <a:lnSpc>
+                <a:spcPct val="141666"/>
+              </a:lnSpc>
+            </a:pPr>
+            <a:r>
+              <a:rPr lang="zh-CN" altLang="en-US" sz="1300" b="0" i="0" u="none" strike="noStrike" dirty="0">
+                <a:solidFill>
+                  <a:srgbClr val="3C4655"/>
+                </a:solidFill>
+                <a:latin typeface="Noto Sans SC"/>
+                <a:ea typeface="Noto Sans SC"/>
+                <a:cs typeface="Noto Sans SC"/>
+                <a:sym typeface="Noto Sans SC"/>
+              </a:rPr>
+              <a:t>扩展</a:t>
+            </a:r>
+            <a:r>
+              <a:rPr lang="en-US" altLang="zh-CN" sz="1300" b="0" i="0" u="none" strike="noStrike" dirty="0">
+                <a:solidFill>
+                  <a:srgbClr val="3C4655"/>
+                </a:solidFill>
+                <a:latin typeface="Noto Sans SC"/>
+                <a:ea typeface="Noto Sans SC"/>
+                <a:cs typeface="Noto Sans SC"/>
+                <a:sym typeface="Noto Sans SC"/>
+              </a:rPr>
+              <a:t>G2</a:t>
+            </a:r>
+            <a:r>
+              <a:rPr lang="zh-CN" altLang="en-US" sz="1300" b="0" i="0" u="none" strike="noStrike" dirty="0">
+                <a:solidFill>
+                  <a:srgbClr val="3C4655"/>
+                </a:solidFill>
+                <a:latin typeface="Noto Sans SC"/>
+                <a:ea typeface="Noto Sans SC"/>
+                <a:cs typeface="Noto Sans SC"/>
+                <a:sym typeface="Noto Sans SC"/>
+              </a:rPr>
+              <a:t>检索输入方式，依赖文本检索基础。</a:t>
+            </a:r>
+          </a:p>
+          <a:p>
+            <a:pPr marL="0" indent="0" algn="l">
+              <a:lnSpc>
+                <a:spcPct val="141666"/>
+              </a:lnSpc>
+            </a:pPr>
+            <a:r>
+              <a:rPr lang="en-US" altLang="zh-CN" sz="1300" b="1" dirty="0">
+                <a:solidFill>
+                  <a:srgbClr val="ED7D31"/>
+                </a:solidFill>
+                <a:latin typeface="Noto Sans SC"/>
+                <a:ea typeface="Noto Sans SC"/>
+                <a:sym typeface="Noto Sans SC"/>
+              </a:rPr>
+              <a:t>US07</a:t>
+            </a:r>
+            <a:r>
+              <a:rPr lang="en-US" altLang="zh-CN" sz="1300" b="0" i="0" u="none" strike="noStrike" dirty="0">
+                <a:solidFill>
+                  <a:srgbClr val="3C4655"/>
+                </a:solidFill>
+                <a:latin typeface="Noto Sans SC"/>
+                <a:ea typeface="Noto Sans SC"/>
+                <a:cs typeface="Noto Sans SC"/>
+                <a:sym typeface="Noto Sans SC"/>
+              </a:rPr>
+              <a:t> </a:t>
+            </a:r>
+            <a:r>
+              <a:rPr lang="zh-CN" altLang="en-US" sz="1300" b="0" i="0" u="none" strike="noStrike" dirty="0">
+                <a:solidFill>
+                  <a:srgbClr val="3C4655"/>
+                </a:solidFill>
+                <a:latin typeface="Noto Sans SC"/>
+                <a:ea typeface="Noto Sans SC"/>
+                <a:cs typeface="Noto Sans SC"/>
+                <a:sym typeface="Noto Sans SC"/>
+              </a:rPr>
+              <a:t>多图检索</a:t>
+            </a:r>
+            <a:endParaRPr lang="en-US" altLang="zh-CN" sz="1300" b="0" i="0" u="none" strike="noStrike" dirty="0">
+              <a:solidFill>
+                <a:srgbClr val="3C4655"/>
+              </a:solidFill>
+              <a:latin typeface="Noto Sans SC"/>
+              <a:ea typeface="Noto Sans SC"/>
+              <a:cs typeface="Noto Sans SC"/>
+              <a:sym typeface="Noto Sans SC"/>
+            </a:endParaRPr>
+          </a:p>
+          <a:p>
+            <a:pPr marL="0" indent="0" algn="l">
+              <a:lnSpc>
+                <a:spcPct val="141666"/>
+              </a:lnSpc>
+            </a:pPr>
+            <a:r>
+              <a:rPr lang="zh-CN" altLang="en-US" sz="1300" b="0" i="0" u="none" strike="noStrike" dirty="0">
+                <a:solidFill>
+                  <a:srgbClr val="3C4655"/>
+                </a:solidFill>
+                <a:latin typeface="Noto Sans SC"/>
+                <a:ea typeface="Noto Sans SC"/>
+                <a:cs typeface="Noto Sans SC"/>
+                <a:sym typeface="Noto Sans SC"/>
+              </a:rPr>
+              <a:t>补全</a:t>
+            </a:r>
+            <a:r>
+              <a:rPr lang="en-US" altLang="zh-CN" sz="1300" b="0" i="0" u="none" strike="noStrike" dirty="0">
+                <a:solidFill>
+                  <a:srgbClr val="3C4655"/>
+                </a:solidFill>
+                <a:latin typeface="Noto Sans SC"/>
+                <a:ea typeface="Noto Sans SC"/>
+                <a:cs typeface="Noto Sans SC"/>
+                <a:sym typeface="Noto Sans SC"/>
+              </a:rPr>
+              <a:t>G2</a:t>
+            </a:r>
+            <a:r>
+              <a:rPr lang="zh-CN" altLang="en-US" sz="1300" b="0" i="0" u="none" strike="noStrike" dirty="0">
+                <a:solidFill>
+                  <a:srgbClr val="3C4655"/>
+                </a:solidFill>
+                <a:latin typeface="Noto Sans SC"/>
+                <a:ea typeface="Noto Sans SC"/>
+                <a:cs typeface="Noto Sans SC"/>
+                <a:sym typeface="Noto Sans SC"/>
+              </a:rPr>
+              <a:t>多视角检索能力，依赖</a:t>
+            </a:r>
+            <a:r>
+              <a:rPr lang="en-US" altLang="zh-CN" sz="1300" b="0" i="0" u="none" strike="noStrike" dirty="0">
+                <a:solidFill>
+                  <a:srgbClr val="3C4655"/>
                 </a:solidFill>
                 <a:latin typeface="Noto Sans SC"/>
                 <a:ea typeface="Noto Sans SC"/>
@@ -20983,7 +22173,7 @@
               <a:t>US06</a:t>
             </a:r>
             <a:r>
-              <a:rPr lang="en-US" sz="1300" b="0" i="0" u="none" strike="noStrike" dirty="0">
+              <a:rPr lang="zh-CN" altLang="en-US" sz="1300" b="0" i="0" u="none" strike="noStrike" dirty="0">
                 <a:solidFill>
                   <a:srgbClr val="3C4655"/>
                 </a:solidFill>
@@ -20992,173 +22182,7 @@
                 <a:cs typeface="Noto Sans SC"/>
                 <a:sym typeface="Noto Sans SC"/>
               </a:rPr>
-              <a:t> </a:t>
-            </a:r>
-            <a:r>
-              <a:rPr lang="en-US" sz="1300" b="0" i="0" u="none" strike="noStrike" dirty="0" err="1">
-                <a:solidFill>
-                  <a:srgbClr val="3C4655"/>
-                </a:solidFill>
-                <a:latin typeface="Noto Sans SC"/>
-                <a:ea typeface="Noto Sans SC"/>
-                <a:cs typeface="Noto Sans SC"/>
-                <a:sym typeface="Noto Sans SC"/>
-              </a:rPr>
-              <a:t>单图检索</a:t>
-            </a:r>
-            <a:endParaRPr lang="en-US" sz="1100" dirty="0"/>
-          </a:p>
-          <a:p>
-            <a:pPr>
-              <a:lnSpc>
-                <a:spcPct val="141666"/>
-              </a:lnSpc>
-            </a:pPr>
-            <a:r>
-              <a:rPr lang="zh-CN" altLang="zh-CN" sz="1300" dirty="0">
-                <a:solidFill>
-                  <a:srgbClr val="3C4655"/>
-                </a:solidFill>
-                <a:latin typeface="Noto Sans SC"/>
-                <a:ea typeface="Noto Sans SC"/>
-              </a:rPr>
-              <a:t>单图检索是对文本检索能力的补充，实现 G2 的另一半目标。但它的技术实现依赖检索基础设施（如向量库）的搭建</a:t>
-            </a:r>
-            <a:r>
-              <a:rPr lang="zh-CN" altLang="en-US" sz="1300" dirty="0">
-                <a:solidFill>
-                  <a:srgbClr val="3C4655"/>
-                </a:solidFill>
-                <a:latin typeface="Noto Sans SC"/>
-                <a:ea typeface="Noto Sans SC"/>
-              </a:rPr>
-              <a:t>。</a:t>
-            </a:r>
-            <a:endParaRPr lang="en-US" altLang="zh-CN" sz="1300" dirty="0">
-              <a:solidFill>
-                <a:srgbClr val="3C4655"/>
-              </a:solidFill>
-              <a:latin typeface="Noto Sans SC"/>
-              <a:ea typeface="Noto Sans SC"/>
-            </a:endParaRPr>
-          </a:p>
-          <a:p>
-            <a:pPr>
-              <a:lnSpc>
-                <a:spcPct val="141666"/>
-              </a:lnSpc>
-            </a:pPr>
-            <a:r>
-              <a:rPr lang="en-US" sz="1300" b="1" dirty="0">
-                <a:solidFill>
-                  <a:srgbClr val="ED7D31"/>
-                </a:solidFill>
-                <a:latin typeface="Noto Sans SC"/>
-                <a:ea typeface="Noto Sans SC"/>
-                <a:sym typeface="Noto Sans SC"/>
-              </a:rPr>
-              <a:t>US03</a:t>
-            </a:r>
-            <a:r>
-              <a:rPr lang="en-US" sz="1300" dirty="0">
-                <a:solidFill>
-                  <a:srgbClr val="3C4655"/>
-                </a:solidFill>
-                <a:latin typeface="Noto Sans SC"/>
-                <a:ea typeface="Noto Sans SC"/>
-                <a:sym typeface="Noto Sans SC"/>
-              </a:rPr>
-              <a:t> </a:t>
-            </a:r>
-            <a:r>
-              <a:rPr lang="en-US" sz="1300" dirty="0" err="1">
-                <a:solidFill>
-                  <a:srgbClr val="3C4655"/>
-                </a:solidFill>
-                <a:latin typeface="Noto Sans SC"/>
-                <a:ea typeface="Noto Sans SC"/>
-                <a:sym typeface="Noto Sans SC"/>
-              </a:rPr>
-              <a:t>多视角生成</a:t>
-            </a:r>
-            <a:endParaRPr lang="en-US" sz="1300" dirty="0">
-              <a:solidFill>
-                <a:srgbClr val="3C4655"/>
-              </a:solidFill>
-              <a:latin typeface="Noto Sans SC"/>
-              <a:ea typeface="Noto Sans SC"/>
-              <a:sym typeface="Noto Sans SC"/>
-            </a:endParaRPr>
-          </a:p>
-          <a:p>
-            <a:pPr>
-              <a:lnSpc>
-                <a:spcPct val="141666"/>
-              </a:lnSpc>
-            </a:pPr>
-            <a:r>
-              <a:rPr lang="zh-CN" altLang="zh-CN" sz="1300" dirty="0">
-                <a:solidFill>
-                  <a:srgbClr val="3C4655"/>
-                </a:solidFill>
-                <a:latin typeface="Noto Sans SC"/>
-                <a:ea typeface="Noto Sans SC"/>
-              </a:rPr>
-              <a:t>多视图生成是高阶需求，能显著提升生成成功率，但需要更多的图像预处理和特征融合逻辑</a:t>
-            </a:r>
-            <a:r>
-              <a:rPr lang="en-US" sz="1300" dirty="0">
-                <a:solidFill>
-                  <a:srgbClr val="3C4655"/>
-                </a:solidFill>
-                <a:latin typeface="Noto Sans SC"/>
-                <a:ea typeface="Noto Sans SC"/>
-                <a:sym typeface="Noto Sans SC"/>
-              </a:rPr>
-              <a:t>。</a:t>
-            </a:r>
-          </a:p>
-          <a:p>
-            <a:pPr marL="0" indent="0" algn="l">
-              <a:lnSpc>
-                <a:spcPct val="141666"/>
-              </a:lnSpc>
-            </a:pPr>
-            <a:r>
-              <a:rPr lang="en-US" sz="1300" b="1" i="0" u="none" strike="noStrike" dirty="0">
-                <a:solidFill>
-                  <a:srgbClr val="ED7D31"/>
-                </a:solidFill>
-                <a:latin typeface="Noto Sans SC"/>
-                <a:ea typeface="Noto Sans SC"/>
-                <a:cs typeface="Noto Sans SC"/>
-                <a:sym typeface="Noto Sans SC"/>
-              </a:rPr>
-              <a:t>US07</a:t>
-            </a:r>
-            <a:r>
-              <a:rPr lang="en-US" sz="1300" b="0" i="0" u="none" strike="noStrike" dirty="0">
-                <a:solidFill>
-                  <a:srgbClr val="3C4655"/>
-                </a:solidFill>
-                <a:latin typeface="Noto Sans SC"/>
-                <a:ea typeface="Noto Sans SC"/>
-                <a:cs typeface="Noto Sans SC"/>
-                <a:sym typeface="Noto Sans SC"/>
-              </a:rPr>
-              <a:t> </a:t>
-            </a:r>
-            <a:r>
-              <a:rPr lang="en-US" sz="1300" b="0" i="0" u="none" strike="noStrike" dirty="0" err="1">
-                <a:solidFill>
-                  <a:srgbClr val="3C4655"/>
-                </a:solidFill>
-                <a:latin typeface="Noto Sans SC"/>
-                <a:ea typeface="Noto Sans SC"/>
-                <a:cs typeface="Noto Sans SC"/>
-                <a:sym typeface="Noto Sans SC"/>
-              </a:rPr>
-              <a:t>多图检索</a:t>
+              <a:t>，避免基础匹配与融合问题互相干扰。</a:t>
             </a:r>
             <a:endParaRPr lang="en-US" sz="1300" b="0" i="0" u="none" strike="noStrike" dirty="0">
               <a:solidFill>
@@ -21169,37 +22193,6 @@
               <a:cs typeface="Noto Sans SC"/>
               <a:sym typeface="Noto Sans SC"/>
             </a:endParaRPr>
-          </a:p>
-          <a:p>
-            <a:pPr marL="0" indent="0" algn="l">
-              <a:lnSpc>
-                <a:spcPct val="141666"/>
-              </a:lnSpc>
-            </a:pPr>
-            <a:r>
-              <a:rPr lang="en-US" sz="1300" b="0" i="0" u="none" strike="noStrike" dirty="0" err="1">
-                <a:solidFill>
-                  <a:srgbClr val="3C4655"/>
-                </a:solidFill>
-                <a:latin typeface="Noto Sans SC"/>
-                <a:ea typeface="Noto Sans SC"/>
-                <a:cs typeface="Noto Sans SC"/>
-                <a:sym typeface="Noto Sans SC"/>
-              </a:rPr>
-              <a:t>同样依赖单图检索；判断多图是否为同一零件，难度较高</a:t>
-            </a:r>
-            <a:r>
-              <a:rPr lang="en-US" sz="1300" b="0" i="0" u="none" strike="noStrike" dirty="0">
-                <a:solidFill>
-                  <a:srgbClr val="3C4655"/>
-                </a:solidFill>
-                <a:latin typeface="Noto Sans SC"/>
-                <a:ea typeface="Noto Sans SC"/>
-                <a:cs typeface="Noto Sans SC"/>
-                <a:sym typeface="Noto Sans SC"/>
-              </a:rPr>
-              <a:t>。</a:t>
-            </a:r>
           </a:p>
         </p:txBody>
       </p:sp>
@@ -21273,7 +22266,19 @@
               <a:defRPr/>
             </a:pPr>
             <a:r>
-              <a:rPr lang="en-US" sz="1500" b="1" i="0" u="none" strike="noStrike">
+              <a:rPr lang="zh-CN" altLang="en-US" sz="1500" b="1" dirty="0">
+                <a:solidFill>
+                  <a:srgbClr val="FFFFFF"/>
+                </a:solidFill>
+                <a:latin typeface="Noto Sans SC"/>
+                <a:ea typeface="Noto Sans SC"/>
+                <a:cs typeface="Noto Sans SC"/>
+                <a:sym typeface="Noto Sans SC"/>
+              </a:rPr>
+              <a:t>较</a:t>
+            </a:r>
+            <a:r>
+              <a:rPr lang="en-US" sz="1500" b="1" i="0" u="none" strike="noStrike" dirty="0">
                 <a:solidFill>
                   <a:srgbClr val="FFFFFF"/>
                 </a:solidFill>
@@ -21284,7 +22289,7 @@
               </a:rPr>
               <a:t>低</a:t>
             </a:r>
-            <a:endParaRPr lang="en-US" sz="1100"/>
+            <a:endParaRPr lang="en-US" sz="1100" dirty="0"/>
           </a:p>
         </p:txBody>
       </p:sp>
@@ -21320,7 +22325,7 @@
               <a:defRPr/>
             </a:pPr>
             <a:r>
-              <a:rPr lang="en-US" sz="1300" b="1" i="0" u="none" strike="noStrike" dirty="0">
+              <a:rPr lang="en-US" altLang="zh-CN" sz="1300" b="1" dirty="0">
                 <a:solidFill>
                   <a:srgbClr val="788291"/>
                 </a:solidFill>
@@ -21329,9 +22334,41 @@
                 <a:cs typeface="Noto Sans SC"/>
                 <a:sym typeface="Noto Sans SC"/>
               </a:rPr>
-              <a:t>US08 / US09 / US10</a:t>
-            </a:r>
-            <a:endParaRPr lang="en-US" sz="1100" dirty="0"/>
+              <a:t>US08</a:t>
+            </a:r>
+            <a:r>
+              <a:rPr lang="en-US" altLang="zh-CN" sz="1300" b="0" i="0" u="none" strike="noStrike" dirty="0">
+                <a:solidFill>
+                  <a:srgbClr val="3C4655"/>
+                </a:solidFill>
+                <a:latin typeface="Noto Sans SC"/>
+                <a:ea typeface="Noto Sans SC"/>
+                <a:cs typeface="Noto Sans SC"/>
+                <a:sym typeface="Noto Sans SC"/>
+              </a:rPr>
+              <a:t> </a:t>
+            </a:r>
+            <a:r>
+              <a:rPr lang="zh-CN" altLang="en-US" sz="1300" b="0" i="0" u="none" strike="noStrike" dirty="0">
+                <a:solidFill>
+                  <a:srgbClr val="3C4655"/>
+                </a:solidFill>
+                <a:latin typeface="Noto Sans SC"/>
+                <a:ea typeface="Noto Sans SC"/>
+                <a:cs typeface="Noto Sans SC"/>
+                <a:sym typeface="Noto Sans SC"/>
+              </a:rPr>
+              <a:t>溯源信息</a:t>
+            </a:r>
+            <a:endParaRPr lang="en-US" altLang="zh-CN" sz="1300" b="0" i="0" u="none" strike="noStrike" dirty="0">
+              <a:solidFill>
+                <a:srgbClr val="3C4655"/>
+              </a:solidFill>
+              <a:latin typeface="Noto Sans SC"/>
+              <a:ea typeface="Noto Sans SC"/>
+              <a:cs typeface="Noto Sans SC"/>
+              <a:sym typeface="Noto Sans SC"/>
+            </a:endParaRPr>
           </a:p>
           <a:p>
             <a:pPr marL="0" indent="0" algn="l">
@@ -21340,7 +22377,7 @@
               </a:lnSpc>
             </a:pPr>
             <a:r>
-              <a:rPr lang="en-US" sz="1300" b="0" i="0" u="none" strike="noStrike" dirty="0" err="1">
+              <a:rPr lang="zh-CN" altLang="en-US" sz="1300" b="0" i="0" u="none" strike="noStrike" dirty="0">
                 <a:solidFill>
                   <a:srgbClr val="3C4655"/>
                 </a:solidFill>
@@ -21349,10 +22386,10 @@
                 <a:cs typeface="Noto Sans SC"/>
                 <a:sym typeface="Noto Sans SC"/>
               </a:rPr>
-              <a:t>来源、规格、版本信息展示</a:t>
-            </a:r>
-            <a:r>
-              <a:rPr lang="en-US" sz="1300" b="0" i="0" u="none" strike="noStrike" dirty="0">
+              <a:t>支撑</a:t>
+            </a:r>
+            <a:r>
+              <a:rPr lang="en-US" altLang="zh-CN" sz="1300" b="0" i="0" u="none" strike="noStrike" dirty="0">
                 <a:solidFill>
                   <a:srgbClr val="3C4655"/>
                 </a:solidFill>
@@ -21361,7 +22398,19 @@
                 <a:cs typeface="Noto Sans SC"/>
                 <a:sym typeface="Noto Sans SC"/>
               </a:rPr>
-              <a:t>。</a:t>
+              <a:t>G2</a:t>
+            </a:r>
+            <a:r>
+              <a:rPr lang="zh-CN" altLang="en-US" sz="1300" b="0" i="0" u="none" strike="noStrike" dirty="0">
+                <a:solidFill>
+                  <a:srgbClr val="3C4655"/>
+                </a:solidFill>
+                <a:latin typeface="Noto Sans SC"/>
+                <a:ea typeface="Noto Sans SC"/>
+                <a:cs typeface="Noto Sans SC"/>
+                <a:sym typeface="Noto Sans SC"/>
+              </a:rPr>
+              <a:t>来源可追溯，但核心生成和检索流程对其依赖较少。</a:t>
             </a:r>
           </a:p>
           <a:p>
@@ -21369,27 +22418,148 @@
               <a:lnSpc>
                 <a:spcPct val="141666"/>
               </a:lnSpc>
-              <a:defRPr/>
             </a:pPr>
             <a:r>
-              <a:rPr lang="zh-CN" altLang="zh-CN" sz="1300" dirty="0">
-                <a:solidFill>
-                  <a:srgbClr val="3C4655"/>
+              <a:rPr lang="en-US" altLang="zh-CN" sz="1300" b="1" dirty="0">
+                <a:solidFill>
+                  <a:srgbClr val="788291"/>
                 </a:solidFill>
                 <a:latin typeface="Noto Sans SC"/>
                 <a:ea typeface="Noto Sans SC"/>
+                <a:cs typeface="Noto Sans SC"/>
+                <a:sym typeface="Noto Sans SC"/>
               </a:rPr>
-              <a:t> 这三个用户故事主要服务于检索结果的信息呈现，属于 G2 目标的附属部分。在核心的检索算法（US05-07）尚未稳定返回准确结果前，展示溯源、规格、版本等详细数据没有实际意义。</a:t>
-            </a:r>
-            <a:endParaRPr lang="en-US" altLang="zh-CN" sz="1300" dirty="0">
+              <a:t>US09 </a:t>
+            </a:r>
+            <a:r>
+              <a:rPr lang="zh-CN" altLang="en-US" sz="1300" b="0" i="0" u="none" strike="noStrike" dirty="0">
+                <a:solidFill>
+                  <a:srgbClr val="3C4655"/>
+                </a:solidFill>
+                <a:latin typeface="Noto Sans SC"/>
+                <a:ea typeface="Noto Sans SC"/>
+                <a:cs typeface="Noto Sans SC"/>
+                <a:sym typeface="Noto Sans SC"/>
+              </a:rPr>
+              <a:t>规格信息</a:t>
+            </a:r>
+            <a:endParaRPr lang="en-US" altLang="zh-CN" sz="1300" b="0" i="0" u="none" strike="noStrike" dirty="0">
               <a:solidFill>
                 <a:srgbClr val="3C4655"/>
               </a:solidFill>
               <a:latin typeface="Noto Sans SC"/>
               <a:ea typeface="Noto Sans SC"/>
+              <a:cs typeface="Noto Sans SC"/>
+              <a:sym typeface="Noto Sans SC"/>
             </a:endParaRPr>
           </a:p>
           <a:p>
+            <a:pPr marL="0" indent="0" algn="l">
+              <a:lnSpc>
+                <a:spcPct val="141666"/>
+              </a:lnSpc>
+            </a:pPr>
+            <a:r>
+              <a:rPr lang="zh-CN" altLang="en-US" sz="1300" b="0" i="0" u="none" strike="noStrike" dirty="0">
+                <a:solidFill>
+                  <a:srgbClr val="3C4655"/>
+                </a:solidFill>
+                <a:latin typeface="Noto Sans SC"/>
+                <a:ea typeface="Noto Sans SC"/>
+                <a:cs typeface="Noto Sans SC"/>
+                <a:sym typeface="Noto Sans SC"/>
+              </a:rPr>
+              <a:t>帮助用户判断检索资产是否适用，依赖结果及规格字段。</a:t>
+            </a:r>
+          </a:p>
+          <a:p>
+            <a:pPr>
+              <a:lnSpc>
+                <a:spcPct val="141666"/>
+              </a:lnSpc>
+            </a:pPr>
+            <a:r>
+              <a:rPr lang="en-US" altLang="zh-CN" sz="1300" b="1" dirty="0">
+                <a:solidFill>
+                  <a:srgbClr val="788291"/>
+                </a:solidFill>
+                <a:latin typeface="Noto Sans SC"/>
+                <a:ea typeface="Noto Sans SC"/>
+                <a:cs typeface="Noto Sans SC"/>
+                <a:sym typeface="Noto Sans SC"/>
+              </a:rPr>
+              <a:t>US10</a:t>
+            </a:r>
+            <a:r>
+              <a:rPr lang="en-US" altLang="zh-CN" sz="1100" dirty="0">
+                <a:ea typeface="Noto Sans SC"/>
+              </a:rPr>
+              <a:t> </a:t>
+            </a:r>
+            <a:r>
+              <a:rPr lang="zh-CN" altLang="en-US" sz="1300" b="0" i="0" u="none" strike="noStrike" dirty="0">
+                <a:solidFill>
+                  <a:srgbClr val="3C4655"/>
+                </a:solidFill>
+                <a:latin typeface="Noto Sans SC"/>
+                <a:ea typeface="Noto Sans SC"/>
+                <a:cs typeface="Noto Sans SC"/>
+                <a:sym typeface="Noto Sans SC"/>
+              </a:rPr>
+              <a:t>版本信息</a:t>
+            </a:r>
+            <a:endParaRPr lang="en-US" altLang="zh-CN" sz="1300" b="0" i="0" u="none" strike="noStrike" dirty="0">
+              <a:solidFill>
+                <a:srgbClr val="3C4655"/>
+              </a:solidFill>
+              <a:latin typeface="Noto Sans SC"/>
+              <a:ea typeface="Noto Sans SC"/>
+              <a:cs typeface="Noto Sans SC"/>
+              <a:sym typeface="Noto Sans SC"/>
+            </a:endParaRPr>
+          </a:p>
+          <a:p>
+            <a:pPr marL="0" indent="0" algn="l">
+              <a:lnSpc>
+                <a:spcPct val="141666"/>
+              </a:lnSpc>
+            </a:pPr>
+            <a:r>
+              <a:rPr lang="zh-CN" altLang="en-US" sz="1300" b="0" i="0" u="none" strike="noStrike" dirty="0">
+                <a:solidFill>
+                  <a:srgbClr val="3C4655"/>
+                </a:solidFill>
+                <a:latin typeface="Noto Sans SC"/>
+                <a:ea typeface="Noto Sans SC"/>
+                <a:cs typeface="Noto Sans SC"/>
+                <a:sym typeface="Noto Sans SC"/>
+              </a:rPr>
+              <a:t>支撑</a:t>
+            </a:r>
+            <a:r>
+              <a:rPr lang="en-US" altLang="zh-CN" sz="1300" b="0" i="0" u="none" strike="noStrike" dirty="0">
+                <a:solidFill>
+                  <a:srgbClr val="3C4655"/>
+                </a:solidFill>
+                <a:latin typeface="Noto Sans SC"/>
+                <a:ea typeface="Noto Sans SC"/>
+                <a:cs typeface="Noto Sans SC"/>
+                <a:sym typeface="Noto Sans SC"/>
+              </a:rPr>
+              <a:t>G2</a:t>
+            </a:r>
+            <a:r>
+              <a:rPr lang="zh-CN" altLang="en-US" sz="1300" b="0" i="0" u="none" strike="noStrike" dirty="0">
+                <a:solidFill>
+                  <a:srgbClr val="3C4655"/>
+                </a:solidFill>
+                <a:latin typeface="Noto Sans SC"/>
+                <a:ea typeface="Noto Sans SC"/>
+                <a:cs typeface="Noto Sans SC"/>
+                <a:sym typeface="Noto Sans SC"/>
+              </a:rPr>
+              <a:t>版本可识别，其他核心功能对其展示依赖较少</a:t>
+            </a:r>
             <a:endParaRPr lang="en-US" sz="1300" b="0" i="0" u="none" strike="noStrike" dirty="0">
               <a:solidFill>
                 <a:srgbClr val="3C4655"/>
@@ -21578,1071 +22748,6 @@
           </a:p>
         </p:txBody>
       </p:sp>
-      <p:graphicFrame>
-        <p:nvGraphicFramePr>
-          <p:cNvPr id="4" name="Table 4"/>
-          <p:cNvGraphicFramePr>
-            <a:graphicFrameLocks noGrp="1"/>
-          </p:cNvGraphicFramePr>
-          <p:nvPr>
-            <p:extLst>
-              <p:ext uri="{D42A27DB-BD31-4B8C-83A1-F6EECF244321}">
-                <p14:modId xmlns:p14="http://schemas.microsoft.com/office/powerpoint/2010/main" val="22609273"/>
-              </p:ext>
-            </p:extLst>
-          </p:nvPr>
-        </p:nvGraphicFramePr>
-        <p:xfrm>
-          <a:off x="1016000" y="1905000"/>
-          <a:ext cx="10160000" cy="2590800"/>
-        </p:xfrm>
-        <a:graphic>
-          <a:graphicData uri="http://schemas.openxmlformats.org/drawingml/2006/table">
-            <a:tbl>
-              <a:tblPr>
-                <a:effectLst/>
-              </a:tblPr>
-              <a:tblGrid>
-                <a:gridCol w="1143000">
-                  <a:extLst>
-                    <a:ext uri="{9D8B030D-6E8A-4147-A177-3AD203B41FA5}">
-                      <a16:colId xmlns:a16="http://schemas.microsoft.com/office/drawing/2014/main" val="20000"/>
-                    </a:ext>
-                  </a:extLst>
-                </a:gridCol>
-                <a:gridCol w="1397000">
-                  <a:extLst>
-                    <a:ext uri="{9D8B030D-6E8A-4147-A177-3AD203B41FA5}">
-                      <a16:colId xmlns:a16="http://schemas.microsoft.com/office/drawing/2014/main" val="20001"/>
-                    </a:ext>
-                  </a:extLst>
-                </a:gridCol>
-                <a:gridCol w="889000">
-                  <a:extLst>
-                    <a:ext uri="{9D8B030D-6E8A-4147-A177-3AD203B41FA5}">
-                      <a16:colId xmlns:a16="http://schemas.microsoft.com/office/drawing/2014/main" val="20002"/>
-                    </a:ext>
-                  </a:extLst>
-                </a:gridCol>
-                <a:gridCol w="6731000">
-                  <a:extLst>
-                    <a:ext uri="{9D8B030D-6E8A-4147-A177-3AD203B41FA5}">
-                      <a16:colId xmlns:a16="http://schemas.microsoft.com/office/drawing/2014/main" val="20003"/>
-                    </a:ext>
-                  </a:extLst>
-                </a:gridCol>
-              </a:tblGrid>
-              <a:tr h="393700">
-                <a:tc>
-                  <a:txBody>
-                    <a:bodyPr/>
-                    <a:lstStyle/>
-                    <a:p>
-                      <a:pPr marL="0" indent="0" algn="ctr">
-                        <a:lnSpc>
-                          <a:spcPct val="100000"/>
-                        </a:lnSpc>
-                        <a:defRPr/>
-                      </a:pPr>
-                      <a:r>
-                        <a:rPr lang="en-US" sz="1200" b="1" i="0" u="none" strike="noStrike">
-                          <a:solidFill>
-                            <a:srgbClr val="FFFFFF"/>
-                          </a:solidFill>
-                          <a:latin typeface="Noto Sans SC"/>
-                          <a:ea typeface="Noto Sans SC"/>
-                          <a:cs typeface="Noto Sans SC"/>
-                          <a:sym typeface="Noto Sans SC"/>
-                        </a:rPr>
-                        <a:t>成员</a:t>
-                      </a:r>
-                      <a:endParaRPr lang="en-US" sz="1100"/>
-                    </a:p>
-                  </a:txBody>
-                  <a:tcPr marL="101600" marR="101600" marT="101600" marB="101600" anchor="ctr">
-                    <a:lnL>
-                      <a:noFill/>
-                    </a:lnL>
-                    <a:lnR>
-                      <a:noFill/>
-                    </a:lnR>
-                    <a:lnT>
-                      <a:noFill/>
-                    </a:lnT>
-                    <a:lnB>
-                      <a:noFill/>
-                    </a:lnB>
-                    <a:solidFill>
-                      <a:srgbClr val="4472C4">
-                        <a:alpha val="100000"/>
-                      </a:srgbClr>
-                    </a:solidFill>
-                  </a:tcPr>
-                </a:tc>
-                <a:tc>
-                  <a:txBody>
-                    <a:bodyPr/>
-                    <a:lstStyle/>
-                    <a:p>
-                      <a:pPr marL="0" indent="0" algn="ctr">
-                        <a:lnSpc>
-                          <a:spcPct val="100000"/>
-                        </a:lnSpc>
-                        <a:defRPr/>
-                      </a:pPr>
-                      <a:r>
-                        <a:rPr lang="en-US" sz="1200" b="1" i="0" u="none" strike="noStrike">
-                          <a:solidFill>
-                            <a:srgbClr val="FFFFFF"/>
-                          </a:solidFill>
-                          <a:latin typeface="Noto Sans SC"/>
-                          <a:ea typeface="Noto Sans SC"/>
-                          <a:cs typeface="Noto Sans SC"/>
-                          <a:sym typeface="Noto Sans SC"/>
-                        </a:rPr>
-                        <a:t>负责故事</a:t>
-                      </a:r>
-                      <a:endParaRPr lang="en-US" sz="1100"/>
-                    </a:p>
-                  </a:txBody>
-                  <a:tcPr marL="101600" marR="101600" marT="101600" marB="101600" anchor="ctr">
-                    <a:lnL>
-                      <a:noFill/>
-                    </a:lnL>
-                    <a:lnR>
-                      <a:noFill/>
-                    </a:lnR>
-                    <a:lnT>
-                      <a:noFill/>
-                    </a:lnT>
-                    <a:lnB>
-                      <a:noFill/>
-                    </a:lnB>
-                    <a:solidFill>
-                      <a:srgbClr val="4472C4">
-                        <a:alpha val="100000"/>
-                      </a:srgbClr>
-                    </a:solidFill>
-                  </a:tcPr>
-                </a:tc>
-                <a:tc>
-                  <a:txBody>
-                    <a:bodyPr/>
-                    <a:lstStyle/>
-                    <a:p>
-                      <a:pPr marL="0" indent="0" algn="ctr">
-                        <a:lnSpc>
-                          <a:spcPct val="100000"/>
-                        </a:lnSpc>
-                        <a:defRPr/>
-                      </a:pPr>
-                      <a:r>
-                        <a:rPr lang="en-US" sz="1200" b="1" i="0" u="none" strike="noStrike">
-                          <a:solidFill>
-                            <a:srgbClr val="FFFFFF"/>
-                          </a:solidFill>
-                          <a:latin typeface="Noto Sans SC"/>
-                          <a:ea typeface="Noto Sans SC"/>
-                          <a:cs typeface="Noto Sans SC"/>
-                          <a:sym typeface="Noto Sans SC"/>
-                        </a:rPr>
-                        <a:t>故事点</a:t>
-                      </a:r>
-                      <a:endParaRPr lang="en-US" sz="1100"/>
-                    </a:p>
-                  </a:txBody>
-                  <a:tcPr marL="101600" marR="101600" marT="101600" marB="101600" anchor="ctr">
-                    <a:lnL>
-                      <a:noFill/>
-                    </a:lnL>
-                    <a:lnR>
-                      <a:noFill/>
-                    </a:lnR>
-                    <a:lnT>
-                      <a:noFill/>
-                    </a:lnT>
-                    <a:lnB>
-                      <a:noFill/>
-                    </a:lnB>
-                    <a:solidFill>
-                      <a:srgbClr val="4472C4">
-                        <a:alpha val="100000"/>
-                      </a:srgbClr>
-                    </a:solidFill>
-                  </a:tcPr>
-                </a:tc>
-                <a:tc>
-                  <a:txBody>
-                    <a:bodyPr/>
-                    <a:lstStyle/>
-                    <a:p>
-                      <a:pPr marL="0" indent="0" algn="l">
-                        <a:lnSpc>
-                          <a:spcPct val="100000"/>
-                        </a:lnSpc>
-                        <a:defRPr/>
-                      </a:pPr>
-                      <a:r>
-                        <a:rPr lang="en-US" sz="1200" b="1" i="0" u="none" strike="noStrike">
-                          <a:solidFill>
-                            <a:srgbClr val="FFFFFF"/>
-                          </a:solidFill>
-                          <a:latin typeface="Noto Sans SC"/>
-                          <a:ea typeface="Noto Sans SC"/>
-                          <a:cs typeface="Noto Sans SC"/>
-                          <a:sym typeface="Noto Sans SC"/>
-                        </a:rPr>
-                        <a:t>内容</a:t>
-                      </a:r>
-                      <a:endParaRPr lang="en-US" sz="1100"/>
-                    </a:p>
-                  </a:txBody>
-                  <a:tcPr marL="101600" marR="0" marT="101600" marB="101600" anchor="ctr">
-                    <a:lnL>
-                      <a:noFill/>
-                    </a:lnL>
-                    <a:lnR>
-                      <a:noFill/>
-                    </a:lnR>
-                    <a:lnT>
-                      <a:noFill/>
-                    </a:lnT>
-                    <a:lnB>
-                      <a:noFill/>
-                    </a:lnB>
-                    <a:solidFill>
-                      <a:srgbClr val="4472C4">
-                        <a:alpha val="100000"/>
-                      </a:srgbClr>
-                    </a:solidFill>
-                  </a:tcPr>
-                </a:tc>
-                <a:extLst>
-                  <a:ext uri="{0D108BD9-81ED-4DB2-BD59-A6C34878D82A}">
-                    <a16:rowId xmlns:a16="http://schemas.microsoft.com/office/drawing/2014/main" val="10000"/>
-                  </a:ext>
-                </a:extLst>
-              </a:tr>
-              <a:tr h="546100">
-                <a:tc>
-                  <a:txBody>
-                    <a:bodyPr/>
-                    <a:lstStyle/>
-                    <a:p>
-                      <a:pPr marL="0" indent="0" algn="ctr">
-                        <a:lnSpc>
-                          <a:spcPct val="100000"/>
-                        </a:lnSpc>
-                        <a:defRPr/>
-                      </a:pPr>
-                      <a:r>
-                        <a:rPr lang="en-US" sz="1200" b="1" i="0" u="none" strike="noStrike">
-                          <a:solidFill>
-                            <a:srgbClr val="2B2F36"/>
-                          </a:solidFill>
-                          <a:latin typeface="Noto Sans SC"/>
-                          <a:ea typeface="Noto Sans SC"/>
-                          <a:cs typeface="Noto Sans SC"/>
-                          <a:sym typeface="Noto Sans SC"/>
-                        </a:rPr>
-                        <a:t>常诚</a:t>
-                      </a:r>
-                      <a:endParaRPr lang="en-US" sz="1100"/>
-                    </a:p>
-                  </a:txBody>
-                  <a:tcPr marL="101600" marR="101600" marT="101600" marB="101600" anchor="ctr">
-                    <a:lnL>
-                      <a:noFill/>
-                    </a:lnL>
-                    <a:lnR>
-                      <a:noFill/>
-                    </a:lnR>
-                    <a:lnT>
-                      <a:noFill/>
-                    </a:lnT>
-                    <a:lnB>
-                      <a:noFill/>
-                    </a:lnB>
-                    <a:noFill/>
-                  </a:tcPr>
-                </a:tc>
-                <a:tc>
-                  <a:txBody>
-                    <a:bodyPr/>
-                    <a:lstStyle/>
-                    <a:p>
-                      <a:pPr marL="0" indent="0" algn="ctr">
-                        <a:lnSpc>
-                          <a:spcPct val="100000"/>
-                        </a:lnSpc>
-                        <a:defRPr/>
-                      </a:pPr>
-                      <a:r>
-                        <a:rPr lang="en-US" sz="1100" b="0" i="0" u="none" strike="noStrike">
-                          <a:solidFill>
-                            <a:srgbClr val="5A6473"/>
-                          </a:solidFill>
-                          <a:latin typeface="Noto Sans SC"/>
-                          <a:ea typeface="Noto Sans SC"/>
-                          <a:cs typeface="Noto Sans SC"/>
-                          <a:sym typeface="Noto Sans SC"/>
-                        </a:rPr>
-                        <a:t>US01 · US04</a:t>
-                      </a:r>
-                      <a:endParaRPr lang="en-US" sz="1100"/>
-                    </a:p>
-                  </a:txBody>
-                  <a:tcPr marL="101600" marR="101600" marT="101600" marB="101600" anchor="ctr">
-                    <a:lnL>
-                      <a:noFill/>
-                    </a:lnL>
-                    <a:lnR>
-                      <a:noFill/>
-                    </a:lnR>
-                    <a:lnT>
-                      <a:noFill/>
-                    </a:lnT>
-                    <a:lnB>
-                      <a:noFill/>
-                    </a:lnB>
-                    <a:noFill/>
-                  </a:tcPr>
-                </a:tc>
-                <a:tc>
-                  <a:txBody>
-                    <a:bodyPr/>
-                    <a:lstStyle/>
-                    <a:p>
-                      <a:pPr marL="0" indent="0" algn="ctr">
-                        <a:lnSpc>
-                          <a:spcPct val="100000"/>
-                        </a:lnSpc>
-                        <a:defRPr/>
-                      </a:pPr>
-                      <a:r>
-                        <a:rPr lang="en-US" sz="1100" b="0" i="0" u="none" strike="noStrike" dirty="0">
-                          <a:solidFill>
-                            <a:srgbClr val="2B2F36"/>
-                          </a:solidFill>
-                          <a:latin typeface="Noto Sans SC"/>
-                          <a:ea typeface="Noto Sans SC"/>
-                          <a:sym typeface="Noto Sans SC"/>
-                        </a:rPr>
-                        <a:t>18</a:t>
-                      </a:r>
-                      <a:endParaRPr lang="en-US" sz="1100" dirty="0"/>
-                    </a:p>
-                  </a:txBody>
-                  <a:tcPr marL="101600" marR="101600" marT="101600" marB="101600" anchor="ctr">
-                    <a:lnL>
-                      <a:noFill/>
-                    </a:lnL>
-                    <a:lnR>
-                      <a:noFill/>
-                    </a:lnR>
-                    <a:lnT>
-                      <a:noFill/>
-                    </a:lnT>
-                    <a:lnB>
-                      <a:noFill/>
-                    </a:lnB>
-                    <a:noFill/>
-                  </a:tcPr>
-                </a:tc>
-                <a:tc>
-                  <a:txBody>
-                    <a:bodyPr/>
-                    <a:lstStyle/>
-                    <a:p>
-                      <a:pPr marL="0" indent="0" algn="l">
-                        <a:lnSpc>
-                          <a:spcPct val="100000"/>
-                        </a:lnSpc>
-                        <a:defRPr/>
-                      </a:pPr>
-                      <a:r>
-                        <a:rPr lang="en-US" sz="1100" b="0" i="0" u="none" strike="noStrike">
-                          <a:solidFill>
-                            <a:srgbClr val="3C4655"/>
-                          </a:solidFill>
-                          <a:latin typeface="Noto Sans SC"/>
-                          <a:ea typeface="Noto Sans SC"/>
-                          <a:cs typeface="Noto Sans SC"/>
-                          <a:sym typeface="Noto Sans SC"/>
-                        </a:rPr>
-                        <a:t>固定文本样例，跑通生成；空输入、缺尺寸、尺寸矛盾、服务报错时弹出提示；验证参数可修改。</a:t>
-                      </a:r>
-                      <a:endParaRPr lang="en-US" sz="1100"/>
-                    </a:p>
-                  </a:txBody>
-                  <a:tcPr marL="101600" marR="0" marT="101600" marB="101600" anchor="ctr">
-                    <a:lnL>
-                      <a:noFill/>
-                    </a:lnL>
-                    <a:lnR>
-                      <a:noFill/>
-                    </a:lnR>
-                    <a:lnT>
-                      <a:noFill/>
-                    </a:lnT>
-                    <a:lnB>
-                      <a:noFill/>
-                    </a:lnB>
-                    <a:noFill/>
-                  </a:tcPr>
-                </a:tc>
-                <a:extLst>
-                  <a:ext uri="{0D108BD9-81ED-4DB2-BD59-A6C34878D82A}">
-                    <a16:rowId xmlns:a16="http://schemas.microsoft.com/office/drawing/2014/main" val="10001"/>
-                  </a:ext>
-                </a:extLst>
-              </a:tr>
-              <a:tr h="546100">
-                <a:tc>
-                  <a:txBody>
-                    <a:bodyPr/>
-                    <a:lstStyle/>
-                    <a:p>
-                      <a:pPr marL="0" indent="0" algn="ctr">
-                        <a:lnSpc>
-                          <a:spcPct val="100000"/>
-                        </a:lnSpc>
-                        <a:defRPr/>
-                      </a:pPr>
-                      <a:r>
-                        <a:rPr lang="en-US" sz="1200" b="1" i="0" u="none" strike="noStrike">
-                          <a:solidFill>
-                            <a:srgbClr val="2B2F36"/>
-                          </a:solidFill>
-                          <a:latin typeface="Noto Sans SC"/>
-                          <a:ea typeface="Noto Sans SC"/>
-                          <a:cs typeface="Noto Sans SC"/>
-                          <a:sym typeface="Noto Sans SC"/>
-                        </a:rPr>
-                        <a:t>刘子轩</a:t>
-                      </a:r>
-                      <a:endParaRPr lang="en-US" sz="1100"/>
-                    </a:p>
-                  </a:txBody>
-                  <a:tcPr marL="101600" marR="101600" marT="101600" marB="101600" anchor="ctr">
-                    <a:lnL>
-                      <a:noFill/>
-                    </a:lnL>
-                    <a:lnR>
-                      <a:noFill/>
-                    </a:lnR>
-                    <a:lnT>
-                      <a:noFill/>
-                    </a:lnT>
-                    <a:lnB>
-                      <a:noFill/>
-                    </a:lnB>
-                    <a:noFill/>
-                  </a:tcPr>
-                </a:tc>
-                <a:tc>
-                  <a:txBody>
-                    <a:bodyPr/>
-                    <a:lstStyle/>
-                    <a:p>
-                      <a:pPr marL="0" indent="0" algn="ctr">
-                        <a:lnSpc>
-                          <a:spcPct val="100000"/>
-                        </a:lnSpc>
-                        <a:defRPr/>
-                      </a:pPr>
-                      <a:r>
-                        <a:rPr lang="en-US" sz="1100" b="0" i="0" u="none" strike="noStrike">
-                          <a:solidFill>
-                            <a:srgbClr val="5A6473"/>
-                          </a:solidFill>
-                          <a:latin typeface="Noto Sans SC"/>
-                          <a:ea typeface="Noto Sans SC"/>
-                          <a:cs typeface="Noto Sans SC"/>
-                          <a:sym typeface="Noto Sans SC"/>
-                        </a:rPr>
-                        <a:t>US02 · US03</a:t>
-                      </a:r>
-                      <a:endParaRPr lang="en-US" sz="1100"/>
-                    </a:p>
-                  </a:txBody>
-                  <a:tcPr marL="101600" marR="101600" marT="101600" marB="101600" anchor="ctr">
-                    <a:lnL>
-                      <a:noFill/>
-                    </a:lnL>
-                    <a:lnR>
-                      <a:noFill/>
-                    </a:lnR>
-                    <a:lnT>
-                      <a:noFill/>
-                    </a:lnT>
-                    <a:lnB>
-                      <a:noFill/>
-                    </a:lnB>
-                    <a:noFill/>
-                  </a:tcPr>
-                </a:tc>
-                <a:tc>
-                  <a:txBody>
-                    <a:bodyPr/>
-                    <a:lstStyle/>
-                    <a:p>
-                      <a:pPr marL="0" indent="0" algn="ctr">
-                        <a:lnSpc>
-                          <a:spcPct val="100000"/>
-                        </a:lnSpc>
-                        <a:defRPr/>
-                      </a:pPr>
-                      <a:r>
-                        <a:rPr lang="en-US" sz="1100" b="0" i="0" u="none" strike="noStrike" dirty="0">
-                          <a:solidFill>
-                            <a:srgbClr val="2B2F36"/>
-                          </a:solidFill>
-                          <a:latin typeface="Noto Sans SC"/>
-                          <a:ea typeface="Noto Sans SC"/>
-                          <a:sym typeface="Noto Sans SC"/>
-                        </a:rPr>
-                        <a:t>32</a:t>
-                      </a:r>
-                      <a:endParaRPr lang="en-US" sz="1100" dirty="0"/>
-                    </a:p>
-                  </a:txBody>
-                  <a:tcPr marL="101600" marR="101600" marT="101600" marB="101600" anchor="ctr">
-                    <a:lnL>
-                      <a:noFill/>
-                    </a:lnL>
-                    <a:lnR>
-                      <a:noFill/>
-                    </a:lnR>
-                    <a:lnT>
-                      <a:noFill/>
-                    </a:lnT>
-                    <a:lnB>
-                      <a:noFill/>
-                    </a:lnB>
-                    <a:noFill/>
-                  </a:tcPr>
-                </a:tc>
-                <a:tc>
-                  <a:txBody>
-                    <a:bodyPr/>
-                    <a:lstStyle/>
-                    <a:p>
-                      <a:pPr marL="0" indent="0" algn="l">
-                        <a:lnSpc>
-                          <a:spcPct val="100000"/>
-                        </a:lnSpc>
-                        <a:defRPr/>
-                      </a:pPr>
-                      <a:r>
-                        <a:rPr lang="en-US" sz="1100" b="0" i="0" u="none" strike="noStrike" dirty="0" err="1">
-                          <a:solidFill>
-                            <a:srgbClr val="3C4655"/>
-                          </a:solidFill>
-                          <a:latin typeface="Noto Sans SC"/>
-                          <a:ea typeface="Noto Sans SC"/>
-                          <a:cs typeface="Noto Sans SC"/>
-                          <a:sym typeface="Noto Sans SC"/>
-                        </a:rPr>
-                        <a:t>处理图片上传和格式检查；从单张图里读尺寸；多张图分组一起生成，尺寸错误及时报错</a:t>
-                      </a:r>
-                      <a:r>
-                        <a:rPr lang="en-US" sz="1100" b="0" i="0" u="none" strike="noStrike" dirty="0">
-                          <a:solidFill>
-                            <a:srgbClr val="3C4655"/>
-                          </a:solidFill>
-                          <a:latin typeface="Noto Sans SC"/>
-                          <a:ea typeface="Noto Sans SC"/>
-                          <a:cs typeface="Noto Sans SC"/>
-                          <a:sym typeface="Noto Sans SC"/>
-                        </a:rPr>
-                        <a:t>。</a:t>
-                      </a:r>
-                      <a:endParaRPr lang="en-US" sz="1100" dirty="0"/>
-                    </a:p>
-                  </a:txBody>
-                  <a:tcPr marL="101600" marR="0" marT="101600" marB="101600" anchor="ctr">
-                    <a:lnL>
-                      <a:noFill/>
-                    </a:lnL>
-                    <a:lnR>
-                      <a:noFill/>
-                    </a:lnR>
-                    <a:lnT>
-                      <a:noFill/>
-                    </a:lnT>
-                    <a:lnB>
-                      <a:noFill/>
-                    </a:lnB>
-                    <a:noFill/>
-                  </a:tcPr>
-                </a:tc>
-                <a:extLst>
-                  <a:ext uri="{0D108BD9-81ED-4DB2-BD59-A6C34878D82A}">
-                    <a16:rowId xmlns:a16="http://schemas.microsoft.com/office/drawing/2014/main" val="10002"/>
-                  </a:ext>
-                </a:extLst>
-              </a:tr>
-              <a:tr h="546100">
-                <a:tc>
-                  <a:txBody>
-                    <a:bodyPr/>
-                    <a:lstStyle/>
-                    <a:p>
-                      <a:pPr marL="0" indent="0" algn="ctr">
-                        <a:lnSpc>
-                          <a:spcPct val="100000"/>
-                        </a:lnSpc>
-                        <a:defRPr/>
-                      </a:pPr>
-                      <a:r>
-                        <a:rPr lang="en-US" sz="1200" b="1" i="0" u="none" strike="noStrike" dirty="0" err="1">
-                          <a:solidFill>
-                            <a:srgbClr val="2B2F36"/>
-                          </a:solidFill>
-                          <a:latin typeface="Noto Sans SC"/>
-                          <a:ea typeface="Noto Sans SC"/>
-                          <a:cs typeface="Noto Sans SC"/>
-                          <a:sym typeface="Noto Sans SC"/>
-                        </a:rPr>
-                        <a:t>余智皓</a:t>
-                      </a:r>
-                      <a:endParaRPr lang="en-US" sz="1100" dirty="0"/>
-                    </a:p>
-                  </a:txBody>
-                  <a:tcPr marL="101600" marR="101600" marT="101600" marB="101600" anchor="ctr">
-                    <a:lnL>
-                      <a:noFill/>
-                    </a:lnL>
-                    <a:lnR>
-                      <a:noFill/>
-                    </a:lnR>
-                    <a:lnT>
-                      <a:noFill/>
-                    </a:lnT>
-                    <a:lnB>
-                      <a:noFill/>
-                    </a:lnB>
-                    <a:noFill/>
-                  </a:tcPr>
-                </a:tc>
-                <a:tc>
-                  <a:txBody>
-                    <a:bodyPr/>
-                    <a:lstStyle/>
-                    <a:p>
-                      <a:pPr marL="0" indent="0" algn="ctr">
-                        <a:lnSpc>
-                          <a:spcPct val="100000"/>
-                        </a:lnSpc>
-                        <a:defRPr/>
-                      </a:pPr>
-                      <a:r>
-                        <a:rPr lang="en-US" sz="1100" b="0" i="0" u="none" strike="noStrike">
-                          <a:solidFill>
-                            <a:srgbClr val="5A6473"/>
-                          </a:solidFill>
-                          <a:latin typeface="Noto Sans SC"/>
-                          <a:ea typeface="Noto Sans SC"/>
-                          <a:cs typeface="Noto Sans SC"/>
-                          <a:sym typeface="Noto Sans SC"/>
-                        </a:rPr>
-                        <a:t>US09 · US10 · US11</a:t>
-                      </a:r>
-                      <a:endParaRPr lang="en-US" sz="1100"/>
-                    </a:p>
-                  </a:txBody>
-                  <a:tcPr marL="101600" marR="101600" marT="101600" marB="101600" anchor="ctr">
-                    <a:lnL>
-                      <a:noFill/>
-                    </a:lnL>
-                    <a:lnR>
-                      <a:noFill/>
-                    </a:lnR>
-                    <a:lnT>
-                      <a:noFill/>
-                    </a:lnT>
-                    <a:lnB>
-                      <a:noFill/>
-                    </a:lnB>
-                    <a:noFill/>
-                  </a:tcPr>
-                </a:tc>
-                <a:tc>
-                  <a:txBody>
-                    <a:bodyPr/>
-                    <a:lstStyle/>
-                    <a:p>
-                      <a:pPr marL="0" indent="0" algn="ctr">
-                        <a:lnSpc>
-                          <a:spcPct val="100000"/>
-                        </a:lnSpc>
-                        <a:defRPr/>
-                      </a:pPr>
-                      <a:r>
-                        <a:rPr lang="en-US" sz="1100" b="0" i="0" u="none" strike="noStrike" dirty="0">
-                          <a:solidFill>
-                            <a:srgbClr val="2B2F36"/>
-                          </a:solidFill>
-                          <a:latin typeface="Noto Sans SC"/>
-                          <a:ea typeface="Noto Sans SC"/>
-                          <a:sym typeface="Noto Sans SC"/>
-                        </a:rPr>
-                        <a:t>3</a:t>
-                      </a:r>
-                      <a:endParaRPr lang="en-US" sz="1100" dirty="0"/>
-                    </a:p>
-                  </a:txBody>
-                  <a:tcPr marL="101600" marR="101600" marT="101600" marB="101600" anchor="ctr">
-                    <a:lnL>
-                      <a:noFill/>
-                    </a:lnL>
-                    <a:lnR>
-                      <a:noFill/>
-                    </a:lnR>
-                    <a:lnT>
-                      <a:noFill/>
-                    </a:lnT>
-                    <a:lnB>
-                      <a:noFill/>
-                    </a:lnB>
-                    <a:noFill/>
-                  </a:tcPr>
-                </a:tc>
-                <a:tc>
-                  <a:txBody>
-                    <a:bodyPr/>
-                    <a:lstStyle/>
-                    <a:p>
-                      <a:pPr marL="0" indent="0" algn="l">
-                        <a:lnSpc>
-                          <a:spcPct val="100000"/>
-                        </a:lnSpc>
-                        <a:defRPr/>
-                      </a:pPr>
-                      <a:r>
-                        <a:rPr lang="en-US" sz="1100" b="0" i="0" u="none" strike="noStrike" dirty="0" err="1">
-                          <a:solidFill>
-                            <a:srgbClr val="3C4655"/>
-                          </a:solidFill>
-                          <a:latin typeface="Noto Sans SC"/>
-                          <a:ea typeface="Noto Sans SC"/>
-                          <a:cs typeface="Noto Sans SC"/>
-                          <a:sym typeface="Noto Sans SC"/>
-                        </a:rPr>
-                        <a:t>显示尺寸规格和版本号；准备几个几何对的、错的样例，检查模型是不是单一实体、有没有开口</a:t>
-                      </a:r>
-                      <a:r>
-                        <a:rPr lang="en-US" sz="1100" b="0" i="0" u="none" strike="noStrike" dirty="0">
-                          <a:solidFill>
-                            <a:srgbClr val="3C4655"/>
-                          </a:solidFill>
-                          <a:latin typeface="Noto Sans SC"/>
-                          <a:ea typeface="Noto Sans SC"/>
-                          <a:cs typeface="Noto Sans SC"/>
-                          <a:sym typeface="Noto Sans SC"/>
-                        </a:rPr>
-                        <a:t>。</a:t>
-                      </a:r>
-                      <a:endParaRPr lang="en-US" sz="1100" dirty="0"/>
-                    </a:p>
-                  </a:txBody>
-                  <a:tcPr marL="101600" marR="0" marT="101600" marB="101600" anchor="ctr">
-                    <a:lnL>
-                      <a:noFill/>
-                    </a:lnL>
-                    <a:lnR>
-                      <a:noFill/>
-                    </a:lnR>
-                    <a:lnT>
-                      <a:noFill/>
-                    </a:lnT>
-                    <a:lnB>
-                      <a:noFill/>
-                    </a:lnB>
-                    <a:noFill/>
-                  </a:tcPr>
-                </a:tc>
-                <a:extLst>
-                  <a:ext uri="{0D108BD9-81ED-4DB2-BD59-A6C34878D82A}">
-                    <a16:rowId xmlns:a16="http://schemas.microsoft.com/office/drawing/2014/main" val="10005"/>
-                  </a:ext>
-                </a:extLst>
-              </a:tr>
-              <a:tr h="558800">
-                <a:tc>
-                  <a:txBody>
-                    <a:bodyPr/>
-                    <a:lstStyle/>
-                    <a:p>
-                      <a:pPr marL="0" indent="0" algn="ctr">
-                        <a:lnSpc>
-                          <a:spcPct val="100000"/>
-                        </a:lnSpc>
-                        <a:defRPr/>
-                      </a:pPr>
-                      <a:r>
-                        <a:rPr lang="en-US" sz="1200" b="1" i="0" u="none" strike="noStrike" dirty="0" err="1">
-                          <a:solidFill>
-                            <a:srgbClr val="ED7D31"/>
-                          </a:solidFill>
-                          <a:latin typeface="Noto Sans SC"/>
-                          <a:ea typeface="Noto Sans SC"/>
-                          <a:cs typeface="Noto Sans SC"/>
-                          <a:sym typeface="Noto Sans SC"/>
-                        </a:rPr>
-                        <a:t>严翊航</a:t>
-                      </a:r>
-                      <a:endParaRPr lang="en-US" sz="1100" dirty="0"/>
-                    </a:p>
-                  </a:txBody>
-                  <a:tcPr marL="101600" marR="101600" marT="101600" marB="101600" anchor="ctr">
-                    <a:lnL>
-                      <a:noFill/>
-                    </a:lnL>
-                    <a:lnR>
-                      <a:noFill/>
-                    </a:lnR>
-                    <a:lnT>
-                      <a:noFill/>
-                    </a:lnT>
-                    <a:lnB>
-                      <a:noFill/>
-                    </a:lnB>
-                    <a:noFill/>
-                  </a:tcPr>
-                </a:tc>
-                <a:tc>
-                  <a:txBody>
-                    <a:bodyPr/>
-                    <a:lstStyle/>
-                    <a:p>
-                      <a:pPr marL="0" indent="0" algn="ctr">
-                        <a:lnSpc>
-                          <a:spcPct val="100000"/>
-                        </a:lnSpc>
-                        <a:defRPr/>
-                      </a:pPr>
-                      <a:r>
-                        <a:rPr lang="en-US" sz="1100" b="0" i="0" u="none" strike="noStrike">
-                          <a:solidFill>
-                            <a:srgbClr val="5A6473"/>
-                          </a:solidFill>
-                          <a:latin typeface="Noto Sans SC"/>
-                          <a:ea typeface="Noto Sans SC"/>
-                          <a:cs typeface="Noto Sans SC"/>
-                          <a:sym typeface="Noto Sans SC"/>
-                        </a:rPr>
-                        <a:t>US12 + 联调</a:t>
-                      </a:r>
-                      <a:endParaRPr lang="en-US" sz="1100"/>
-                    </a:p>
-                  </a:txBody>
-                  <a:tcPr marL="101600" marR="101600" marT="101600" marB="101600" anchor="ctr">
-                    <a:lnL>
-                      <a:noFill/>
-                    </a:lnL>
-                    <a:lnR>
-                      <a:noFill/>
-                    </a:lnR>
-                    <a:lnT>
-                      <a:noFill/>
-                    </a:lnT>
-                    <a:lnB>
-                      <a:noFill/>
-                    </a:lnB>
-                    <a:noFill/>
-                  </a:tcPr>
-                </a:tc>
-                <a:tc>
-                  <a:txBody>
-                    <a:bodyPr/>
-                    <a:lstStyle/>
-                    <a:p>
-                      <a:pPr marL="0" indent="0" algn="ctr">
-                        <a:lnSpc>
-                          <a:spcPct val="100000"/>
-                        </a:lnSpc>
-                        <a:defRPr/>
-                      </a:pPr>
-                      <a:r>
-                        <a:rPr lang="en-US" sz="1100" b="0" i="0" u="none" strike="noStrike" dirty="0">
-                          <a:solidFill>
-                            <a:srgbClr val="2B2F36"/>
-                          </a:solidFill>
-                          <a:latin typeface="Noto Sans SC"/>
-                          <a:ea typeface="Noto Sans SC"/>
-                          <a:cs typeface="Noto Sans SC"/>
-                          <a:sym typeface="Noto Sans SC"/>
-                        </a:rPr>
-                        <a:t>5</a:t>
-                      </a:r>
-                      <a:endParaRPr lang="en-US" sz="1100" dirty="0"/>
-                    </a:p>
-                  </a:txBody>
-                  <a:tcPr marL="101600" marR="101600" marT="101600" marB="101600" anchor="ctr">
-                    <a:lnL>
-                      <a:noFill/>
-                    </a:lnL>
-                    <a:lnR>
-                      <a:noFill/>
-                    </a:lnR>
-                    <a:lnT>
-                      <a:noFill/>
-                    </a:lnT>
-                    <a:lnB>
-                      <a:noFill/>
-                    </a:lnB>
-                    <a:noFill/>
-                  </a:tcPr>
-                </a:tc>
-                <a:tc>
-                  <a:txBody>
-                    <a:bodyPr/>
-                    <a:lstStyle/>
-                    <a:p>
-                      <a:pPr marL="0" indent="0" algn="l">
-                        <a:lnSpc>
-                          <a:spcPct val="100000"/>
-                        </a:lnSpc>
-                        <a:defRPr/>
-                      </a:pPr>
-                      <a:r>
-                        <a:rPr lang="en-US" sz="1100" b="0" i="0" u="none" strike="noStrike" dirty="0" err="1">
-                          <a:solidFill>
-                            <a:srgbClr val="3C4655"/>
-                          </a:solidFill>
-                          <a:latin typeface="Noto Sans SC"/>
-                          <a:ea typeface="Noto Sans SC"/>
-                          <a:cs typeface="Noto Sans SC"/>
-                          <a:sym typeface="Noto Sans SC"/>
-                        </a:rPr>
-                        <a:t>量长宽高和孔径，按公差判断是否合格；把生成、检索、检查几个面板结合起来；最后整体测试一遍</a:t>
-                      </a:r>
-                      <a:r>
-                        <a:rPr lang="en-US" sz="1100" b="0" i="0" u="none" strike="noStrike" dirty="0">
-                          <a:solidFill>
-                            <a:srgbClr val="3C4655"/>
-                          </a:solidFill>
-                          <a:latin typeface="Noto Sans SC"/>
-                          <a:ea typeface="Noto Sans SC"/>
-                          <a:cs typeface="Noto Sans SC"/>
-                          <a:sym typeface="Noto Sans SC"/>
-                        </a:rPr>
-                        <a:t>。</a:t>
-                      </a:r>
-                      <a:endParaRPr lang="en-US" sz="1100" dirty="0"/>
-                    </a:p>
-                  </a:txBody>
-                  <a:tcPr marL="101600" marR="0" marT="101600" marB="101600" anchor="ctr">
-                    <a:lnL>
-                      <a:noFill/>
-                    </a:lnL>
-                    <a:lnR>
-                      <a:noFill/>
-                    </a:lnR>
-                    <a:lnT>
-                      <a:noFill/>
-                    </a:lnT>
-                    <a:lnB>
-                      <a:noFill/>
-                    </a:lnB>
-                    <a:noFill/>
-                  </a:tcPr>
-                </a:tc>
-                <a:extLst>
-                  <a:ext uri="{0D108BD9-81ED-4DB2-BD59-A6C34878D82A}">
-                    <a16:rowId xmlns:a16="http://schemas.microsoft.com/office/drawing/2014/main" val="10006"/>
-                  </a:ext>
-                </a:extLst>
-              </a:tr>
-            </a:tbl>
-          </a:graphicData>
-        </a:graphic>
-      </p:graphicFrame>
-      <p:sp>
-        <p:nvSpPr>
-          <p:cNvPr id="5" name="AutoShape 5"/>
-          <p:cNvSpPr/>
-          <p:nvPr/>
-        </p:nvSpPr>
-        <p:spPr>
-          <a:xfrm>
-            <a:off x="1016000" y="5842000"/>
-            <a:ext cx="10160000" cy="381000"/>
-          </a:xfrm>
-          <a:prstGeom prst="rect">
-            <a:avLst/>
-          </a:prstGeom>
-          <a:noFill/>
-          <a:ln w="12700" cap="flat" cmpd="sng">
-            <a:noFill/>
-            <a:prstDash val="solid"/>
-            <a:round/>
-          </a:ln>
-        </p:spPr>
-        <p:txBody>
-          <a:bodyPr vert="horz" wrap="square" lIns="0" tIns="0" rIns="0" bIns="0" rtlCol="0" anchor="ctr" anchorCtr="0"/>
-          <a:lstStyle/>
-          <a:p>
-            <a:pPr marL="0" indent="0" algn="l">
-              <a:lnSpc>
-                <a:spcPct val="125000"/>
-              </a:lnSpc>
-              <a:defRPr/>
-            </a:pPr>
-            <a:r>
-              <a:rPr lang="en-US" sz="1200" b="0" i="0" u="none" strike="noStrike" dirty="0">
-                <a:solidFill>
-                  <a:srgbClr val="5A6473"/>
-                </a:solidFill>
-                <a:latin typeface="Noto Sans SC"/>
-                <a:ea typeface="Noto Sans SC"/>
-                <a:cs typeface="Noto Sans SC"/>
-                <a:sym typeface="Noto Sans SC"/>
-              </a:rPr>
-              <a:t>PO </a:t>
-            </a:r>
-            <a:r>
-              <a:rPr lang="en-US" sz="1200" b="0" i="0" u="none" strike="noStrike" dirty="0" err="1">
-                <a:solidFill>
-                  <a:srgbClr val="5A6473"/>
-                </a:solidFill>
-                <a:latin typeface="Noto Sans SC"/>
-                <a:ea typeface="Noto Sans SC"/>
-                <a:cs typeface="Noto Sans SC"/>
-                <a:sym typeface="Noto Sans SC"/>
-              </a:rPr>
-              <a:t>许祖嘉：定范围、对照用例验收</a:t>
-            </a:r>
-            <a:r>
-              <a:rPr lang="en-US" sz="1200" b="0" i="0" u="none" strike="noStrike" dirty="0">
-                <a:solidFill>
-                  <a:srgbClr val="5A6473"/>
-                </a:solidFill>
-                <a:latin typeface="Noto Sans SC"/>
-                <a:ea typeface="Noto Sans SC"/>
-                <a:cs typeface="Noto Sans SC"/>
-                <a:sym typeface="Noto Sans SC"/>
-              </a:rPr>
-              <a:t> ｜ Scrum Master </a:t>
-            </a:r>
-            <a:r>
-              <a:rPr lang="en-US" sz="1200" b="0" i="0" u="none" strike="noStrike" dirty="0" err="1">
-                <a:solidFill>
-                  <a:srgbClr val="5A6473"/>
-                </a:solidFill>
-                <a:latin typeface="Noto Sans SC"/>
-                <a:ea typeface="Noto Sans SC"/>
-                <a:cs typeface="Noto Sans SC"/>
-                <a:sym typeface="Noto Sans SC"/>
-              </a:rPr>
-              <a:t>李健博：建看板、组织站会和评审</a:t>
-            </a:r>
-            <a:endParaRPr lang="en-US" sz="1100" dirty="0"/>
-          </a:p>
-        </p:txBody>
-      </p:sp>
       <p:sp>
         <p:nvSpPr>
           <p:cNvPr id="6" name="AutoShape 6"/>
@@ -22690,6 +22795,2185 @@
           </a:p>
         </p:txBody>
       </p:sp>
+      <p:graphicFrame>
+        <p:nvGraphicFramePr>
+          <p:cNvPr id="2" name="表格 1">
+            <a:extLst>
+              <a:ext uri="{FF2B5EF4-FFF2-40B4-BE49-F238E27FC236}">
+                <a16:creationId xmlns:a16="http://schemas.microsoft.com/office/drawing/2014/main" id="{6A4C52BB-8DD2-B0C4-DAE3-52D7B9D364E8}"/>
+              </a:ext>
+            </a:extLst>
+          </p:cNvPr>
+          <p:cNvGraphicFramePr>
+            <a:graphicFrameLocks noGrp="1"/>
+          </p:cNvGraphicFramePr>
+          <p:nvPr>
+            <p:extLst>
+              <p:ext uri="{D42A27DB-BD31-4B8C-83A1-F6EECF244321}">
+                <p14:modId xmlns:p14="http://schemas.microsoft.com/office/powerpoint/2010/main" val="182787673"/>
+              </p:ext>
+            </p:extLst>
+          </p:nvPr>
+        </p:nvGraphicFramePr>
+        <p:xfrm>
+          <a:off x="1016000" y="1651000"/>
+          <a:ext cx="10515600" cy="4216846"/>
+        </p:xfrm>
+        <a:graphic>
+          <a:graphicData uri="http://schemas.openxmlformats.org/drawingml/2006/table">
+            <a:tbl>
+              <a:tblPr>
+                <a:tableStyleId>{5C22544A-7EE6-4342-B048-85BDC9FD1C3A}</a:tableStyleId>
+              </a:tblPr>
+              <a:tblGrid>
+                <a:gridCol w="2736937">
+                  <a:extLst>
+                    <a:ext uri="{9D8B030D-6E8A-4147-A177-3AD203B41FA5}">
+                      <a16:colId xmlns:a16="http://schemas.microsoft.com/office/drawing/2014/main" val="2285523923"/>
+                    </a:ext>
+                  </a:extLst>
+                </a:gridCol>
+                <a:gridCol w="2520863">
+                  <a:extLst>
+                    <a:ext uri="{9D8B030D-6E8A-4147-A177-3AD203B41FA5}">
+                      <a16:colId xmlns:a16="http://schemas.microsoft.com/office/drawing/2014/main" val="817984680"/>
+                    </a:ext>
+                  </a:extLst>
+                </a:gridCol>
+                <a:gridCol w="2520863">
+                  <a:extLst>
+                    <a:ext uri="{9D8B030D-6E8A-4147-A177-3AD203B41FA5}">
+                      <a16:colId xmlns:a16="http://schemas.microsoft.com/office/drawing/2014/main" val="930890032"/>
+                    </a:ext>
+                  </a:extLst>
+                </a:gridCol>
+                <a:gridCol w="2736937">
+                  <a:extLst>
+                    <a:ext uri="{9D8B030D-6E8A-4147-A177-3AD203B41FA5}">
+                      <a16:colId xmlns:a16="http://schemas.microsoft.com/office/drawing/2014/main" val="1795376115"/>
+                    </a:ext>
+                  </a:extLst>
+                </a:gridCol>
+              </a:tblGrid>
+              <a:tr h="0">
+                <a:tc>
+                  <a:txBody>
+                    <a:bodyPr/>
+                    <a:lstStyle/>
+                    <a:p>
+                      <a:pPr algn="l">
+                        <a:lnSpc>
+                          <a:spcPct val="138889"/>
+                        </a:lnSpc>
+                        <a:buNone/>
+                      </a:pPr>
+                      <a:r>
+                        <a:rPr lang="zh-CN" sz="1125" b="1">
+                          <a:solidFill>
+                            <a:srgbClr val="000000"/>
+                          </a:solidFill>
+                          <a:effectLst/>
+                        </a:rPr>
+                        <a:t>成员</a:t>
+                      </a:r>
+                      <a:endParaRPr lang="zh-CN" sz="1125" b="1" i="0">
+                        <a:solidFill>
+                          <a:srgbClr val="000000"/>
+                        </a:solidFill>
+                        <a:effectLst/>
+                        <a:latin typeface="quote-cjk-patch"/>
+                      </a:endParaRPr>
+                    </a:p>
+                  </a:txBody>
+                  <a:tcPr marR="76200" marT="47625" marB="47625" anchor="ctr">
+                    <a:lnL w="12700" cmpd="sng">
+                      <a:solidFill>
+                        <a:srgbClr val="B9D7EA"/>
+                      </a:solidFill>
+                    </a:lnL>
+                    <a:lnR w="12700" cmpd="sng">
+                      <a:solidFill>
+                        <a:srgbClr val="B9D7EA"/>
+                      </a:solidFill>
+                    </a:lnR>
+                    <a:lnT w="12700" cmpd="sng">
+                      <a:solidFill>
+                        <a:srgbClr val="B9D7EA"/>
+                      </a:solidFill>
+                      <a:prstDash val="solid"/>
+                    </a:lnT>
+                    <a:lnB w="12700" cmpd="sng">
+                      <a:solidFill>
+                        <a:srgbClr val="B9D7EA"/>
+                      </a:solidFill>
+                      <a:prstDash val="solid"/>
+                    </a:lnB>
+                    <a:solidFill>
+                      <a:srgbClr val="B9D7EA"/>
+                    </a:solidFill>
+                  </a:tcPr>
+                </a:tc>
+                <a:tc>
+                  <a:txBody>
+                    <a:bodyPr/>
+                    <a:lstStyle/>
+                    <a:p>
+                      <a:pPr algn="l">
+                        <a:lnSpc>
+                          <a:spcPct val="138889"/>
+                        </a:lnSpc>
+                        <a:buNone/>
+                      </a:pPr>
+                      <a:r>
+                        <a:rPr lang="zh-CN" sz="1125" b="1" dirty="0">
+                          <a:solidFill>
+                            <a:srgbClr val="000000"/>
+                          </a:solidFill>
+                          <a:effectLst/>
+                        </a:rPr>
+                        <a:t>牵头故事</a:t>
+                      </a:r>
+                      <a:endParaRPr lang="zh-CN" sz="1125" b="1" i="0" dirty="0">
+                        <a:solidFill>
+                          <a:srgbClr val="000000"/>
+                        </a:solidFill>
+                        <a:effectLst/>
+                        <a:latin typeface="quote-cjk-patch"/>
+                      </a:endParaRPr>
+                    </a:p>
+                  </a:txBody>
+                  <a:tcPr marL="76200" marR="76200" marT="47625" marB="47625" anchor="ctr">
+                    <a:lnL w="12700" cmpd="sng">
+                      <a:solidFill>
+                        <a:srgbClr val="B9D7EA"/>
+                      </a:solidFill>
+                    </a:lnL>
+                    <a:lnR w="12700" cmpd="sng">
+                      <a:solidFill>
+                        <a:srgbClr val="B9D7EA"/>
+                      </a:solidFill>
+                    </a:lnR>
+                    <a:lnT w="12700" cmpd="sng">
+                      <a:solidFill>
+                        <a:srgbClr val="B9D7EA"/>
+                      </a:solidFill>
+                      <a:prstDash val="solid"/>
+                    </a:lnT>
+                    <a:lnB w="12700" cmpd="sng">
+                      <a:solidFill>
+                        <a:srgbClr val="B9D7EA"/>
+                      </a:solidFill>
+                      <a:prstDash val="solid"/>
+                    </a:lnB>
+                    <a:solidFill>
+                      <a:srgbClr val="B9D7EA"/>
+                    </a:solidFill>
+                  </a:tcPr>
+                </a:tc>
+                <a:tc>
+                  <a:txBody>
+                    <a:bodyPr/>
+                    <a:lstStyle/>
+                    <a:p>
+                      <a:pPr algn="l">
+                        <a:lnSpc>
+                          <a:spcPct val="138889"/>
+                        </a:lnSpc>
+                        <a:buNone/>
+                      </a:pPr>
+                      <a:r>
+                        <a:rPr lang="zh-CN" sz="1125" b="1" dirty="0">
+                          <a:solidFill>
+                            <a:srgbClr val="000000"/>
+                          </a:solidFill>
+                          <a:effectLst/>
+                        </a:rPr>
+                        <a:t>牵头故事点</a:t>
+                      </a:r>
+                      <a:endParaRPr lang="zh-CN" sz="1125" b="1" i="0" dirty="0">
+                        <a:solidFill>
+                          <a:srgbClr val="000000"/>
+                        </a:solidFill>
+                        <a:effectLst/>
+                        <a:latin typeface="quote-cjk-patch"/>
+                      </a:endParaRPr>
+                    </a:p>
+                  </a:txBody>
+                  <a:tcPr marL="76200" marR="76200" marT="47625" marB="47625" anchor="ctr">
+                    <a:lnL w="12700" cmpd="sng">
+                      <a:solidFill>
+                        <a:srgbClr val="B9D7EA"/>
+                      </a:solidFill>
+                    </a:lnL>
+                    <a:lnR w="12700" cmpd="sng">
+                      <a:solidFill>
+                        <a:srgbClr val="B9D7EA"/>
+                      </a:solidFill>
+                    </a:lnR>
+                    <a:lnT w="12700" cmpd="sng">
+                      <a:solidFill>
+                        <a:srgbClr val="B9D7EA"/>
+                      </a:solidFill>
+                      <a:prstDash val="solid"/>
+                    </a:lnT>
+                    <a:lnB w="12700" cmpd="sng">
+                      <a:solidFill>
+                        <a:srgbClr val="B9D7EA"/>
+                      </a:solidFill>
+                      <a:prstDash val="solid"/>
+                    </a:lnB>
+                    <a:solidFill>
+                      <a:srgbClr val="B9D7EA"/>
+                    </a:solidFill>
+                  </a:tcPr>
+                </a:tc>
+                <a:tc>
+                  <a:txBody>
+                    <a:bodyPr/>
+                    <a:lstStyle/>
+                    <a:p>
+                      <a:pPr algn="l">
+                        <a:lnSpc>
+                          <a:spcPct val="138889"/>
+                        </a:lnSpc>
+                        <a:buNone/>
+                      </a:pPr>
+                      <a:r>
+                        <a:rPr lang="zh-CN" sz="1125" b="1">
+                          <a:solidFill>
+                            <a:srgbClr val="000000"/>
+                          </a:solidFill>
+                          <a:effectLst/>
+                        </a:rPr>
+                        <a:t>主要工作</a:t>
+                      </a:r>
+                      <a:endParaRPr lang="zh-CN" sz="1125" b="1" i="0">
+                        <a:solidFill>
+                          <a:srgbClr val="000000"/>
+                        </a:solidFill>
+                        <a:effectLst/>
+                        <a:latin typeface="quote-cjk-patch"/>
+                      </a:endParaRPr>
+                    </a:p>
+                  </a:txBody>
+                  <a:tcPr marL="76200" marR="76200" marT="47625" marB="47625" anchor="ctr">
+                    <a:lnL w="12700" cmpd="sng">
+                      <a:solidFill>
+                        <a:srgbClr val="B9D7EA"/>
+                      </a:solidFill>
+                    </a:lnL>
+                    <a:lnR w="12700" cmpd="sng">
+                      <a:solidFill>
+                        <a:srgbClr val="B9D7EA"/>
+                      </a:solidFill>
+                    </a:lnR>
+                    <a:lnT w="12700" cmpd="sng">
+                      <a:solidFill>
+                        <a:srgbClr val="B9D7EA"/>
+                      </a:solidFill>
+                      <a:prstDash val="solid"/>
+                    </a:lnT>
+                    <a:lnB w="12700" cmpd="sng">
+                      <a:solidFill>
+                        <a:srgbClr val="B9D7EA"/>
+                      </a:solidFill>
+                      <a:prstDash val="solid"/>
+                    </a:lnB>
+                    <a:solidFill>
+                      <a:srgbClr val="B9D7EA"/>
+                    </a:solidFill>
+                  </a:tcPr>
+                </a:tc>
+                <a:extLst>
+                  <a:ext uri="{0D108BD9-81ED-4DB2-BD59-A6C34878D82A}">
+                    <a16:rowId xmlns:a16="http://schemas.microsoft.com/office/drawing/2014/main" val="3318498350"/>
+                  </a:ext>
+                </a:extLst>
+              </a:tr>
+              <a:tr h="0">
+                <a:tc>
+                  <a:txBody>
+                    <a:bodyPr/>
+                    <a:lstStyle/>
+                    <a:p>
+                      <a:pPr algn="l">
+                        <a:lnSpc>
+                          <a:spcPct val="138889"/>
+                        </a:lnSpc>
+                        <a:buNone/>
+                      </a:pPr>
+                      <a:r>
+                        <a:rPr lang="zh-CN" sz="1125" b="1">
+                          <a:solidFill>
+                            <a:srgbClr val="000000"/>
+                          </a:solidFill>
+                          <a:effectLst/>
+                        </a:rPr>
+                        <a:t>常诚</a:t>
+                      </a:r>
+                      <a:endParaRPr lang="zh-CN" sz="1125" b="1" i="0">
+                        <a:solidFill>
+                          <a:srgbClr val="000000"/>
+                        </a:solidFill>
+                        <a:effectLst/>
+                        <a:latin typeface="quote-cjk-patch"/>
+                      </a:endParaRPr>
+                    </a:p>
+                  </a:txBody>
+                  <a:tcPr marR="76200" marT="47625" marB="47625" anchor="ctr">
+                    <a:lnL w="12700" cmpd="sng">
+                      <a:solidFill>
+                        <a:srgbClr val="D6E6F2"/>
+                      </a:solidFill>
+                    </a:lnL>
+                    <a:lnR w="12700" cmpd="sng">
+                      <a:solidFill>
+                        <a:srgbClr val="D6E6F2"/>
+                      </a:solidFill>
+                    </a:lnR>
+                    <a:lnT w="12700" cmpd="sng">
+                      <a:solidFill>
+                        <a:srgbClr val="B9D7EA"/>
+                      </a:solidFill>
+                      <a:prstDash val="solid"/>
+                    </a:lnT>
+                    <a:lnB w="12700" cmpd="sng">
+                      <a:solidFill>
+                        <a:srgbClr val="DDDDDD"/>
+                      </a:solidFill>
+                      <a:prstDash val="solid"/>
+                    </a:lnB>
+                    <a:solidFill>
+                      <a:srgbClr val="D6E6F2"/>
+                    </a:solidFill>
+                  </a:tcPr>
+                </a:tc>
+                <a:tc>
+                  <a:txBody>
+                    <a:bodyPr/>
+                    <a:lstStyle/>
+                    <a:p>
+                      <a:pPr algn="l">
+                        <a:lnSpc>
+                          <a:spcPct val="138889"/>
+                        </a:lnSpc>
+                        <a:buNone/>
+                      </a:pPr>
+                      <a:r>
+                        <a:rPr lang="zh-CN" sz="1125">
+                          <a:solidFill>
+                            <a:srgbClr val="000000"/>
+                          </a:solidFill>
+                          <a:effectLst/>
+                        </a:rPr>
+                        <a:t>US01、US02、US03、US04、US11、US12</a:t>
+                      </a:r>
+                      <a:endParaRPr lang="zh-CN" sz="1125" b="0" i="0">
+                        <a:solidFill>
+                          <a:srgbClr val="000000"/>
+                        </a:solidFill>
+                        <a:effectLst/>
+                        <a:latin typeface="quote-cjk-patch"/>
+                      </a:endParaRPr>
+                    </a:p>
+                  </a:txBody>
+                  <a:tcPr marL="76200" marR="76200" marT="47625" marB="47625" anchor="ctr">
+                    <a:lnL w="12700" cmpd="sng">
+                      <a:solidFill>
+                        <a:srgbClr val="D6E6F2"/>
+                      </a:solidFill>
+                    </a:lnL>
+                    <a:lnR w="12700" cmpd="sng">
+                      <a:solidFill>
+                        <a:srgbClr val="F7FBFC"/>
+                      </a:solidFill>
+                    </a:lnR>
+                    <a:lnT w="12700" cmpd="sng">
+                      <a:solidFill>
+                        <a:srgbClr val="B9D7EA"/>
+                      </a:solidFill>
+                      <a:prstDash val="solid"/>
+                    </a:lnT>
+                    <a:lnB w="12700" cmpd="sng">
+                      <a:solidFill>
+                        <a:srgbClr val="DDDDDD"/>
+                      </a:solidFill>
+                      <a:prstDash val="solid"/>
+                    </a:lnB>
+                    <a:solidFill>
+                      <a:srgbClr val="F7FBFC"/>
+                    </a:solidFill>
+                  </a:tcPr>
+                </a:tc>
+                <a:tc>
+                  <a:txBody>
+                    <a:bodyPr/>
+                    <a:lstStyle/>
+                    <a:p>
+                      <a:pPr algn="l">
+                        <a:lnSpc>
+                          <a:spcPct val="138889"/>
+                        </a:lnSpc>
+                        <a:buNone/>
+                      </a:pPr>
+                      <a:r>
+                        <a:rPr lang="zh-CN" sz="1125">
+                          <a:solidFill>
+                            <a:srgbClr val="000000"/>
+                          </a:solidFill>
+                          <a:effectLst/>
+                        </a:rPr>
+                        <a:t>37</a:t>
+                      </a:r>
+                      <a:endParaRPr lang="zh-CN" sz="1125" b="0" i="0">
+                        <a:solidFill>
+                          <a:srgbClr val="000000"/>
+                        </a:solidFill>
+                        <a:effectLst/>
+                        <a:latin typeface="quote-cjk-patch"/>
+                      </a:endParaRPr>
+                    </a:p>
+                  </a:txBody>
+                  <a:tcPr marL="76200" marR="76200" marT="47625" marB="47625" anchor="ctr">
+                    <a:lnL w="12700" cmpd="sng">
+                      <a:solidFill>
+                        <a:srgbClr val="F7FBFC"/>
+                      </a:solidFill>
+                    </a:lnL>
+                    <a:lnR w="12700" cmpd="sng">
+                      <a:solidFill>
+                        <a:srgbClr val="F7FBFC"/>
+                      </a:solidFill>
+                    </a:lnR>
+                    <a:lnT w="12700" cmpd="sng">
+                      <a:solidFill>
+                        <a:srgbClr val="B9D7EA"/>
+                      </a:solidFill>
+                      <a:prstDash val="solid"/>
+                    </a:lnT>
+                    <a:lnB w="12700" cmpd="sng">
+                      <a:solidFill>
+                        <a:srgbClr val="DDDDDD"/>
+                      </a:solidFill>
+                      <a:prstDash val="solid"/>
+                    </a:lnB>
+                    <a:solidFill>
+                      <a:srgbClr val="F7FBFC"/>
+                    </a:solidFill>
+                  </a:tcPr>
+                </a:tc>
+                <a:tc>
+                  <a:txBody>
+                    <a:bodyPr/>
+                    <a:lstStyle/>
+                    <a:p>
+                      <a:pPr algn="l">
+                        <a:lnSpc>
+                          <a:spcPct val="138889"/>
+                        </a:lnSpc>
+                        <a:buNone/>
+                      </a:pPr>
+                      <a:r>
+                        <a:rPr lang="zh-CN" sz="1125">
+                          <a:solidFill>
+                            <a:srgbClr val="000000"/>
+                          </a:solidFill>
+                          <a:effectLst/>
+                        </a:rPr>
+                        <a:t>文本/单图/多图生成、参数展示、几何与尺寸QA</a:t>
+                      </a:r>
+                      <a:endParaRPr lang="zh-CN" sz="1125" b="0" i="0">
+                        <a:solidFill>
+                          <a:srgbClr val="000000"/>
+                        </a:solidFill>
+                        <a:effectLst/>
+                        <a:latin typeface="quote-cjk-patch"/>
+                      </a:endParaRPr>
+                    </a:p>
+                  </a:txBody>
+                  <a:tcPr marL="76200" marT="47625" marB="47625" anchor="ctr">
+                    <a:lnL w="12700" cmpd="sng">
+                      <a:solidFill>
+                        <a:srgbClr val="F7FBFC"/>
+                      </a:solidFill>
+                    </a:lnL>
+                    <a:lnR w="12700" cmpd="sng">
+                      <a:solidFill>
+                        <a:srgbClr val="F7FBFC"/>
+                      </a:solidFill>
+                    </a:lnR>
+                    <a:lnT w="12700" cmpd="sng">
+                      <a:solidFill>
+                        <a:srgbClr val="B9D7EA"/>
+                      </a:solidFill>
+                      <a:prstDash val="solid"/>
+                    </a:lnT>
+                    <a:lnB w="12700" cmpd="sng">
+                      <a:solidFill>
+                        <a:srgbClr val="DDDDDD"/>
+                      </a:solidFill>
+                      <a:prstDash val="solid"/>
+                    </a:lnB>
+                    <a:solidFill>
+                      <a:srgbClr val="F7FBFC"/>
+                    </a:solidFill>
+                  </a:tcPr>
+                </a:tc>
+                <a:extLst>
+                  <a:ext uri="{0D108BD9-81ED-4DB2-BD59-A6C34878D82A}">
+                    <a16:rowId xmlns:a16="http://schemas.microsoft.com/office/drawing/2014/main" val="454325347"/>
+                  </a:ext>
+                </a:extLst>
+              </a:tr>
+              <a:tr h="0">
+                <a:tc>
+                  <a:txBody>
+                    <a:bodyPr/>
+                    <a:lstStyle/>
+                    <a:p>
+                      <a:pPr algn="l">
+                        <a:lnSpc>
+                          <a:spcPct val="138889"/>
+                        </a:lnSpc>
+                        <a:buNone/>
+                      </a:pPr>
+                      <a:r>
+                        <a:rPr lang="zh-CN" sz="1125" b="1">
+                          <a:solidFill>
+                            <a:srgbClr val="000000"/>
+                          </a:solidFill>
+                          <a:effectLst/>
+                        </a:rPr>
+                        <a:t>刘子轩</a:t>
+                      </a:r>
+                      <a:endParaRPr lang="zh-CN" sz="1125" b="1" i="0">
+                        <a:solidFill>
+                          <a:srgbClr val="000000"/>
+                        </a:solidFill>
+                        <a:effectLst/>
+                        <a:latin typeface="quote-cjk-patch"/>
+                      </a:endParaRPr>
+                    </a:p>
+                  </a:txBody>
+                  <a:tcPr marR="76200" marT="47625" marB="47625" anchor="ctr">
+                    <a:lnL w="12700" cmpd="sng">
+                      <a:solidFill>
+                        <a:srgbClr val="D6E6F2"/>
+                      </a:solidFill>
+                    </a:lnL>
+                    <a:lnR w="12700" cmpd="sng">
+                      <a:solidFill>
+                        <a:srgbClr val="D6E6F2"/>
+                      </a:solidFill>
+                    </a:lnR>
+                    <a:lnT w="12700" cmpd="sng">
+                      <a:solidFill>
+                        <a:srgbClr val="DDDDDD"/>
+                      </a:solidFill>
+                      <a:prstDash val="solid"/>
+                    </a:lnT>
+                    <a:lnB w="12700" cmpd="sng">
+                      <a:solidFill>
+                        <a:srgbClr val="DDDDDD"/>
+                      </a:solidFill>
+                      <a:prstDash val="solid"/>
+                    </a:lnB>
+                    <a:solidFill>
+                      <a:srgbClr val="D6E6F2"/>
+                    </a:solidFill>
+                  </a:tcPr>
+                </a:tc>
+                <a:tc>
+                  <a:txBody>
+                    <a:bodyPr/>
+                    <a:lstStyle/>
+                    <a:p>
+                      <a:pPr algn="l">
+                        <a:lnSpc>
+                          <a:spcPct val="138889"/>
+                        </a:lnSpc>
+                        <a:buNone/>
+                      </a:pPr>
+                      <a:r>
+                        <a:rPr lang="zh-CN" sz="1125">
+                          <a:solidFill>
+                            <a:srgbClr val="000000"/>
+                          </a:solidFill>
+                          <a:effectLst/>
+                        </a:rPr>
+                        <a:t>US05、US06、US07、US08、US09、US10</a:t>
+                      </a:r>
+                      <a:endParaRPr lang="zh-CN" sz="1125" b="0" i="0">
+                        <a:solidFill>
+                          <a:srgbClr val="000000"/>
+                        </a:solidFill>
+                        <a:effectLst/>
+                        <a:latin typeface="quote-cjk-patch"/>
+                      </a:endParaRPr>
+                    </a:p>
+                  </a:txBody>
+                  <a:tcPr marL="76200" marR="76200" marT="47625" marB="47625" anchor="ctr">
+                    <a:lnL w="12700" cmpd="sng">
+                      <a:solidFill>
+                        <a:srgbClr val="D6E6F2"/>
+                      </a:solidFill>
+                    </a:lnL>
+                    <a:lnR w="12700" cmpd="sng">
+                      <a:solidFill>
+                        <a:srgbClr val="FFFFFF"/>
+                      </a:solidFill>
+                    </a:lnR>
+                    <a:lnT w="12700" cmpd="sng">
+                      <a:solidFill>
+                        <a:srgbClr val="DDDDDD"/>
+                      </a:solidFill>
+                      <a:prstDash val="solid"/>
+                    </a:lnT>
+                    <a:lnB w="12700" cmpd="sng">
+                      <a:solidFill>
+                        <a:srgbClr val="DDDDDD"/>
+                      </a:solidFill>
+                      <a:prstDash val="solid"/>
+                    </a:lnB>
+                    <a:solidFill>
+                      <a:srgbClr val="FFFFFF"/>
+                    </a:solidFill>
+                  </a:tcPr>
+                </a:tc>
+                <a:tc>
+                  <a:txBody>
+                    <a:bodyPr/>
+                    <a:lstStyle/>
+                    <a:p>
+                      <a:pPr algn="l">
+                        <a:lnSpc>
+                          <a:spcPct val="138889"/>
+                        </a:lnSpc>
+                        <a:buNone/>
+                      </a:pPr>
+                      <a:r>
+                        <a:rPr lang="zh-CN" sz="1125">
+                          <a:solidFill>
+                            <a:srgbClr val="000000"/>
+                          </a:solidFill>
+                          <a:effectLst/>
+                        </a:rPr>
+                        <a:t>24</a:t>
+                      </a:r>
+                      <a:endParaRPr lang="zh-CN" sz="1125" b="0" i="0">
+                        <a:solidFill>
+                          <a:srgbClr val="000000"/>
+                        </a:solidFill>
+                        <a:effectLst/>
+                        <a:latin typeface="quote-cjk-patch"/>
+                      </a:endParaRPr>
+                    </a:p>
+                  </a:txBody>
+                  <a:tcPr marL="76200" marR="76200" marT="47625" marB="47625" anchor="ctr">
+                    <a:lnL w="12700" cmpd="sng">
+                      <a:solidFill>
+                        <a:srgbClr val="FFFFFF"/>
+                      </a:solidFill>
+                    </a:lnL>
+                    <a:lnR w="12700" cmpd="sng">
+                      <a:solidFill>
+                        <a:srgbClr val="FFFFFF"/>
+                      </a:solidFill>
+                    </a:lnR>
+                    <a:lnT w="12700" cmpd="sng">
+                      <a:solidFill>
+                        <a:srgbClr val="DDDDDD"/>
+                      </a:solidFill>
+                      <a:prstDash val="solid"/>
+                    </a:lnT>
+                    <a:lnB w="12700" cmpd="sng">
+                      <a:solidFill>
+                        <a:srgbClr val="DDDDDD"/>
+                      </a:solidFill>
+                      <a:prstDash val="solid"/>
+                    </a:lnB>
+                    <a:solidFill>
+                      <a:srgbClr val="FFFFFF"/>
+                    </a:solidFill>
+                  </a:tcPr>
+                </a:tc>
+                <a:tc>
+                  <a:txBody>
+                    <a:bodyPr/>
+                    <a:lstStyle/>
+                    <a:p>
+                      <a:pPr algn="l">
+                        <a:lnSpc>
+                          <a:spcPct val="138889"/>
+                        </a:lnSpc>
+                        <a:buNone/>
+                      </a:pPr>
+                      <a:r>
+                        <a:rPr lang="zh-CN" sz="1125">
+                          <a:solidFill>
+                            <a:srgbClr val="000000"/>
+                          </a:solidFill>
+                          <a:effectLst/>
+                        </a:rPr>
+                        <a:t>文本/单图/多图检索、样例库与索引、详情展示</a:t>
+                      </a:r>
+                      <a:endParaRPr lang="zh-CN" sz="1125" b="0" i="0">
+                        <a:solidFill>
+                          <a:srgbClr val="000000"/>
+                        </a:solidFill>
+                        <a:effectLst/>
+                        <a:latin typeface="quote-cjk-patch"/>
+                      </a:endParaRPr>
+                    </a:p>
+                  </a:txBody>
+                  <a:tcPr marL="76200" marT="47625" marB="47625" anchor="ctr">
+                    <a:lnL w="12700" cmpd="sng">
+                      <a:solidFill>
+                        <a:srgbClr val="FFFFFF"/>
+                      </a:solidFill>
+                    </a:lnL>
+                    <a:lnR w="12700" cmpd="sng">
+                      <a:solidFill>
+                        <a:srgbClr val="FFFFFF"/>
+                      </a:solidFill>
+                    </a:lnR>
+                    <a:lnT w="12700" cmpd="sng">
+                      <a:solidFill>
+                        <a:srgbClr val="DDDDDD"/>
+                      </a:solidFill>
+                      <a:prstDash val="solid"/>
+                    </a:lnT>
+                    <a:lnB w="12700" cmpd="sng">
+                      <a:solidFill>
+                        <a:srgbClr val="DDDDDD"/>
+                      </a:solidFill>
+                      <a:prstDash val="solid"/>
+                    </a:lnB>
+                    <a:solidFill>
+                      <a:srgbClr val="FFFFFF"/>
+                    </a:solidFill>
+                  </a:tcPr>
+                </a:tc>
+                <a:extLst>
+                  <a:ext uri="{0D108BD9-81ED-4DB2-BD59-A6C34878D82A}">
+                    <a16:rowId xmlns:a16="http://schemas.microsoft.com/office/drawing/2014/main" val="3443702926"/>
+                  </a:ext>
+                </a:extLst>
+              </a:tr>
+              <a:tr h="0">
+                <a:tc>
+                  <a:txBody>
+                    <a:bodyPr/>
+                    <a:lstStyle/>
+                    <a:p>
+                      <a:pPr algn="l">
+                        <a:lnSpc>
+                          <a:spcPct val="138889"/>
+                        </a:lnSpc>
+                        <a:buNone/>
+                      </a:pPr>
+                      <a:r>
+                        <a:rPr lang="zh-CN" sz="1125" b="1">
+                          <a:solidFill>
+                            <a:srgbClr val="000000"/>
+                          </a:solidFill>
+                          <a:effectLst/>
+                        </a:rPr>
+                        <a:t>侯永森</a:t>
+                      </a:r>
+                      <a:endParaRPr lang="zh-CN" sz="1125" b="1" i="0">
+                        <a:solidFill>
+                          <a:srgbClr val="000000"/>
+                        </a:solidFill>
+                        <a:effectLst/>
+                        <a:latin typeface="quote-cjk-patch"/>
+                      </a:endParaRPr>
+                    </a:p>
+                  </a:txBody>
+                  <a:tcPr marR="76200" marT="47625" marB="47625" anchor="ctr">
+                    <a:lnL w="12700" cmpd="sng">
+                      <a:solidFill>
+                        <a:srgbClr val="D6E6F2"/>
+                      </a:solidFill>
+                    </a:lnL>
+                    <a:lnR w="12700" cmpd="sng">
+                      <a:solidFill>
+                        <a:srgbClr val="D6E6F2"/>
+                      </a:solidFill>
+                    </a:lnR>
+                    <a:lnT w="12700" cmpd="sng">
+                      <a:solidFill>
+                        <a:srgbClr val="DDDDDD"/>
+                      </a:solidFill>
+                      <a:prstDash val="solid"/>
+                    </a:lnT>
+                    <a:lnB w="12700" cmpd="sng">
+                      <a:solidFill>
+                        <a:srgbClr val="DDDDDD"/>
+                      </a:solidFill>
+                      <a:prstDash val="solid"/>
+                    </a:lnB>
+                    <a:solidFill>
+                      <a:srgbClr val="D6E6F2"/>
+                    </a:solidFill>
+                  </a:tcPr>
+                </a:tc>
+                <a:tc>
+                  <a:txBody>
+                    <a:bodyPr/>
+                    <a:lstStyle/>
+                    <a:p>
+                      <a:pPr algn="l">
+                        <a:lnSpc>
+                          <a:spcPct val="138889"/>
+                        </a:lnSpc>
+                        <a:buNone/>
+                      </a:pPr>
+                      <a:r>
+                        <a:rPr lang="zh-CN" sz="1125">
+                          <a:solidFill>
+                            <a:srgbClr val="000000"/>
+                          </a:solidFill>
+                          <a:effectLst/>
+                        </a:rPr>
+                        <a:t>协作</a:t>
+                      </a:r>
+                      <a:endParaRPr lang="zh-CN" sz="1125" b="0" i="0">
+                        <a:solidFill>
+                          <a:srgbClr val="000000"/>
+                        </a:solidFill>
+                        <a:effectLst/>
+                        <a:latin typeface="quote-cjk-patch"/>
+                      </a:endParaRPr>
+                    </a:p>
+                  </a:txBody>
+                  <a:tcPr marL="76200" marR="76200" marT="47625" marB="47625" anchor="ctr">
+                    <a:lnL w="12700" cmpd="sng">
+                      <a:solidFill>
+                        <a:srgbClr val="D6E6F2"/>
+                      </a:solidFill>
+                    </a:lnL>
+                    <a:lnR w="12700" cmpd="sng">
+                      <a:solidFill>
+                        <a:srgbClr val="F7FBFC"/>
+                      </a:solidFill>
+                    </a:lnR>
+                    <a:lnT w="12700" cmpd="sng">
+                      <a:solidFill>
+                        <a:srgbClr val="DDDDDD"/>
+                      </a:solidFill>
+                      <a:prstDash val="solid"/>
+                    </a:lnT>
+                    <a:lnB w="12700" cmpd="sng">
+                      <a:solidFill>
+                        <a:srgbClr val="DDDDDD"/>
+                      </a:solidFill>
+                      <a:prstDash val="solid"/>
+                    </a:lnB>
+                    <a:solidFill>
+                      <a:srgbClr val="F7FBFC"/>
+                    </a:solidFill>
+                  </a:tcPr>
+                </a:tc>
+                <a:tc>
+                  <a:txBody>
+                    <a:bodyPr/>
+                    <a:lstStyle/>
+                    <a:p>
+                      <a:pPr algn="l">
+                        <a:lnSpc>
+                          <a:spcPct val="138889"/>
+                        </a:lnSpc>
+                        <a:buNone/>
+                      </a:pPr>
+                      <a:r>
+                        <a:rPr lang="zh-CN" sz="1125" dirty="0">
+                          <a:solidFill>
+                            <a:srgbClr val="000000"/>
+                          </a:solidFill>
+                          <a:effectLst/>
+                        </a:rPr>
+                        <a:t>—</a:t>
+                      </a:r>
+                      <a:endParaRPr lang="zh-CN" sz="1125" b="0" i="0" dirty="0">
+                        <a:solidFill>
+                          <a:srgbClr val="000000"/>
+                        </a:solidFill>
+                        <a:effectLst/>
+                        <a:latin typeface="quote-cjk-patch"/>
+                      </a:endParaRPr>
+                    </a:p>
+                  </a:txBody>
+                  <a:tcPr marL="76200" marR="76200" marT="47625" marB="47625" anchor="ctr">
+                    <a:lnL w="12700" cmpd="sng">
+                      <a:solidFill>
+                        <a:srgbClr val="F7FBFC"/>
+                      </a:solidFill>
+                    </a:lnL>
+                    <a:lnR w="12700" cmpd="sng">
+                      <a:solidFill>
+                        <a:srgbClr val="F7FBFC"/>
+                      </a:solidFill>
+                    </a:lnR>
+                    <a:lnT w="12700" cmpd="sng">
+                      <a:solidFill>
+                        <a:srgbClr val="DDDDDD"/>
+                      </a:solidFill>
+                      <a:prstDash val="solid"/>
+                    </a:lnT>
+                    <a:lnB w="12700" cmpd="sng">
+                      <a:solidFill>
+                        <a:srgbClr val="DDDDDD"/>
+                      </a:solidFill>
+                      <a:prstDash val="solid"/>
+                    </a:lnB>
+                    <a:solidFill>
+                      <a:srgbClr val="F7FBFC"/>
+                    </a:solidFill>
+                  </a:tcPr>
+                </a:tc>
+                <a:tc>
+                  <a:txBody>
+                    <a:bodyPr/>
+                    <a:lstStyle/>
+                    <a:p>
+                      <a:pPr algn="l">
+                        <a:lnSpc>
+                          <a:spcPct val="138889"/>
+                        </a:lnSpc>
+                        <a:buNone/>
+                      </a:pPr>
+                      <a:r>
+                        <a:rPr lang="zh-CN" sz="1125">
+                          <a:solidFill>
+                            <a:srgbClr val="000000"/>
+                          </a:solidFill>
+                          <a:effectLst/>
+                        </a:rPr>
+                        <a:t>参数映射、基础建模、参数面板、规格核对、几何样例</a:t>
+                      </a:r>
+                      <a:endParaRPr lang="zh-CN" sz="1125" b="0" i="0">
+                        <a:solidFill>
+                          <a:srgbClr val="000000"/>
+                        </a:solidFill>
+                        <a:effectLst/>
+                        <a:latin typeface="quote-cjk-patch"/>
+                      </a:endParaRPr>
+                    </a:p>
+                  </a:txBody>
+                  <a:tcPr marL="76200" marT="47625" marB="47625" anchor="ctr">
+                    <a:lnL w="12700" cmpd="sng">
+                      <a:solidFill>
+                        <a:srgbClr val="F7FBFC"/>
+                      </a:solidFill>
+                    </a:lnL>
+                    <a:lnR w="12700" cmpd="sng">
+                      <a:solidFill>
+                        <a:srgbClr val="F7FBFC"/>
+                      </a:solidFill>
+                    </a:lnR>
+                    <a:lnT w="12700" cmpd="sng">
+                      <a:solidFill>
+                        <a:srgbClr val="DDDDDD"/>
+                      </a:solidFill>
+                      <a:prstDash val="solid"/>
+                    </a:lnT>
+                    <a:lnB w="12700" cmpd="sng">
+                      <a:solidFill>
+                        <a:srgbClr val="DDDDDD"/>
+                      </a:solidFill>
+                      <a:prstDash val="solid"/>
+                    </a:lnB>
+                    <a:solidFill>
+                      <a:srgbClr val="F7FBFC"/>
+                    </a:solidFill>
+                  </a:tcPr>
+                </a:tc>
+                <a:extLst>
+                  <a:ext uri="{0D108BD9-81ED-4DB2-BD59-A6C34878D82A}">
+                    <a16:rowId xmlns:a16="http://schemas.microsoft.com/office/drawing/2014/main" val="3859399761"/>
+                  </a:ext>
+                </a:extLst>
+              </a:tr>
+              <a:tr h="0">
+                <a:tc>
+                  <a:txBody>
+                    <a:bodyPr/>
+                    <a:lstStyle/>
+                    <a:p>
+                      <a:pPr algn="l">
+                        <a:lnSpc>
+                          <a:spcPct val="138889"/>
+                        </a:lnSpc>
+                        <a:buNone/>
+                      </a:pPr>
+                      <a:r>
+                        <a:rPr lang="zh-CN" sz="1125" b="1">
+                          <a:solidFill>
+                            <a:srgbClr val="000000"/>
+                          </a:solidFill>
+                          <a:effectLst/>
+                        </a:rPr>
+                        <a:t>庞佳泽</a:t>
+                      </a:r>
+                      <a:endParaRPr lang="zh-CN" sz="1125" b="1" i="0">
+                        <a:solidFill>
+                          <a:srgbClr val="000000"/>
+                        </a:solidFill>
+                        <a:effectLst/>
+                        <a:latin typeface="quote-cjk-patch"/>
+                      </a:endParaRPr>
+                    </a:p>
+                  </a:txBody>
+                  <a:tcPr marR="76200" marT="47625" marB="47625" anchor="ctr">
+                    <a:lnL w="12700" cmpd="sng">
+                      <a:solidFill>
+                        <a:srgbClr val="D6E6F2"/>
+                      </a:solidFill>
+                    </a:lnL>
+                    <a:lnR w="12700" cmpd="sng">
+                      <a:solidFill>
+                        <a:srgbClr val="D6E6F2"/>
+                      </a:solidFill>
+                    </a:lnR>
+                    <a:lnT w="12700" cmpd="sng">
+                      <a:solidFill>
+                        <a:srgbClr val="DDDDDD"/>
+                      </a:solidFill>
+                      <a:prstDash val="solid"/>
+                    </a:lnT>
+                    <a:lnB w="12700" cmpd="sng">
+                      <a:solidFill>
+                        <a:srgbClr val="DDDDDD"/>
+                      </a:solidFill>
+                      <a:prstDash val="solid"/>
+                    </a:lnB>
+                    <a:solidFill>
+                      <a:srgbClr val="D6E6F2"/>
+                    </a:solidFill>
+                  </a:tcPr>
+                </a:tc>
+                <a:tc>
+                  <a:txBody>
+                    <a:bodyPr/>
+                    <a:lstStyle/>
+                    <a:p>
+                      <a:pPr algn="l">
+                        <a:lnSpc>
+                          <a:spcPct val="138889"/>
+                        </a:lnSpc>
+                        <a:buNone/>
+                      </a:pPr>
+                      <a:r>
+                        <a:rPr lang="zh-CN" sz="1125">
+                          <a:solidFill>
+                            <a:srgbClr val="000000"/>
+                          </a:solidFill>
+                          <a:effectLst/>
+                        </a:rPr>
+                        <a:t>协作</a:t>
+                      </a:r>
+                      <a:endParaRPr lang="zh-CN" sz="1125" b="0" i="0">
+                        <a:solidFill>
+                          <a:srgbClr val="000000"/>
+                        </a:solidFill>
+                        <a:effectLst/>
+                        <a:latin typeface="quote-cjk-patch"/>
+                      </a:endParaRPr>
+                    </a:p>
+                  </a:txBody>
+                  <a:tcPr marL="76200" marR="76200" marT="47625" marB="47625" anchor="ctr">
+                    <a:lnL w="12700" cmpd="sng">
+                      <a:solidFill>
+                        <a:srgbClr val="D6E6F2"/>
+                      </a:solidFill>
+                    </a:lnL>
+                    <a:lnR w="12700" cmpd="sng">
+                      <a:solidFill>
+                        <a:srgbClr val="FFFFFF"/>
+                      </a:solidFill>
+                    </a:lnR>
+                    <a:lnT w="12700" cmpd="sng">
+                      <a:solidFill>
+                        <a:srgbClr val="DDDDDD"/>
+                      </a:solidFill>
+                      <a:prstDash val="solid"/>
+                    </a:lnT>
+                    <a:lnB w="12700" cmpd="sng">
+                      <a:solidFill>
+                        <a:srgbClr val="DDDDDD"/>
+                      </a:solidFill>
+                      <a:prstDash val="solid"/>
+                    </a:lnB>
+                    <a:solidFill>
+                      <a:srgbClr val="FFFFFF"/>
+                    </a:solidFill>
+                  </a:tcPr>
+                </a:tc>
+                <a:tc>
+                  <a:txBody>
+                    <a:bodyPr/>
+                    <a:lstStyle/>
+                    <a:p>
+                      <a:pPr algn="l">
+                        <a:lnSpc>
+                          <a:spcPct val="138889"/>
+                        </a:lnSpc>
+                        <a:buNone/>
+                      </a:pPr>
+                      <a:r>
+                        <a:rPr lang="zh-CN" sz="1125">
+                          <a:solidFill>
+                            <a:srgbClr val="000000"/>
+                          </a:solidFill>
+                          <a:effectLst/>
+                        </a:rPr>
+                        <a:t>—</a:t>
+                      </a:r>
+                      <a:endParaRPr lang="zh-CN" sz="1125" b="0" i="0">
+                        <a:solidFill>
+                          <a:srgbClr val="000000"/>
+                        </a:solidFill>
+                        <a:effectLst/>
+                        <a:latin typeface="quote-cjk-patch"/>
+                      </a:endParaRPr>
+                    </a:p>
+                  </a:txBody>
+                  <a:tcPr marL="76200" marR="76200" marT="47625" marB="47625" anchor="ctr">
+                    <a:lnL w="12700" cmpd="sng">
+                      <a:solidFill>
+                        <a:srgbClr val="FFFFFF"/>
+                      </a:solidFill>
+                    </a:lnL>
+                    <a:lnR w="12700" cmpd="sng">
+                      <a:solidFill>
+                        <a:srgbClr val="FFFFFF"/>
+                      </a:solidFill>
+                    </a:lnR>
+                    <a:lnT w="12700" cmpd="sng">
+                      <a:solidFill>
+                        <a:srgbClr val="DDDDDD"/>
+                      </a:solidFill>
+                      <a:prstDash val="solid"/>
+                    </a:lnT>
+                    <a:lnB w="12700" cmpd="sng">
+                      <a:solidFill>
+                        <a:srgbClr val="DDDDDD"/>
+                      </a:solidFill>
+                      <a:prstDash val="solid"/>
+                    </a:lnB>
+                    <a:solidFill>
+                      <a:srgbClr val="FFFFFF"/>
+                    </a:solidFill>
+                  </a:tcPr>
+                </a:tc>
+                <a:tc>
+                  <a:txBody>
+                    <a:bodyPr/>
+                    <a:lstStyle/>
+                    <a:p>
+                      <a:pPr algn="l">
+                        <a:lnSpc>
+                          <a:spcPct val="138889"/>
+                        </a:lnSpc>
+                        <a:buNone/>
+                      </a:pPr>
+                      <a:r>
+                        <a:rPr lang="zh-CN" sz="1125">
+                          <a:solidFill>
+                            <a:srgbClr val="000000"/>
+                          </a:solidFill>
+                          <a:effectLst/>
+                        </a:rPr>
+                        <a:t>图片样例、尺寸核对、模型与元数据整理、来源版本数据</a:t>
+                      </a:r>
+                      <a:endParaRPr lang="zh-CN" sz="1125" b="0" i="0">
+                        <a:solidFill>
+                          <a:srgbClr val="000000"/>
+                        </a:solidFill>
+                        <a:effectLst/>
+                        <a:latin typeface="quote-cjk-patch"/>
+                      </a:endParaRPr>
+                    </a:p>
+                  </a:txBody>
+                  <a:tcPr marL="76200" marT="47625" marB="47625" anchor="ctr">
+                    <a:lnL w="12700" cmpd="sng">
+                      <a:solidFill>
+                        <a:srgbClr val="FFFFFF"/>
+                      </a:solidFill>
+                    </a:lnL>
+                    <a:lnR w="12700" cmpd="sng">
+                      <a:solidFill>
+                        <a:srgbClr val="FFFFFF"/>
+                      </a:solidFill>
+                    </a:lnR>
+                    <a:lnT w="12700" cmpd="sng">
+                      <a:solidFill>
+                        <a:srgbClr val="DDDDDD"/>
+                      </a:solidFill>
+                      <a:prstDash val="solid"/>
+                    </a:lnT>
+                    <a:lnB w="12700" cmpd="sng">
+                      <a:solidFill>
+                        <a:srgbClr val="DDDDDD"/>
+                      </a:solidFill>
+                      <a:prstDash val="solid"/>
+                    </a:lnB>
+                    <a:solidFill>
+                      <a:srgbClr val="FFFFFF"/>
+                    </a:solidFill>
+                  </a:tcPr>
+                </a:tc>
+                <a:extLst>
+                  <a:ext uri="{0D108BD9-81ED-4DB2-BD59-A6C34878D82A}">
+                    <a16:rowId xmlns:a16="http://schemas.microsoft.com/office/drawing/2014/main" val="1423309325"/>
+                  </a:ext>
+                </a:extLst>
+              </a:tr>
+              <a:tr h="0">
+                <a:tc>
+                  <a:txBody>
+                    <a:bodyPr/>
+                    <a:lstStyle/>
+                    <a:p>
+                      <a:pPr algn="l">
+                        <a:lnSpc>
+                          <a:spcPct val="138889"/>
+                        </a:lnSpc>
+                        <a:buNone/>
+                      </a:pPr>
+                      <a:r>
+                        <a:rPr lang="zh-CN" sz="1125" b="1">
+                          <a:solidFill>
+                            <a:srgbClr val="000000"/>
+                          </a:solidFill>
+                          <a:effectLst/>
+                        </a:rPr>
+                        <a:t>余智皓</a:t>
+                      </a:r>
+                      <a:endParaRPr lang="zh-CN" sz="1125" b="1" i="0">
+                        <a:solidFill>
+                          <a:srgbClr val="000000"/>
+                        </a:solidFill>
+                        <a:effectLst/>
+                        <a:latin typeface="quote-cjk-patch"/>
+                      </a:endParaRPr>
+                    </a:p>
+                  </a:txBody>
+                  <a:tcPr marR="76200" marT="47625" marB="47625" anchor="ctr">
+                    <a:lnL w="12700" cmpd="sng">
+                      <a:solidFill>
+                        <a:srgbClr val="D6E6F2"/>
+                      </a:solidFill>
+                    </a:lnL>
+                    <a:lnR w="12700" cmpd="sng">
+                      <a:solidFill>
+                        <a:srgbClr val="D6E6F2"/>
+                      </a:solidFill>
+                    </a:lnR>
+                    <a:lnT w="12700" cmpd="sng">
+                      <a:solidFill>
+                        <a:srgbClr val="DDDDDD"/>
+                      </a:solidFill>
+                      <a:prstDash val="solid"/>
+                    </a:lnT>
+                    <a:lnB w="12700" cmpd="sng">
+                      <a:solidFill>
+                        <a:srgbClr val="DDDDDD"/>
+                      </a:solidFill>
+                      <a:prstDash val="solid"/>
+                    </a:lnB>
+                    <a:solidFill>
+                      <a:srgbClr val="D6E6F2"/>
+                    </a:solidFill>
+                  </a:tcPr>
+                </a:tc>
+                <a:tc>
+                  <a:txBody>
+                    <a:bodyPr/>
+                    <a:lstStyle/>
+                    <a:p>
+                      <a:pPr algn="l">
+                        <a:lnSpc>
+                          <a:spcPct val="138889"/>
+                        </a:lnSpc>
+                        <a:buNone/>
+                      </a:pPr>
+                      <a:r>
+                        <a:rPr lang="zh-CN" sz="1125">
+                          <a:solidFill>
+                            <a:srgbClr val="000000"/>
+                          </a:solidFill>
+                          <a:effectLst/>
+                        </a:rPr>
+                        <a:t>协作</a:t>
+                      </a:r>
+                      <a:endParaRPr lang="zh-CN" sz="1125" b="0" i="0">
+                        <a:solidFill>
+                          <a:srgbClr val="000000"/>
+                        </a:solidFill>
+                        <a:effectLst/>
+                        <a:latin typeface="quote-cjk-patch"/>
+                      </a:endParaRPr>
+                    </a:p>
+                  </a:txBody>
+                  <a:tcPr marL="76200" marR="76200" marT="47625" marB="47625" anchor="ctr">
+                    <a:lnL w="12700" cmpd="sng">
+                      <a:solidFill>
+                        <a:srgbClr val="D6E6F2"/>
+                      </a:solidFill>
+                    </a:lnL>
+                    <a:lnR w="12700" cmpd="sng">
+                      <a:solidFill>
+                        <a:srgbClr val="F7FBFC"/>
+                      </a:solidFill>
+                    </a:lnR>
+                    <a:lnT w="12700" cmpd="sng">
+                      <a:solidFill>
+                        <a:srgbClr val="DDDDDD"/>
+                      </a:solidFill>
+                      <a:prstDash val="solid"/>
+                    </a:lnT>
+                    <a:lnB w="12700" cmpd="sng">
+                      <a:solidFill>
+                        <a:srgbClr val="DDDDDD"/>
+                      </a:solidFill>
+                      <a:prstDash val="solid"/>
+                    </a:lnB>
+                    <a:solidFill>
+                      <a:srgbClr val="F7FBFC"/>
+                    </a:solidFill>
+                  </a:tcPr>
+                </a:tc>
+                <a:tc>
+                  <a:txBody>
+                    <a:bodyPr/>
+                    <a:lstStyle/>
+                    <a:p>
+                      <a:pPr algn="l">
+                        <a:lnSpc>
+                          <a:spcPct val="138889"/>
+                        </a:lnSpc>
+                        <a:buNone/>
+                      </a:pPr>
+                      <a:r>
+                        <a:rPr lang="zh-CN" sz="1125">
+                          <a:solidFill>
+                            <a:srgbClr val="000000"/>
+                          </a:solidFill>
+                          <a:effectLst/>
+                        </a:rPr>
+                        <a:t>—</a:t>
+                      </a:r>
+                      <a:endParaRPr lang="zh-CN" sz="1125" b="0" i="0">
+                        <a:solidFill>
+                          <a:srgbClr val="000000"/>
+                        </a:solidFill>
+                        <a:effectLst/>
+                        <a:latin typeface="quote-cjk-patch"/>
+                      </a:endParaRPr>
+                    </a:p>
+                  </a:txBody>
+                  <a:tcPr marL="76200" marR="76200" marT="47625" marB="47625" anchor="ctr">
+                    <a:lnL w="12700" cmpd="sng">
+                      <a:solidFill>
+                        <a:srgbClr val="F7FBFC"/>
+                      </a:solidFill>
+                    </a:lnL>
+                    <a:lnR w="12700" cmpd="sng">
+                      <a:solidFill>
+                        <a:srgbClr val="F7FBFC"/>
+                      </a:solidFill>
+                    </a:lnR>
+                    <a:lnT w="12700" cmpd="sng">
+                      <a:solidFill>
+                        <a:srgbClr val="DDDDDD"/>
+                      </a:solidFill>
+                      <a:prstDash val="solid"/>
+                    </a:lnT>
+                    <a:lnB w="12700" cmpd="sng">
+                      <a:solidFill>
+                        <a:srgbClr val="DDDDDD"/>
+                      </a:solidFill>
+                      <a:prstDash val="solid"/>
+                    </a:lnB>
+                    <a:solidFill>
+                      <a:srgbClr val="F7FBFC"/>
+                    </a:solidFill>
+                  </a:tcPr>
+                </a:tc>
+                <a:tc>
+                  <a:txBody>
+                    <a:bodyPr/>
+                    <a:lstStyle/>
+                    <a:p>
+                      <a:pPr algn="l">
+                        <a:lnSpc>
+                          <a:spcPct val="138889"/>
+                        </a:lnSpc>
+                        <a:buNone/>
+                      </a:pPr>
+                      <a:r>
+                        <a:rPr lang="zh-CN" sz="1125">
+                          <a:solidFill>
+                            <a:srgbClr val="000000"/>
+                          </a:solidFill>
+                          <a:effectLst/>
+                        </a:rPr>
+                        <a:t>生成接口、检索接口、QA接口、前后端字段一致性、导出</a:t>
+                      </a:r>
+                      <a:endParaRPr lang="zh-CN" sz="1125" b="0" i="0">
+                        <a:solidFill>
+                          <a:srgbClr val="000000"/>
+                        </a:solidFill>
+                        <a:effectLst/>
+                        <a:latin typeface="quote-cjk-patch"/>
+                      </a:endParaRPr>
+                    </a:p>
+                  </a:txBody>
+                  <a:tcPr marL="76200" marT="47625" marB="47625" anchor="ctr">
+                    <a:lnL w="12700" cmpd="sng">
+                      <a:solidFill>
+                        <a:srgbClr val="F7FBFC"/>
+                      </a:solidFill>
+                    </a:lnL>
+                    <a:lnR w="12700" cmpd="sng">
+                      <a:solidFill>
+                        <a:srgbClr val="F7FBFC"/>
+                      </a:solidFill>
+                    </a:lnR>
+                    <a:lnT w="12700" cmpd="sng">
+                      <a:solidFill>
+                        <a:srgbClr val="DDDDDD"/>
+                      </a:solidFill>
+                      <a:prstDash val="solid"/>
+                    </a:lnT>
+                    <a:lnB w="12700" cmpd="sng">
+                      <a:solidFill>
+                        <a:srgbClr val="DDDDDD"/>
+                      </a:solidFill>
+                      <a:prstDash val="solid"/>
+                    </a:lnB>
+                    <a:solidFill>
+                      <a:srgbClr val="F7FBFC"/>
+                    </a:solidFill>
+                  </a:tcPr>
+                </a:tc>
+                <a:extLst>
+                  <a:ext uri="{0D108BD9-81ED-4DB2-BD59-A6C34878D82A}">
+                    <a16:rowId xmlns:a16="http://schemas.microsoft.com/office/drawing/2014/main" val="779382061"/>
+                  </a:ext>
+                </a:extLst>
+              </a:tr>
+              <a:tr h="0">
+                <a:tc>
+                  <a:txBody>
+                    <a:bodyPr/>
+                    <a:lstStyle/>
+                    <a:p>
+                      <a:pPr algn="l">
+                        <a:lnSpc>
+                          <a:spcPct val="138889"/>
+                        </a:lnSpc>
+                        <a:buNone/>
+                      </a:pPr>
+                      <a:r>
+                        <a:rPr lang="zh-CN" sz="1125" b="1">
+                          <a:solidFill>
+                            <a:srgbClr val="000000"/>
+                          </a:solidFill>
+                          <a:effectLst/>
+                        </a:rPr>
+                        <a:t>严翊航</a:t>
+                      </a:r>
+                      <a:endParaRPr lang="zh-CN" sz="1125" b="1" i="0">
+                        <a:solidFill>
+                          <a:srgbClr val="000000"/>
+                        </a:solidFill>
+                        <a:effectLst/>
+                        <a:latin typeface="quote-cjk-patch"/>
+                      </a:endParaRPr>
+                    </a:p>
+                  </a:txBody>
+                  <a:tcPr marR="76200" marT="47625" marB="47625" anchor="ctr">
+                    <a:lnL w="12700" cmpd="sng">
+                      <a:solidFill>
+                        <a:srgbClr val="D6E6F2"/>
+                      </a:solidFill>
+                    </a:lnL>
+                    <a:lnR w="12700" cmpd="sng">
+                      <a:solidFill>
+                        <a:srgbClr val="D6E6F2"/>
+                      </a:solidFill>
+                    </a:lnR>
+                    <a:lnT w="12700" cmpd="sng">
+                      <a:solidFill>
+                        <a:srgbClr val="DDDDDD"/>
+                      </a:solidFill>
+                      <a:prstDash val="solid"/>
+                    </a:lnT>
+                    <a:lnB w="12700" cmpd="sng">
+                      <a:solidFill>
+                        <a:srgbClr val="DDDDDD"/>
+                      </a:solidFill>
+                      <a:prstDash val="solid"/>
+                    </a:lnB>
+                    <a:solidFill>
+                      <a:srgbClr val="D6E6F2"/>
+                    </a:solidFill>
+                  </a:tcPr>
+                </a:tc>
+                <a:tc>
+                  <a:txBody>
+                    <a:bodyPr/>
+                    <a:lstStyle/>
+                    <a:p>
+                      <a:pPr algn="l">
+                        <a:lnSpc>
+                          <a:spcPct val="138889"/>
+                        </a:lnSpc>
+                        <a:buNone/>
+                      </a:pPr>
+                      <a:r>
+                        <a:rPr lang="zh-CN" sz="1125">
+                          <a:solidFill>
+                            <a:srgbClr val="000000"/>
+                          </a:solidFill>
+                          <a:effectLst/>
+                        </a:rPr>
+                        <a:t>协作</a:t>
+                      </a:r>
+                      <a:endParaRPr lang="zh-CN" sz="1125" b="0" i="0">
+                        <a:solidFill>
+                          <a:srgbClr val="000000"/>
+                        </a:solidFill>
+                        <a:effectLst/>
+                        <a:latin typeface="quote-cjk-patch"/>
+                      </a:endParaRPr>
+                    </a:p>
+                  </a:txBody>
+                  <a:tcPr marL="76200" marR="76200" marT="47625" marB="47625" anchor="ctr">
+                    <a:lnL w="12700" cmpd="sng">
+                      <a:solidFill>
+                        <a:srgbClr val="D6E6F2"/>
+                      </a:solidFill>
+                    </a:lnL>
+                    <a:lnR w="12700" cmpd="sng">
+                      <a:solidFill>
+                        <a:srgbClr val="FFFFFF"/>
+                      </a:solidFill>
+                    </a:lnR>
+                    <a:lnT w="12700" cmpd="sng">
+                      <a:solidFill>
+                        <a:srgbClr val="DDDDDD"/>
+                      </a:solidFill>
+                      <a:prstDash val="solid"/>
+                    </a:lnT>
+                    <a:lnB w="12700" cmpd="sng">
+                      <a:solidFill>
+                        <a:srgbClr val="DDDDDD"/>
+                      </a:solidFill>
+                      <a:prstDash val="solid"/>
+                    </a:lnB>
+                    <a:solidFill>
+                      <a:srgbClr val="FFFFFF"/>
+                    </a:solidFill>
+                  </a:tcPr>
+                </a:tc>
+                <a:tc>
+                  <a:txBody>
+                    <a:bodyPr/>
+                    <a:lstStyle/>
+                    <a:p>
+                      <a:pPr algn="l">
+                        <a:lnSpc>
+                          <a:spcPct val="138889"/>
+                        </a:lnSpc>
+                        <a:buNone/>
+                      </a:pPr>
+                      <a:r>
+                        <a:rPr lang="zh-CN" sz="1125">
+                          <a:solidFill>
+                            <a:srgbClr val="000000"/>
+                          </a:solidFill>
+                          <a:effectLst/>
+                        </a:rPr>
+                        <a:t>—</a:t>
+                      </a:r>
+                      <a:endParaRPr lang="zh-CN" sz="1125" b="0" i="0">
+                        <a:solidFill>
+                          <a:srgbClr val="000000"/>
+                        </a:solidFill>
+                        <a:effectLst/>
+                        <a:latin typeface="quote-cjk-patch"/>
+                      </a:endParaRPr>
+                    </a:p>
+                  </a:txBody>
+                  <a:tcPr marL="76200" marR="76200" marT="47625" marB="47625" anchor="ctr">
+                    <a:lnL w="12700" cmpd="sng">
+                      <a:solidFill>
+                        <a:srgbClr val="FFFFFF"/>
+                      </a:solidFill>
+                    </a:lnL>
+                    <a:lnR w="12700" cmpd="sng">
+                      <a:solidFill>
+                        <a:srgbClr val="FFFFFF"/>
+                      </a:solidFill>
+                    </a:lnR>
+                    <a:lnT w="12700" cmpd="sng">
+                      <a:solidFill>
+                        <a:srgbClr val="DDDDDD"/>
+                      </a:solidFill>
+                      <a:prstDash val="solid"/>
+                    </a:lnT>
+                    <a:lnB w="12700" cmpd="sng">
+                      <a:solidFill>
+                        <a:srgbClr val="DDDDDD"/>
+                      </a:solidFill>
+                      <a:prstDash val="solid"/>
+                    </a:lnB>
+                    <a:solidFill>
+                      <a:srgbClr val="FFFFFF"/>
+                    </a:solidFill>
+                  </a:tcPr>
+                </a:tc>
+                <a:tc>
+                  <a:txBody>
+                    <a:bodyPr/>
+                    <a:lstStyle/>
+                    <a:p>
+                      <a:pPr algn="l">
+                        <a:lnSpc>
+                          <a:spcPct val="138889"/>
+                        </a:lnSpc>
+                        <a:buNone/>
+                      </a:pPr>
+                      <a:r>
+                        <a:rPr lang="zh-CN" sz="1125">
+                          <a:solidFill>
+                            <a:srgbClr val="000000"/>
+                          </a:solidFill>
+                          <a:effectLst/>
+                        </a:rPr>
+                        <a:t>图片上传、输入校验、异常测试、尺寸比对、联调</a:t>
+                      </a:r>
+                      <a:endParaRPr lang="zh-CN" sz="1125" b="0" i="0">
+                        <a:solidFill>
+                          <a:srgbClr val="000000"/>
+                        </a:solidFill>
+                        <a:effectLst/>
+                        <a:latin typeface="quote-cjk-patch"/>
+                      </a:endParaRPr>
+                    </a:p>
+                  </a:txBody>
+                  <a:tcPr marL="76200" marT="47625" marB="47625" anchor="ctr">
+                    <a:lnL w="12700" cmpd="sng">
+                      <a:solidFill>
+                        <a:srgbClr val="FFFFFF"/>
+                      </a:solidFill>
+                    </a:lnL>
+                    <a:lnR w="12700" cmpd="sng">
+                      <a:solidFill>
+                        <a:srgbClr val="FFFFFF"/>
+                      </a:solidFill>
+                    </a:lnR>
+                    <a:lnT w="12700" cmpd="sng">
+                      <a:solidFill>
+                        <a:srgbClr val="DDDDDD"/>
+                      </a:solidFill>
+                      <a:prstDash val="solid"/>
+                    </a:lnT>
+                    <a:lnB w="12700" cmpd="sng">
+                      <a:solidFill>
+                        <a:srgbClr val="DDDDDD"/>
+                      </a:solidFill>
+                      <a:prstDash val="solid"/>
+                    </a:lnB>
+                    <a:solidFill>
+                      <a:srgbClr val="FFFFFF"/>
+                    </a:solidFill>
+                  </a:tcPr>
+                </a:tc>
+                <a:extLst>
+                  <a:ext uri="{0D108BD9-81ED-4DB2-BD59-A6C34878D82A}">
+                    <a16:rowId xmlns:a16="http://schemas.microsoft.com/office/drawing/2014/main" val="3997126456"/>
+                  </a:ext>
+                </a:extLst>
+              </a:tr>
+              <a:tr h="0">
+                <a:tc>
+                  <a:txBody>
+                    <a:bodyPr/>
+                    <a:lstStyle/>
+                    <a:p>
+                      <a:pPr algn="l">
+                        <a:lnSpc>
+                          <a:spcPct val="138889"/>
+                        </a:lnSpc>
+                        <a:buNone/>
+                      </a:pPr>
+                      <a:r>
+                        <a:rPr lang="zh-CN" sz="1125" b="1">
+                          <a:solidFill>
+                            <a:srgbClr val="000000"/>
+                          </a:solidFill>
+                          <a:effectLst/>
+                        </a:rPr>
+                        <a:t>许祖嘉（PO）</a:t>
+                      </a:r>
+                      <a:endParaRPr lang="zh-CN" sz="1125" b="1" i="0">
+                        <a:solidFill>
+                          <a:srgbClr val="000000"/>
+                        </a:solidFill>
+                        <a:effectLst/>
+                        <a:latin typeface="quote-cjk-patch"/>
+                      </a:endParaRPr>
+                    </a:p>
+                  </a:txBody>
+                  <a:tcPr marR="76200" marT="47625" marB="47625" anchor="ctr">
+                    <a:lnL w="12700" cmpd="sng">
+                      <a:solidFill>
+                        <a:srgbClr val="D6E6F2"/>
+                      </a:solidFill>
+                    </a:lnL>
+                    <a:lnR w="12700" cmpd="sng">
+                      <a:solidFill>
+                        <a:srgbClr val="D6E6F2"/>
+                      </a:solidFill>
+                    </a:lnR>
+                    <a:lnT w="12700" cmpd="sng">
+                      <a:solidFill>
+                        <a:srgbClr val="DDDDDD"/>
+                      </a:solidFill>
+                      <a:prstDash val="solid"/>
+                    </a:lnT>
+                    <a:lnB w="12700" cmpd="sng">
+                      <a:solidFill>
+                        <a:srgbClr val="B9D7EA"/>
+                      </a:solidFill>
+                      <a:prstDash val="solid"/>
+                    </a:lnB>
+                    <a:solidFill>
+                      <a:srgbClr val="D6E6F2"/>
+                    </a:solidFill>
+                  </a:tcPr>
+                </a:tc>
+                <a:tc>
+                  <a:txBody>
+                    <a:bodyPr/>
+                    <a:lstStyle/>
+                    <a:p>
+                      <a:pPr algn="l">
+                        <a:lnSpc>
+                          <a:spcPct val="138889"/>
+                        </a:lnSpc>
+                        <a:buNone/>
+                      </a:pPr>
+                      <a:r>
+                        <a:rPr lang="zh-CN" sz="1125">
+                          <a:solidFill>
+                            <a:srgbClr val="000000"/>
+                          </a:solidFill>
+                          <a:effectLst/>
+                        </a:rPr>
+                        <a:t>验收</a:t>
+                      </a:r>
+                      <a:endParaRPr lang="zh-CN" sz="1125" b="0" i="0">
+                        <a:solidFill>
+                          <a:srgbClr val="000000"/>
+                        </a:solidFill>
+                        <a:effectLst/>
+                        <a:latin typeface="quote-cjk-patch"/>
+                      </a:endParaRPr>
+                    </a:p>
+                  </a:txBody>
+                  <a:tcPr marL="76200" marR="76200" marT="47625" marB="47625" anchor="ctr">
+                    <a:lnL w="12700" cmpd="sng">
+                      <a:solidFill>
+                        <a:srgbClr val="D6E6F2"/>
+                      </a:solidFill>
+                    </a:lnL>
+                    <a:lnR w="12700" cmpd="sng">
+                      <a:solidFill>
+                        <a:srgbClr val="F7FBFC"/>
+                      </a:solidFill>
+                    </a:lnR>
+                    <a:lnT w="12700" cmpd="sng">
+                      <a:solidFill>
+                        <a:srgbClr val="DDDDDD"/>
+                      </a:solidFill>
+                      <a:prstDash val="solid"/>
+                    </a:lnT>
+                    <a:lnB w="12700" cmpd="sng">
+                      <a:solidFill>
+                        <a:srgbClr val="B9D7EA"/>
+                      </a:solidFill>
+                      <a:prstDash val="solid"/>
+                    </a:lnB>
+                    <a:solidFill>
+                      <a:srgbClr val="F7FBFC"/>
+                    </a:solidFill>
+                  </a:tcPr>
+                </a:tc>
+                <a:tc>
+                  <a:txBody>
+                    <a:bodyPr/>
+                    <a:lstStyle/>
+                    <a:p>
+                      <a:pPr algn="l">
+                        <a:lnSpc>
+                          <a:spcPct val="138889"/>
+                        </a:lnSpc>
+                        <a:buNone/>
+                      </a:pPr>
+                      <a:r>
+                        <a:rPr lang="zh-CN" sz="1125">
+                          <a:solidFill>
+                            <a:srgbClr val="000000"/>
+                          </a:solidFill>
+                          <a:effectLst/>
+                        </a:rPr>
+                        <a:t>—</a:t>
+                      </a:r>
+                      <a:endParaRPr lang="zh-CN" sz="1125" b="0" i="0">
+                        <a:solidFill>
+                          <a:srgbClr val="000000"/>
+                        </a:solidFill>
+                        <a:effectLst/>
+                        <a:latin typeface="quote-cjk-patch"/>
+                      </a:endParaRPr>
+                    </a:p>
+                  </a:txBody>
+                  <a:tcPr marL="76200" marR="76200" marT="47625" marB="47625" anchor="ctr">
+                    <a:lnL w="12700" cmpd="sng">
+                      <a:solidFill>
+                        <a:srgbClr val="F7FBFC"/>
+                      </a:solidFill>
+                    </a:lnL>
+                    <a:lnR w="12700" cmpd="sng">
+                      <a:solidFill>
+                        <a:srgbClr val="F7FBFC"/>
+                      </a:solidFill>
+                    </a:lnR>
+                    <a:lnT w="12700" cmpd="sng">
+                      <a:solidFill>
+                        <a:srgbClr val="DDDDDD"/>
+                      </a:solidFill>
+                      <a:prstDash val="solid"/>
+                    </a:lnT>
+                    <a:lnB w="12700" cmpd="sng">
+                      <a:solidFill>
+                        <a:srgbClr val="B9D7EA"/>
+                      </a:solidFill>
+                      <a:prstDash val="solid"/>
+                    </a:lnB>
+                    <a:solidFill>
+                      <a:srgbClr val="F7FBFC"/>
+                    </a:solidFill>
+                  </a:tcPr>
+                </a:tc>
+                <a:tc>
+                  <a:txBody>
+                    <a:bodyPr/>
+                    <a:lstStyle/>
+                    <a:p>
+                      <a:pPr algn="l">
+                        <a:lnSpc>
+                          <a:spcPct val="138889"/>
+                        </a:lnSpc>
+                        <a:buNone/>
+                      </a:pPr>
+                      <a:r>
+                        <a:rPr lang="zh-CN" sz="1125">
+                          <a:solidFill>
+                            <a:srgbClr val="000000"/>
+                          </a:solidFill>
+                          <a:effectLst/>
+                        </a:rPr>
+                        <a:t>确认测试目标资产，PO验收</a:t>
+                      </a:r>
+                      <a:endParaRPr lang="zh-CN" sz="1125" b="0" i="0">
+                        <a:solidFill>
+                          <a:srgbClr val="000000"/>
+                        </a:solidFill>
+                        <a:effectLst/>
+                        <a:latin typeface="quote-cjk-patch"/>
+                      </a:endParaRPr>
+                    </a:p>
+                  </a:txBody>
+                  <a:tcPr marL="76200" marT="47625" marB="47625" anchor="ctr">
+                    <a:lnL w="12700" cmpd="sng">
+                      <a:solidFill>
+                        <a:srgbClr val="F7FBFC"/>
+                      </a:solidFill>
+                    </a:lnL>
+                    <a:lnR w="12700" cmpd="sng">
+                      <a:solidFill>
+                        <a:srgbClr val="F7FBFC"/>
+                      </a:solidFill>
+                    </a:lnR>
+                    <a:lnT w="12700" cmpd="sng">
+                      <a:solidFill>
+                        <a:srgbClr val="DDDDDD"/>
+                      </a:solidFill>
+                      <a:prstDash val="solid"/>
+                    </a:lnT>
+                    <a:lnB w="12700" cmpd="sng">
+                      <a:solidFill>
+                        <a:srgbClr val="B9D7EA"/>
+                      </a:solidFill>
+                      <a:prstDash val="solid"/>
+                    </a:lnB>
+                    <a:solidFill>
+                      <a:srgbClr val="F7FBFC"/>
+                    </a:solidFill>
+                  </a:tcPr>
+                </a:tc>
+                <a:extLst>
+                  <a:ext uri="{0D108BD9-81ED-4DB2-BD59-A6C34878D82A}">
+                    <a16:rowId xmlns:a16="http://schemas.microsoft.com/office/drawing/2014/main" val="505600575"/>
+                  </a:ext>
+                </a:extLst>
+              </a:tr>
+              <a:tr h="0">
+                <a:tc>
+                  <a:txBody>
+                    <a:bodyPr/>
+                    <a:lstStyle/>
+                    <a:p>
+                      <a:pPr algn="l">
+                        <a:lnSpc>
+                          <a:spcPct val="138889"/>
+                        </a:lnSpc>
+                        <a:buNone/>
+                      </a:pPr>
+                      <a:r>
+                        <a:rPr lang="zh-CN" sz="1125">
+                          <a:solidFill>
+                            <a:srgbClr val="000000"/>
+                          </a:solidFill>
+                          <a:effectLst/>
+                        </a:rPr>
+                        <a:t>李健博（SM）</a:t>
+                      </a:r>
+                      <a:endParaRPr lang="zh-CN" sz="1125" b="0" i="0">
+                        <a:solidFill>
+                          <a:srgbClr val="000000"/>
+                        </a:solidFill>
+                        <a:effectLst/>
+                        <a:latin typeface="quote-cjk-patch"/>
+                      </a:endParaRPr>
+                    </a:p>
+                  </a:txBody>
+                  <a:tcPr marR="76200" marT="47625" marB="47625" anchor="ctr">
+                    <a:lnL w="12700" cmpd="sng">
+                      <a:solidFill>
+                        <a:srgbClr val="B9D7EA"/>
+                      </a:solidFill>
+                    </a:lnL>
+                    <a:lnR w="12700" cmpd="sng">
+                      <a:solidFill>
+                        <a:srgbClr val="B9D7EA"/>
+                      </a:solidFill>
+                    </a:lnR>
+                    <a:lnT w="12700" cmpd="sng">
+                      <a:solidFill>
+                        <a:srgbClr val="B9D7EA"/>
+                      </a:solidFill>
+                      <a:prstDash val="solid"/>
+                    </a:lnT>
+                    <a:lnB w="12700" cmpd="sng">
+                      <a:solidFill>
+                        <a:srgbClr val="B9D7EA"/>
+                      </a:solidFill>
+                      <a:prstDash val="solid"/>
+                    </a:lnB>
+                    <a:solidFill>
+                      <a:srgbClr val="B9D7EA"/>
+                    </a:solidFill>
+                  </a:tcPr>
+                </a:tc>
+                <a:tc>
+                  <a:txBody>
+                    <a:bodyPr/>
+                    <a:lstStyle/>
+                    <a:p>
+                      <a:pPr algn="l">
+                        <a:lnSpc>
+                          <a:spcPct val="138889"/>
+                        </a:lnSpc>
+                        <a:buNone/>
+                      </a:pPr>
+                      <a:r>
+                        <a:rPr lang="zh-CN" sz="1125">
+                          <a:solidFill>
+                            <a:srgbClr val="000000"/>
+                          </a:solidFill>
+                          <a:effectLst/>
+                        </a:rPr>
+                        <a:t>管理</a:t>
+                      </a:r>
+                      <a:endParaRPr lang="zh-CN" sz="1125" b="0" i="0">
+                        <a:solidFill>
+                          <a:srgbClr val="000000"/>
+                        </a:solidFill>
+                        <a:effectLst/>
+                        <a:latin typeface="quote-cjk-patch"/>
+                      </a:endParaRPr>
+                    </a:p>
+                  </a:txBody>
+                  <a:tcPr marL="76200" marR="76200" marT="47625" marB="47625" anchor="ctr">
+                    <a:lnL w="12700" cmpd="sng">
+                      <a:solidFill>
+                        <a:srgbClr val="B9D7EA"/>
+                      </a:solidFill>
+                    </a:lnL>
+                    <a:lnR w="12700" cmpd="sng">
+                      <a:solidFill>
+                        <a:srgbClr val="B9D7EA"/>
+                      </a:solidFill>
+                    </a:lnR>
+                    <a:lnT w="12700" cmpd="sng">
+                      <a:solidFill>
+                        <a:srgbClr val="B9D7EA"/>
+                      </a:solidFill>
+                      <a:prstDash val="solid"/>
+                    </a:lnT>
+                    <a:lnB w="12700" cmpd="sng">
+                      <a:solidFill>
+                        <a:srgbClr val="B9D7EA"/>
+                      </a:solidFill>
+                      <a:prstDash val="solid"/>
+                    </a:lnB>
+                    <a:solidFill>
+                      <a:srgbClr val="B9D7EA"/>
+                    </a:solidFill>
+                  </a:tcPr>
+                </a:tc>
+                <a:tc>
+                  <a:txBody>
+                    <a:bodyPr/>
+                    <a:lstStyle/>
+                    <a:p>
+                      <a:pPr algn="l">
+                        <a:lnSpc>
+                          <a:spcPct val="138889"/>
+                        </a:lnSpc>
+                        <a:buNone/>
+                      </a:pPr>
+                      <a:r>
+                        <a:rPr lang="zh-CN" sz="1125">
+                          <a:solidFill>
+                            <a:srgbClr val="000000"/>
+                          </a:solidFill>
+                          <a:effectLst/>
+                        </a:rPr>
+                        <a:t>—</a:t>
+                      </a:r>
+                      <a:endParaRPr lang="zh-CN" sz="1125" b="0" i="0">
+                        <a:solidFill>
+                          <a:srgbClr val="000000"/>
+                        </a:solidFill>
+                        <a:effectLst/>
+                        <a:latin typeface="quote-cjk-patch"/>
+                      </a:endParaRPr>
+                    </a:p>
+                  </a:txBody>
+                  <a:tcPr marL="76200" marR="76200" marT="47625" marB="47625" anchor="ctr">
+                    <a:lnL w="12700" cmpd="sng">
+                      <a:solidFill>
+                        <a:srgbClr val="B9D7EA"/>
+                      </a:solidFill>
+                    </a:lnL>
+                    <a:lnR w="12700" cmpd="sng">
+                      <a:solidFill>
+                        <a:srgbClr val="B9D7EA"/>
+                      </a:solidFill>
+                    </a:lnR>
+                    <a:lnT w="12700" cmpd="sng">
+                      <a:solidFill>
+                        <a:srgbClr val="B9D7EA"/>
+                      </a:solidFill>
+                      <a:prstDash val="solid"/>
+                    </a:lnT>
+                    <a:lnB w="12700" cmpd="sng">
+                      <a:solidFill>
+                        <a:srgbClr val="B9D7EA"/>
+                      </a:solidFill>
+                      <a:prstDash val="solid"/>
+                    </a:lnB>
+                    <a:solidFill>
+                      <a:srgbClr val="B9D7EA"/>
+                    </a:solidFill>
+                  </a:tcPr>
+                </a:tc>
+                <a:tc>
+                  <a:txBody>
+                    <a:bodyPr/>
+                    <a:lstStyle/>
+                    <a:p>
+                      <a:pPr algn="l">
+                        <a:lnSpc>
+                          <a:spcPct val="138889"/>
+                        </a:lnSpc>
+                        <a:buNone/>
+                      </a:pPr>
+                      <a:r>
+                        <a:rPr lang="zh-CN" sz="1125" dirty="0">
+                          <a:solidFill>
+                            <a:srgbClr val="000000"/>
+                          </a:solidFill>
+                          <a:effectLst/>
+                        </a:rPr>
+                        <a:t>看板、风险、Scrum记录、资料归档</a:t>
+                      </a:r>
+                      <a:endParaRPr lang="zh-CN" sz="1125" b="0" i="0" dirty="0">
+                        <a:solidFill>
+                          <a:srgbClr val="000000"/>
+                        </a:solidFill>
+                        <a:effectLst/>
+                        <a:latin typeface="quote-cjk-patch"/>
+                      </a:endParaRPr>
+                    </a:p>
+                  </a:txBody>
+                  <a:tcPr marL="76200" marT="47625" marB="47625" anchor="ctr">
+                    <a:lnL w="12700" cmpd="sng">
+                      <a:solidFill>
+                        <a:srgbClr val="B9D7EA"/>
+                      </a:solidFill>
+                    </a:lnL>
+                    <a:lnR w="12700" cmpd="sng">
+                      <a:solidFill>
+                        <a:srgbClr val="B9D7EA"/>
+                      </a:solidFill>
+                    </a:lnR>
+                    <a:lnT w="12700" cmpd="sng">
+                      <a:solidFill>
+                        <a:srgbClr val="B9D7EA"/>
+                      </a:solidFill>
+                      <a:prstDash val="solid"/>
+                    </a:lnT>
+                    <a:lnB w="12700" cmpd="sng">
+                      <a:solidFill>
+                        <a:srgbClr val="B9D7EA"/>
+                      </a:solidFill>
+                      <a:prstDash val="solid"/>
+                    </a:lnB>
+                    <a:solidFill>
+                      <a:srgbClr val="B9D7EA"/>
+                    </a:solidFill>
+                  </a:tcPr>
+                </a:tc>
+                <a:extLst>
+                  <a:ext uri="{0D108BD9-81ED-4DB2-BD59-A6C34878D82A}">
+                    <a16:rowId xmlns:a16="http://schemas.microsoft.com/office/drawing/2014/main" val="2591260131"/>
+                  </a:ext>
+                </a:extLst>
+              </a:tr>
+            </a:tbl>
+          </a:graphicData>
+        </a:graphic>
+      </p:graphicFrame>
     </p:spTree>
   </p:cSld>
   <p:clrMapOvr>
@@ -23358,7 +25642,7 @@
               <a:defRPr/>
             </a:pPr>
             <a:r>
-              <a:rPr lang="en-US" sz="1200" b="0" i="0" u="none" strike="noStrike">
+              <a:rPr lang="en-US" sz="1200" b="0" i="0" u="none" strike="noStrike" dirty="0" err="1">
                 <a:solidFill>
                   <a:srgbClr val="3C4655"/>
                 </a:solidFill>
@@ -23367,9 +25651,33 @@
                 <a:cs typeface="Noto Sans SC"/>
                 <a:sym typeface="Noto Sans SC"/>
               </a:rPr>
-              <a:t>再交给 US08、US09 显示来源和规格</a:t>
-            </a:r>
-            <a:endParaRPr lang="en-US" sz="1100"/>
+              <a:t>再交给</a:t>
+            </a:r>
+            <a:r>
+              <a:rPr lang="en-US" sz="1200" b="0" i="0" u="none" strike="noStrike" dirty="0">
+                <a:solidFill>
+                  <a:srgbClr val="3C4655"/>
+                </a:solidFill>
+                <a:latin typeface="Noto Sans SC"/>
+                <a:ea typeface="Noto Sans SC"/>
+                <a:cs typeface="Noto Sans SC"/>
+                <a:sym typeface="Noto Sans SC"/>
+              </a:rPr>
+              <a:t> US08、US09 </a:t>
+            </a:r>
+            <a:r>
+              <a:rPr lang="en-US" sz="1200" b="0" i="0" u="none" strike="noStrike" dirty="0" err="1">
+                <a:solidFill>
+                  <a:srgbClr val="3C4655"/>
+                </a:solidFill>
+                <a:latin typeface="Noto Sans SC"/>
+                <a:ea typeface="Noto Sans SC"/>
+                <a:cs typeface="Noto Sans SC"/>
+                <a:sym typeface="Noto Sans SC"/>
+              </a:rPr>
+              <a:t>显示来源和规格</a:t>
+            </a:r>
+            <a:endParaRPr lang="en-US" sz="1100" dirty="0"/>
           </a:p>
           <a:p>
             <a:pPr marL="0" indent="0" algn="l">
@@ -23378,7 +25686,7 @@
               </a:lnSpc>
             </a:pPr>
             <a:r>
-              <a:rPr lang="en-US" sz="1200" b="0" i="0" u="none" strike="noStrike">
+              <a:rPr lang="en-US" sz="1200" b="0" i="0" u="none" strike="noStrike" dirty="0" err="1">
                 <a:solidFill>
                   <a:srgbClr val="3C4655"/>
                 </a:solidFill>
@@ -23387,8 +25695,53 @@
                 <a:cs typeface="Noto Sans SC"/>
                 <a:sym typeface="Noto Sans SC"/>
               </a:rPr>
-              <a:t>交给 US10 显示版本号</a:t>
-            </a:r>
+              <a:t>交给</a:t>
+            </a:r>
+            <a:r>
+              <a:rPr lang="en-US" sz="1200" b="0" i="0" u="none" strike="noStrike" dirty="0">
+                <a:solidFill>
+                  <a:srgbClr val="3C4655"/>
+                </a:solidFill>
+                <a:latin typeface="Noto Sans SC"/>
+                <a:ea typeface="Noto Sans SC"/>
+                <a:cs typeface="Noto Sans SC"/>
+                <a:sym typeface="Noto Sans SC"/>
+              </a:rPr>
+              <a:t> US10 </a:t>
+            </a:r>
+            <a:r>
+              <a:rPr lang="en-US" sz="1200" b="0" i="0" u="none" strike="noStrike" dirty="0" err="1">
+                <a:solidFill>
+                  <a:srgbClr val="3C4655"/>
+                </a:solidFill>
+                <a:latin typeface="Noto Sans SC"/>
+                <a:ea typeface="Noto Sans SC"/>
+                <a:cs typeface="Noto Sans SC"/>
+                <a:sym typeface="Noto Sans SC"/>
+              </a:rPr>
+              <a:t>显示版本</a:t>
+            </a:r>
+            <a:r>
+              <a:rPr lang="zh-CN" altLang="en-US" sz="1200" dirty="0">
+                <a:solidFill>
+                  <a:srgbClr val="3C4655"/>
+                </a:solidFill>
+                <a:latin typeface="Noto Sans SC"/>
+                <a:ea typeface="Noto Sans SC"/>
+                <a:cs typeface="Noto Sans SC"/>
+                <a:sym typeface="Noto Sans SC"/>
+              </a:rPr>
+              <a:t>信息</a:t>
+            </a:r>
+            <a:endParaRPr lang="en-US" sz="1200" b="0" i="0" u="none" strike="noStrike" dirty="0">
+              <a:solidFill>
+                <a:srgbClr val="3C4655"/>
+              </a:solidFill>
+              <a:latin typeface="Noto Sans SC"/>
+              <a:ea typeface="Noto Sans SC"/>
+              <a:cs typeface="Noto Sans SC"/>
+              <a:sym typeface="Noto Sans SC"/>
+            </a:endParaRPr>
           </a:p>
         </p:txBody>
       </p:sp>
@@ -24716,16 +27069,6 @@
 <file path=ppt/slides/slide9.xml><?xml version="1.0" encoding="utf-8"?>
 <p:sld xmlns:a="http://schemas.openxmlformats.org/drawingml/2006/main" xmlns:r="http://schemas.openxmlformats.org/officeDocument/2006/relationships" xmlns:p="http://schemas.openxmlformats.org/presentationml/2006/main">
   <p:cSld>
-    <p:bg>
-      <p:bgPr>
-        <a:solidFill>
-          <a:srgbClr val="FFFFFF">
-            <a:alpha val="100000"/>
-          </a:srgbClr>
-        </a:solidFill>
-        <a:effectLst/>
-      </p:bgPr>
-    </p:bg>
     <p:spTree>
       <p:nvGrpSpPr>
         <p:cNvPr id="1" name=""/>
@@ -24740,583 +27083,78 @@
           <a:chExt cx="0" cy="0"/>
         </a:xfrm>
       </p:grpSpPr>
+      <p:pic>
+        <p:nvPicPr>
+          <p:cNvPr id="3" name="图片 2">
+            <a:extLst>
+              <a:ext uri="{FF2B5EF4-FFF2-40B4-BE49-F238E27FC236}">
+                <a16:creationId xmlns:a16="http://schemas.microsoft.com/office/drawing/2014/main" id="{53AC2460-B948-1BF8-3A73-143BA84BEFD5}"/>
+              </a:ext>
+            </a:extLst>
+          </p:cNvPr>
+          <p:cNvPicPr>
+            <a:picLocks noChangeAspect="1"/>
+          </p:cNvPicPr>
+          <p:nvPr/>
+        </p:nvPicPr>
+        <p:blipFill>
+          <a:blip r:embed="rId2"/>
+          <a:stretch>
+            <a:fillRect/>
+          </a:stretch>
+        </p:blipFill>
+        <p:spPr>
+          <a:xfrm>
+            <a:off x="632603" y="469967"/>
+            <a:ext cx="10624101" cy="4429837"/>
+          </a:xfrm>
+          <a:prstGeom prst="rect">
+            <a:avLst/>
+          </a:prstGeom>
+        </p:spPr>
+      </p:pic>
       <p:sp>
         <p:nvSpPr>
-          <p:cNvPr id="3" name="AutoShape 3"/>
-          <p:cNvSpPr/>
+          <p:cNvPr id="5" name="文本框 4">
+            <a:extLst>
+              <a:ext uri="{FF2B5EF4-FFF2-40B4-BE49-F238E27FC236}">
+                <a16:creationId xmlns:a16="http://schemas.microsoft.com/office/drawing/2014/main" id="{6A91B833-D7AB-5C69-D76A-0EE6D45B7DA7}"/>
+              </a:ext>
+            </a:extLst>
+          </p:cNvPr>
+          <p:cNvSpPr txBox="1"/>
           <p:nvPr/>
         </p:nvSpPr>
         <p:spPr>
           <a:xfrm>
-            <a:off x="1016000" y="1092200"/>
-            <a:ext cx="10160000" cy="558800"/>
+            <a:off x="5375290" y="4899804"/>
+            <a:ext cx="1441420" cy="307777"/>
           </a:xfrm>
           <a:prstGeom prst="rect">
             <a:avLst/>
           </a:prstGeom>
           <a:noFill/>
-          <a:ln w="12700" cap="flat" cmpd="sng">
-            <a:noFill/>
-            <a:prstDash val="solid"/>
-            <a:round/>
-          </a:ln>
         </p:spPr>
         <p:txBody>
-          <a:bodyPr vert="horz" wrap="square" lIns="0" tIns="0" rIns="0" bIns="0" rtlCol="0" anchor="ctr" anchorCtr="0"/>
+          <a:bodyPr wrap="none" rtlCol="0">
+            <a:spAutoFit/>
+          </a:bodyPr>
           <a:lstStyle/>
           <a:p>
-            <a:pPr marL="0" indent="0" algn="l">
-              <a:lnSpc>
-                <a:spcPct val="125000"/>
-              </a:lnSpc>
-              <a:defRPr/>
-            </a:pPr>
-            <a:r>
-              <a:rPr lang="en-US" sz="2800" b="1" i="0" u="none" strike="noStrike" dirty="0" err="1">
-                <a:solidFill>
-                  <a:srgbClr val="2B2F36"/>
-                </a:solidFill>
-                <a:latin typeface="Noto Sans SC"/>
-                <a:ea typeface="Noto Sans SC"/>
-                <a:cs typeface="Noto Sans SC"/>
-                <a:sym typeface="Noto Sans SC"/>
-              </a:rPr>
-              <a:t>完成</a:t>
-            </a:r>
-            <a:r>
-              <a:rPr lang="zh-CN" altLang="en-US" sz="2800" b="1" i="0" u="none" strike="noStrike" dirty="0">
-                <a:solidFill>
-                  <a:srgbClr val="2B2F36"/>
-                </a:solidFill>
-                <a:latin typeface="Noto Sans SC"/>
-                <a:ea typeface="Noto Sans SC"/>
-                <a:cs typeface="Noto Sans SC"/>
-                <a:sym typeface="Noto Sans SC"/>
-              </a:rPr>
-              <a:t>定义</a:t>
-            </a:r>
-            <a:endParaRPr lang="en-US" sz="1100" dirty="0"/>
-          </a:p>
-        </p:txBody>
-      </p:sp>
-      <p:sp>
-        <p:nvSpPr>
-          <p:cNvPr id="4" name="AutoShape 4"/>
-          <p:cNvSpPr/>
-          <p:nvPr/>
-        </p:nvSpPr>
-        <p:spPr>
-          <a:xfrm>
-            <a:off x="1016000" y="2159000"/>
-            <a:ext cx="762000" cy="508000"/>
-          </a:xfrm>
-          <a:prstGeom prst="rect">
-            <a:avLst/>
-          </a:prstGeom>
-          <a:noFill/>
-          <a:ln w="12700" cap="flat" cmpd="sng">
-            <a:noFill/>
-            <a:prstDash val="solid"/>
-            <a:round/>
-          </a:ln>
-        </p:spPr>
-        <p:txBody>
-          <a:bodyPr vert="horz" wrap="square" lIns="0" tIns="0" rIns="0" bIns="0" rtlCol="0" anchor="ctr" anchorCtr="0"/>
-          <a:lstStyle/>
-          <a:p>
-            <a:pPr marL="0" indent="0" algn="l">
-              <a:lnSpc>
-                <a:spcPct val="125000"/>
-              </a:lnSpc>
-              <a:defRPr/>
-            </a:pPr>
-            <a:r>
-              <a:rPr lang="en-US" sz="2600" b="1" i="0" u="none" strike="noStrike">
-                <a:solidFill>
-                  <a:srgbClr val="4472C4"/>
-                </a:solidFill>
-                <a:latin typeface="Noto Sans SC"/>
-                <a:ea typeface="Noto Sans SC"/>
-                <a:cs typeface="Noto Sans SC"/>
-                <a:sym typeface="Noto Sans SC"/>
-              </a:rPr>
-              <a:t>1</a:t>
-            </a:r>
-            <a:endParaRPr lang="en-US" sz="1100"/>
-          </a:p>
-        </p:txBody>
-      </p:sp>
-      <p:sp>
-        <p:nvSpPr>
-          <p:cNvPr id="5" name="AutoShape 5"/>
-          <p:cNvSpPr/>
-          <p:nvPr/>
-        </p:nvSpPr>
-        <p:spPr>
-          <a:xfrm>
-            <a:off x="1778000" y="2184400"/>
-            <a:ext cx="9398000" cy="508000"/>
-          </a:xfrm>
-          <a:prstGeom prst="rect">
-            <a:avLst/>
-          </a:prstGeom>
-          <a:noFill/>
-          <a:ln w="12700" cap="flat" cmpd="sng">
-            <a:noFill/>
-            <a:prstDash val="solid"/>
-            <a:round/>
-          </a:ln>
-        </p:spPr>
-        <p:txBody>
-          <a:bodyPr vert="horz" wrap="square" lIns="0" tIns="0" rIns="0" bIns="0" rtlCol="0" anchor="ctr" anchorCtr="0"/>
-          <a:lstStyle/>
-          <a:p>
-            <a:pPr marL="0" indent="0" algn="l">
-              <a:lnSpc>
-                <a:spcPct val="125000"/>
-              </a:lnSpc>
-              <a:defRPr/>
-            </a:pPr>
-            <a:r>
-              <a:rPr lang="en-US" sz="1400" b="0" i="0" u="none" strike="noStrike">
-                <a:solidFill>
-                  <a:srgbClr val="3C4655"/>
-                </a:solidFill>
-                <a:latin typeface="Noto Sans SC"/>
-                <a:ea typeface="Noto Sans SC"/>
-                <a:cs typeface="Noto Sans SC"/>
-                <a:sym typeface="Noto Sans SC"/>
-              </a:rPr>
-              <a:t>讨论二中验收用例都跑过，正常、异常、边界情况都有结果。</a:t>
-            </a:r>
-            <a:endParaRPr lang="en-US" sz="1100"/>
-          </a:p>
-        </p:txBody>
-      </p:sp>
-      <p:sp>
-        <p:nvSpPr>
-          <p:cNvPr id="6" name="AutoShape 6"/>
-          <p:cNvSpPr/>
-          <p:nvPr/>
-        </p:nvSpPr>
-        <p:spPr>
-          <a:xfrm>
-            <a:off x="1016000" y="2921000"/>
-            <a:ext cx="762000" cy="508000"/>
-          </a:xfrm>
-          <a:prstGeom prst="rect">
-            <a:avLst/>
-          </a:prstGeom>
-          <a:noFill/>
-          <a:ln w="12700" cap="flat" cmpd="sng">
-            <a:noFill/>
-            <a:prstDash val="solid"/>
-            <a:round/>
-          </a:ln>
-        </p:spPr>
-        <p:txBody>
-          <a:bodyPr vert="horz" wrap="square" lIns="0" tIns="0" rIns="0" bIns="0" rtlCol="0" anchor="ctr" anchorCtr="0"/>
-          <a:lstStyle/>
-          <a:p>
-            <a:pPr marL="0" indent="0" algn="l">
-              <a:lnSpc>
-                <a:spcPct val="125000"/>
-              </a:lnSpc>
-              <a:defRPr/>
-            </a:pPr>
-            <a:r>
-              <a:rPr lang="en-US" sz="2600" b="1" i="0" u="none" strike="noStrike">
-                <a:solidFill>
-                  <a:srgbClr val="4472C4"/>
-                </a:solidFill>
-                <a:latin typeface="Noto Sans SC"/>
-                <a:ea typeface="Noto Sans SC"/>
-                <a:cs typeface="Noto Sans SC"/>
-                <a:sym typeface="Noto Sans SC"/>
-              </a:rPr>
-              <a:t>2</a:t>
-            </a:r>
-            <a:endParaRPr lang="en-US" sz="1100"/>
-          </a:p>
-        </p:txBody>
-      </p:sp>
-      <p:sp>
-        <p:nvSpPr>
-          <p:cNvPr id="7" name="AutoShape 7"/>
-          <p:cNvSpPr/>
-          <p:nvPr/>
-        </p:nvSpPr>
-        <p:spPr>
-          <a:xfrm>
-            <a:off x="1778000" y="2946400"/>
-            <a:ext cx="9398000" cy="508000"/>
-          </a:xfrm>
-          <a:prstGeom prst="rect">
-            <a:avLst/>
-          </a:prstGeom>
-          <a:noFill/>
-          <a:ln w="12700" cap="flat" cmpd="sng">
-            <a:noFill/>
-            <a:prstDash val="solid"/>
-            <a:round/>
-          </a:ln>
-        </p:spPr>
-        <p:txBody>
-          <a:bodyPr vert="horz" wrap="square" lIns="0" tIns="0" rIns="0" bIns="0" rtlCol="0" anchor="ctr" anchorCtr="0"/>
-          <a:lstStyle/>
-          <a:p>
-            <a:pPr marL="0" indent="0" algn="l">
-              <a:lnSpc>
-                <a:spcPct val="125000"/>
-              </a:lnSpc>
-              <a:defRPr/>
-            </a:pPr>
-            <a:r>
-              <a:rPr lang="en-US" sz="1400" b="0" i="0" u="none" strike="noStrike">
-                <a:solidFill>
-                  <a:srgbClr val="3C4655"/>
-                </a:solidFill>
-                <a:latin typeface="Noto Sans SC"/>
-                <a:ea typeface="Noto Sans SC"/>
-                <a:cs typeface="Noto Sans SC"/>
-                <a:sym typeface="Noto Sans SC"/>
-              </a:rPr>
-              <a:t>确保确定性，相同输入得到相同结果；错误反馈明确。</a:t>
-            </a:r>
-            <a:endParaRPr lang="en-US" sz="1100"/>
-          </a:p>
-        </p:txBody>
-      </p:sp>
-      <p:sp>
-        <p:nvSpPr>
-          <p:cNvPr id="8" name="AutoShape 8"/>
-          <p:cNvSpPr/>
-          <p:nvPr/>
-        </p:nvSpPr>
-        <p:spPr>
-          <a:xfrm>
-            <a:off x="1016000" y="3683000"/>
-            <a:ext cx="762000" cy="508000"/>
-          </a:xfrm>
-          <a:prstGeom prst="rect">
-            <a:avLst/>
-          </a:prstGeom>
-          <a:noFill/>
-          <a:ln w="12700" cap="flat" cmpd="sng">
-            <a:noFill/>
-            <a:prstDash val="solid"/>
-            <a:round/>
-          </a:ln>
-        </p:spPr>
-        <p:txBody>
-          <a:bodyPr vert="horz" wrap="square" lIns="0" tIns="0" rIns="0" bIns="0" rtlCol="0" anchor="ctr" anchorCtr="0"/>
-          <a:lstStyle/>
-          <a:p>
-            <a:pPr marL="0" indent="0" algn="l">
-              <a:lnSpc>
-                <a:spcPct val="125000"/>
-              </a:lnSpc>
-              <a:defRPr/>
-            </a:pPr>
-            <a:r>
-              <a:rPr lang="en-US" sz="2600" b="1" i="0" u="none" strike="noStrike">
-                <a:solidFill>
-                  <a:srgbClr val="4472C4"/>
-                </a:solidFill>
-                <a:latin typeface="Noto Sans SC"/>
-                <a:ea typeface="Noto Sans SC"/>
-                <a:cs typeface="Noto Sans SC"/>
-                <a:sym typeface="Noto Sans SC"/>
-              </a:rPr>
-              <a:t>3</a:t>
-            </a:r>
-            <a:endParaRPr lang="en-US" sz="1100"/>
-          </a:p>
-        </p:txBody>
-      </p:sp>
-      <p:sp>
-        <p:nvSpPr>
-          <p:cNvPr id="9" name="AutoShape 9"/>
-          <p:cNvSpPr/>
-          <p:nvPr/>
-        </p:nvSpPr>
-        <p:spPr>
-          <a:xfrm>
-            <a:off x="1778000" y="3708400"/>
-            <a:ext cx="9398000" cy="508000"/>
-          </a:xfrm>
-          <a:prstGeom prst="rect">
-            <a:avLst/>
-          </a:prstGeom>
-          <a:noFill/>
-          <a:ln w="12700" cap="flat" cmpd="sng">
-            <a:noFill/>
-            <a:prstDash val="solid"/>
-            <a:round/>
-          </a:ln>
-        </p:spPr>
-        <p:txBody>
-          <a:bodyPr vert="horz" wrap="square" lIns="0" tIns="0" rIns="0" bIns="0" rtlCol="0" anchor="ctr" anchorCtr="0"/>
-          <a:lstStyle/>
-          <a:p>
-            <a:pPr marL="0" indent="0" algn="l">
-              <a:lnSpc>
-                <a:spcPct val="125000"/>
-              </a:lnSpc>
-              <a:defRPr/>
-            </a:pPr>
-            <a:r>
-              <a:rPr lang="en-US" sz="1400" b="0" i="0" u="none" strike="noStrike">
-                <a:solidFill>
-                  <a:srgbClr val="3C4655"/>
-                </a:solidFill>
-                <a:latin typeface="Noto Sans SC"/>
-                <a:ea typeface="Noto Sans SC"/>
-                <a:cs typeface="Noto Sans SC"/>
-                <a:sym typeface="Noto Sans SC"/>
-              </a:rPr>
-              <a:t>完成测试与交接，不遗漏异常情况。</a:t>
-            </a:r>
-            <a:endParaRPr lang="en-US" sz="1100"/>
-          </a:p>
-        </p:txBody>
-      </p:sp>
-      <p:sp>
-        <p:nvSpPr>
-          <p:cNvPr id="10" name="AutoShape 10"/>
-          <p:cNvSpPr/>
-          <p:nvPr/>
-        </p:nvSpPr>
-        <p:spPr>
-          <a:xfrm>
-            <a:off x="1016000" y="4445000"/>
-            <a:ext cx="762000" cy="508000"/>
-          </a:xfrm>
-          <a:prstGeom prst="rect">
-            <a:avLst/>
-          </a:prstGeom>
-          <a:noFill/>
-          <a:ln w="12700" cap="flat" cmpd="sng">
-            <a:noFill/>
-            <a:prstDash val="solid"/>
-            <a:round/>
-          </a:ln>
-        </p:spPr>
-        <p:txBody>
-          <a:bodyPr vert="horz" wrap="square" lIns="0" tIns="0" rIns="0" bIns="0" rtlCol="0" anchor="ctr" anchorCtr="0"/>
-          <a:lstStyle/>
-          <a:p>
-            <a:pPr marL="0" indent="0" algn="l">
-              <a:lnSpc>
-                <a:spcPct val="125000"/>
-              </a:lnSpc>
-              <a:defRPr/>
-            </a:pPr>
-            <a:r>
-              <a:rPr lang="en-US" sz="2600" b="1" i="0" u="none" strike="noStrike">
-                <a:solidFill>
-                  <a:srgbClr val="4472C4"/>
-                </a:solidFill>
-                <a:latin typeface="Noto Sans SC"/>
-                <a:ea typeface="Noto Sans SC"/>
-                <a:cs typeface="Noto Sans SC"/>
-                <a:sym typeface="Noto Sans SC"/>
-              </a:rPr>
-              <a:t>4</a:t>
-            </a:r>
-            <a:endParaRPr lang="en-US" sz="1100"/>
-          </a:p>
-        </p:txBody>
-      </p:sp>
-      <p:sp>
-        <p:nvSpPr>
-          <p:cNvPr id="11" name="AutoShape 11"/>
-          <p:cNvSpPr/>
-          <p:nvPr/>
-        </p:nvSpPr>
-        <p:spPr>
-          <a:xfrm>
-            <a:off x="1778000" y="4470400"/>
-            <a:ext cx="9398000" cy="508000"/>
-          </a:xfrm>
-          <a:prstGeom prst="rect">
-            <a:avLst/>
-          </a:prstGeom>
-          <a:noFill/>
-          <a:ln w="12700" cap="flat" cmpd="sng">
-            <a:noFill/>
-            <a:prstDash val="solid"/>
-            <a:round/>
-          </a:ln>
-        </p:spPr>
-        <p:txBody>
-          <a:bodyPr vert="horz" wrap="square" lIns="0" tIns="0" rIns="0" bIns="0" rtlCol="0" anchor="ctr" anchorCtr="0"/>
-          <a:lstStyle/>
-          <a:p>
-            <a:pPr marL="0" indent="0" algn="l">
-              <a:lnSpc>
-                <a:spcPct val="125000"/>
-              </a:lnSpc>
-              <a:defRPr/>
-            </a:pPr>
-            <a:r>
-              <a:rPr lang="en-US" sz="1400" b="0" i="0" u="none" strike="noStrike">
-                <a:solidFill>
-                  <a:srgbClr val="3C4655"/>
-                </a:solidFill>
-                <a:latin typeface="Noto Sans SC"/>
-                <a:ea typeface="Noto Sans SC"/>
-                <a:cs typeface="Noto Sans SC"/>
-                <a:sym typeface="Noto Sans SC"/>
-              </a:rPr>
-              <a:t>记录完整详细。用例号、输入、预期结果、实际结果、通过情况、测试人、截图或日志。</a:t>
-            </a:r>
-            <a:endParaRPr lang="en-US" sz="1100"/>
-          </a:p>
-        </p:txBody>
-      </p:sp>
-      <p:sp>
-        <p:nvSpPr>
-          <p:cNvPr id="12" name="AutoShape 12"/>
-          <p:cNvSpPr/>
-          <p:nvPr/>
-        </p:nvSpPr>
-        <p:spPr>
-          <a:xfrm>
-            <a:off x="1016000" y="5207000"/>
-            <a:ext cx="762000" cy="508000"/>
-          </a:xfrm>
-          <a:prstGeom prst="rect">
-            <a:avLst/>
-          </a:prstGeom>
-          <a:noFill/>
-          <a:ln w="12700" cap="flat" cmpd="sng">
-            <a:noFill/>
-            <a:prstDash val="solid"/>
-            <a:round/>
-          </a:ln>
-        </p:spPr>
-        <p:txBody>
-          <a:bodyPr vert="horz" wrap="square" lIns="0" tIns="0" rIns="0" bIns="0" rtlCol="0" anchor="ctr" anchorCtr="0"/>
-          <a:lstStyle/>
-          <a:p>
-            <a:pPr marL="0" indent="0" algn="l">
-              <a:lnSpc>
-                <a:spcPct val="125000"/>
-              </a:lnSpc>
-              <a:defRPr/>
-            </a:pPr>
-            <a:r>
-              <a:rPr lang="en-US" sz="2600" b="1" i="0" u="none" strike="noStrike">
-                <a:solidFill>
-                  <a:srgbClr val="ED7D31"/>
-                </a:solidFill>
-                <a:latin typeface="Noto Sans SC"/>
-                <a:ea typeface="Noto Sans SC"/>
-                <a:cs typeface="Noto Sans SC"/>
-                <a:sym typeface="Noto Sans SC"/>
-              </a:rPr>
-              <a:t>5</a:t>
-            </a:r>
-            <a:endParaRPr lang="en-US" sz="1100"/>
-          </a:p>
-        </p:txBody>
-      </p:sp>
-      <p:sp>
-        <p:nvSpPr>
-          <p:cNvPr id="13" name="AutoShape 13"/>
-          <p:cNvSpPr/>
-          <p:nvPr/>
-        </p:nvSpPr>
-        <p:spPr>
-          <a:xfrm>
-            <a:off x="1778000" y="5232400"/>
-            <a:ext cx="9398000" cy="635000"/>
-          </a:xfrm>
-          <a:prstGeom prst="rect">
-            <a:avLst/>
-          </a:prstGeom>
-          <a:noFill/>
-          <a:ln w="12700" cap="flat" cmpd="sng">
-            <a:noFill/>
-            <a:prstDash val="solid"/>
-            <a:round/>
-          </a:ln>
-        </p:spPr>
-        <p:txBody>
-          <a:bodyPr vert="horz" wrap="square" lIns="0" tIns="0" rIns="0" bIns="0" rtlCol="0" anchor="ctr" anchorCtr="0"/>
-          <a:lstStyle/>
-          <a:p>
-            <a:pPr marL="0" indent="0" algn="l">
-              <a:lnSpc>
-                <a:spcPct val="125000"/>
-              </a:lnSpc>
-              <a:defRPr/>
-            </a:pPr>
-            <a:r>
-              <a:rPr lang="en-US" sz="1400" b="0" i="0" u="none" strike="noStrike">
-                <a:solidFill>
-                  <a:srgbClr val="3C4655"/>
-                </a:solidFill>
-                <a:latin typeface="Noto Sans SC"/>
-                <a:ea typeface="Noto Sans SC"/>
-                <a:cs typeface="Noto Sans SC"/>
-                <a:sym typeface="Noto Sans SC"/>
-              </a:rPr>
-              <a:t>PO 查看工作证据并签字完成。</a:t>
-            </a:r>
-            <a:endParaRPr lang="en-US" sz="1100"/>
-          </a:p>
-        </p:txBody>
-      </p:sp>
-      <p:sp>
-        <p:nvSpPr>
-          <p:cNvPr id="14" name="AutoShape 14"/>
-          <p:cNvSpPr/>
-          <p:nvPr/>
-        </p:nvSpPr>
-        <p:spPr>
-          <a:xfrm>
-            <a:off x="10668000" y="6350000"/>
-            <a:ext cx="508000" cy="304800"/>
-          </a:xfrm>
-          <a:prstGeom prst="rect">
-            <a:avLst/>
-          </a:prstGeom>
-          <a:noFill/>
-          <a:ln w="12700" cap="flat" cmpd="sng">
-            <a:noFill/>
-            <a:prstDash val="solid"/>
-            <a:round/>
-          </a:ln>
-        </p:spPr>
-        <p:txBody>
-          <a:bodyPr vert="horz" wrap="square" lIns="0" tIns="0" rIns="0" bIns="0" rtlCol="0" anchor="ctr" anchorCtr="0"/>
-          <a:lstStyle/>
-          <a:p>
-            <a:pPr marL="0" indent="0" algn="r">
-              <a:lnSpc>
-                <a:spcPct val="125000"/>
-              </a:lnSpc>
-              <a:defRPr/>
-            </a:pPr>
-            <a:r>
-              <a:rPr lang="en-US" sz="1100" b="0" i="0" u="none" strike="noStrike" dirty="0">
-                <a:solidFill>
-                  <a:srgbClr val="A0A8B4"/>
-                </a:solidFill>
-                <a:latin typeface="Noto Sans SC"/>
-                <a:ea typeface="Noto Sans SC"/>
-                <a:cs typeface="Noto Sans SC"/>
-                <a:sym typeface="Noto Sans SC"/>
-              </a:rPr>
-              <a:t>09 / 11</a:t>
-            </a:r>
-            <a:endParaRPr lang="en-US" sz="1100" dirty="0"/>
+            <a:r>
+              <a:rPr lang="zh-CN" altLang="zh-CN" dirty="0"/>
+              <a:t>项目管理甘特图</a:t>
+            </a:r>
+            <a:endParaRPr lang="zh-CN" altLang="en-US" dirty="0"/>
           </a:p>
         </p:txBody>
       </p:sp>
     </p:spTree>
+    <p:extLst>
+      <p:ext uri="{BB962C8B-B14F-4D97-AF65-F5344CB8AC3E}">
+        <p14:creationId xmlns:p14="http://schemas.microsoft.com/office/powerpoint/2010/main" val="2068190360"/>
+      </p:ext>
+    </p:extLst>
   </p:cSld>
   <p:clrMapOvr>
     <a:masterClrMapping/>
